--- a/docs/CBA-Studio-Design-System-2.3.pptx
+++ b/docs/CBA-Studio-Design-System-2.3.pptx
@@ -3673,8 +3673,8 @@
         </p:nvSpPr>
         <p:spPr>
           <a:xfrm>
-            <a:off x="762000" y="10345801"/>
-            <a:ext cx="8890000" cy="203200"/>
+            <a:off x="762000" y="10308958"/>
+            <a:ext cx="8890000" cy="240042"/>
           </a:xfrm>
           <a:prstGeom prst="rect">
             <a:avLst/>
@@ -3712,8 +3712,8 @@
         </p:nvSpPr>
         <p:spPr>
           <a:xfrm>
-            <a:off x="18073751" y="10345801"/>
-            <a:ext cx="1270000" cy="203200"/>
+            <a:off x="18073751" y="10308958"/>
+            <a:ext cx="1270000" cy="240042"/>
           </a:xfrm>
           <a:prstGeom prst="rect">
             <a:avLst/>
@@ -3777,7 +3777,7 @@
         </p:nvSpPr>
         <p:spPr>
           <a:xfrm>
-            <a:off x="762000" y="2171194"/>
+            <a:off x="762000" y="2152773"/>
             <a:ext cx="13809313" cy="3846829"/>
           </a:xfrm>
           <a:prstGeom prst="rect">
@@ -3816,7 +3816,7 @@
         </p:nvSpPr>
         <p:spPr>
           <a:xfrm>
-            <a:off x="762000" y="5495322"/>
+            <a:off x="762000" y="5476901"/>
             <a:ext cx="13809313" cy="1107887"/>
           </a:xfrm>
           <a:prstGeom prst="rect">
@@ -3855,7 +3855,7 @@
         </p:nvSpPr>
         <p:spPr>
           <a:xfrm>
-            <a:off x="762000" y="6814366"/>
+            <a:off x="762000" y="6795945"/>
             <a:ext cx="9036875" cy="1360239"/>
           </a:xfrm>
           <a:prstGeom prst="rect">
@@ -3894,8 +3894,8 @@
         </p:nvSpPr>
         <p:spPr>
           <a:xfrm>
-            <a:off x="762000" y="10345801"/>
-            <a:ext cx="8890000" cy="203200"/>
+            <a:off x="762000" y="10308958"/>
+            <a:ext cx="8890000" cy="240042"/>
           </a:xfrm>
           <a:prstGeom prst="rect">
             <a:avLst/>
@@ -3933,8 +3933,8 @@
         </p:nvSpPr>
         <p:spPr>
           <a:xfrm>
-            <a:off x="18073751" y="10345801"/>
-            <a:ext cx="1270000" cy="203200"/>
+            <a:off x="18073751" y="10308958"/>
+            <a:ext cx="1270000" cy="240042"/>
           </a:xfrm>
           <a:prstGeom prst="rect">
             <a:avLst/>
@@ -4076,7 +4076,7 @@
         </p:nvSpPr>
         <p:spPr>
           <a:xfrm>
-            <a:off x="762000" y="5344785"/>
+            <a:off x="762000" y="5326364"/>
             <a:ext cx="3309950" cy="1934583"/>
           </a:xfrm>
           <a:prstGeom prst="roundRect">
@@ -4173,7 +4173,7 @@
         </p:nvSpPr>
         <p:spPr>
           <a:xfrm>
-            <a:off x="4579950" y="5344785"/>
+            <a:off x="4579950" y="5326364"/>
             <a:ext cx="3309950" cy="1934583"/>
           </a:xfrm>
           <a:prstGeom prst="roundRect">
@@ -4270,7 +4270,7 @@
         </p:nvSpPr>
         <p:spPr>
           <a:xfrm>
-            <a:off x="8397900" y="5344785"/>
+            <a:off x="8397900" y="5326364"/>
             <a:ext cx="3309950" cy="1934583"/>
           </a:xfrm>
           <a:prstGeom prst="roundRect">
@@ -4367,7 +4367,7 @@
         </p:nvSpPr>
         <p:spPr>
           <a:xfrm>
-            <a:off x="12215850" y="5344785"/>
+            <a:off x="12215850" y="5326364"/>
             <a:ext cx="3309950" cy="1934583"/>
           </a:xfrm>
           <a:prstGeom prst="roundRect">
@@ -4464,7 +4464,7 @@
         </p:nvSpPr>
         <p:spPr>
           <a:xfrm>
-            <a:off x="16033800" y="5344785"/>
+            <a:off x="16033800" y="5326364"/>
             <a:ext cx="3309950" cy="1934583"/>
           </a:xfrm>
           <a:prstGeom prst="roundRect">
@@ -4561,8 +4561,8 @@
         </p:nvSpPr>
         <p:spPr>
           <a:xfrm>
-            <a:off x="762000" y="10345801"/>
-            <a:ext cx="8890000" cy="203200"/>
+            <a:off x="762000" y="10308958"/>
+            <a:ext cx="8890000" cy="240042"/>
           </a:xfrm>
           <a:prstGeom prst="rect">
             <a:avLst/>
@@ -4600,8 +4600,8 @@
         </p:nvSpPr>
         <p:spPr>
           <a:xfrm>
-            <a:off x="18073751" y="10345801"/>
-            <a:ext cx="1270000" cy="203200"/>
+            <a:off x="18073751" y="10308958"/>
+            <a:ext cx="1270000" cy="240042"/>
           </a:xfrm>
           <a:prstGeom prst="rect">
             <a:avLst/>
@@ -4744,11 +4744,11 @@
         <p:spPr>
           <a:xfrm>
             <a:off x="762000" y="2998089"/>
-            <a:ext cx="9036875" cy="6585711"/>
+            <a:ext cx="9036875" cy="6548869"/>
           </a:xfrm>
           <a:prstGeom prst="roundRect">
             <a:avLst>
-              <a:gd name="adj" fmla="val 3856"/>
+              <a:gd name="adj" fmla="val 3878"/>
             </a:avLst>
           </a:prstGeom>
           <a:solidFill>
@@ -5062,8 +5062,8 @@
         </p:nvSpPr>
         <p:spPr>
           <a:xfrm>
-            <a:off x="762000" y="10345801"/>
-            <a:ext cx="8890000" cy="203200"/>
+            <a:off x="762000" y="10308958"/>
+            <a:ext cx="8890000" cy="240042"/>
           </a:xfrm>
           <a:prstGeom prst="rect">
             <a:avLst/>
@@ -5101,8 +5101,8 @@
         </p:nvSpPr>
         <p:spPr>
           <a:xfrm>
-            <a:off x="18073751" y="10345801"/>
-            <a:ext cx="1270000" cy="203200"/>
+            <a:off x="18073751" y="10308958"/>
+            <a:ext cx="1270000" cy="240042"/>
           </a:xfrm>
           <a:prstGeom prst="rect">
             <a:avLst/>
@@ -5245,11 +5245,11 @@
         <p:spPr>
           <a:xfrm>
             <a:off x="762000" y="2998089"/>
-            <a:ext cx="9036875" cy="6585711"/>
+            <a:ext cx="9036875" cy="6548869"/>
           </a:xfrm>
           <a:prstGeom prst="roundRect">
             <a:avLst>
-              <a:gd name="adj" fmla="val 3856"/>
+              <a:gd name="adj" fmla="val 3878"/>
             </a:avLst>
           </a:prstGeom>
           <a:solidFill>
@@ -5563,8 +5563,8 @@
         </p:nvSpPr>
         <p:spPr>
           <a:xfrm>
-            <a:off x="762000" y="10345801"/>
-            <a:ext cx="8890000" cy="203200"/>
+            <a:off x="762000" y="10308958"/>
+            <a:ext cx="8890000" cy="240042"/>
           </a:xfrm>
           <a:prstGeom prst="rect">
             <a:avLst/>
@@ -5602,8 +5602,8 @@
         </p:nvSpPr>
         <p:spPr>
           <a:xfrm>
-            <a:off x="18073751" y="10345801"/>
-            <a:ext cx="1270000" cy="203200"/>
+            <a:off x="18073751" y="10308958"/>
+            <a:ext cx="1270000" cy="240042"/>
           </a:xfrm>
           <a:prstGeom prst="rect">
             <a:avLst/>
@@ -5746,11 +5746,11 @@
         <p:spPr>
           <a:xfrm>
             <a:off x="762000" y="2998089"/>
-            <a:ext cx="9036875" cy="6585711"/>
+            <a:ext cx="9036875" cy="6548869"/>
           </a:xfrm>
           <a:prstGeom prst="roundRect">
             <a:avLst>
-              <a:gd name="adj" fmla="val 3856"/>
+              <a:gd name="adj" fmla="val 3878"/>
             </a:avLst>
           </a:prstGeom>
           <a:solidFill>
@@ -6066,8 +6066,8 @@
         </p:nvSpPr>
         <p:spPr>
           <a:xfrm>
-            <a:off x="762000" y="10345801"/>
-            <a:ext cx="8890000" cy="203200"/>
+            <a:off x="762000" y="10308958"/>
+            <a:ext cx="8890000" cy="240042"/>
           </a:xfrm>
           <a:prstGeom prst="rect">
             <a:avLst/>
@@ -6105,8 +6105,8 @@
         </p:nvSpPr>
         <p:spPr>
           <a:xfrm>
-            <a:off x="18073751" y="10345801"/>
-            <a:ext cx="1270000" cy="203200"/>
+            <a:off x="18073751" y="10308958"/>
+            <a:ext cx="1270000" cy="240042"/>
           </a:xfrm>
           <a:prstGeom prst="rect">
             <a:avLst/>
@@ -6249,11 +6249,11 @@
         <p:spPr>
           <a:xfrm>
             <a:off x="762000" y="2998089"/>
-            <a:ext cx="9036875" cy="6585711"/>
+            <a:ext cx="9036875" cy="6548869"/>
           </a:xfrm>
           <a:prstGeom prst="roundRect">
             <a:avLst>
-              <a:gd name="adj" fmla="val 3856"/>
+              <a:gd name="adj" fmla="val 3878"/>
             </a:avLst>
           </a:prstGeom>
           <a:solidFill>
@@ -6567,8 +6567,8 @@
         </p:nvSpPr>
         <p:spPr>
           <a:xfrm>
-            <a:off x="762000" y="10345801"/>
-            <a:ext cx="8890000" cy="203200"/>
+            <a:off x="762000" y="10308958"/>
+            <a:ext cx="8890000" cy="240042"/>
           </a:xfrm>
           <a:prstGeom prst="rect">
             <a:avLst/>
@@ -6606,8 +6606,8 @@
         </p:nvSpPr>
         <p:spPr>
           <a:xfrm>
-            <a:off x="18073751" y="10345801"/>
-            <a:ext cx="1270000" cy="203200"/>
+            <a:off x="18073751" y="10308958"/>
+            <a:ext cx="1270000" cy="240042"/>
           </a:xfrm>
           <a:prstGeom prst="rect">
             <a:avLst/>
@@ -6750,11 +6750,11 @@
         <p:spPr>
           <a:xfrm>
             <a:off x="762000" y="2998089"/>
-            <a:ext cx="9036875" cy="6585711"/>
+            <a:ext cx="9036875" cy="6548869"/>
           </a:xfrm>
           <a:prstGeom prst="roundRect">
             <a:avLst>
-              <a:gd name="adj" fmla="val 3856"/>
+              <a:gd name="adj" fmla="val 3878"/>
             </a:avLst>
           </a:prstGeom>
           <a:solidFill>
@@ -7068,8 +7068,8 @@
         </p:nvSpPr>
         <p:spPr>
           <a:xfrm>
-            <a:off x="762000" y="10345801"/>
-            <a:ext cx="8890000" cy="203200"/>
+            <a:off x="762000" y="10308958"/>
+            <a:ext cx="8890000" cy="240042"/>
           </a:xfrm>
           <a:prstGeom prst="rect">
             <a:avLst/>
@@ -7107,8 +7107,8 @@
         </p:nvSpPr>
         <p:spPr>
           <a:xfrm>
-            <a:off x="18073751" y="10345801"/>
-            <a:ext cx="1270000" cy="203200"/>
+            <a:off x="18073751" y="10308958"/>
+            <a:ext cx="1270000" cy="240042"/>
           </a:xfrm>
           <a:prstGeom prst="rect">
             <a:avLst/>
@@ -7250,7 +7250,7 @@
         </p:nvSpPr>
         <p:spPr>
           <a:xfrm>
-            <a:off x="762000" y="4881702"/>
+            <a:off x="762000" y="4863281"/>
             <a:ext cx="5855250" cy="2818485"/>
           </a:xfrm>
           <a:prstGeom prst="roundRect">
@@ -7329,7 +7329,7 @@
         </p:nvSpPr>
         <p:spPr>
           <a:xfrm>
-            <a:off x="7125250" y="4881702"/>
+            <a:off x="7125250" y="4863281"/>
             <a:ext cx="5855250" cy="2818485"/>
           </a:xfrm>
           <a:prstGeom prst="roundRect">
@@ -7408,7 +7408,7 @@
         </p:nvSpPr>
         <p:spPr>
           <a:xfrm>
-            <a:off x="13488500" y="4881702"/>
+            <a:off x="13488500" y="4863281"/>
             <a:ext cx="5855250" cy="2818485"/>
           </a:xfrm>
           <a:prstGeom prst="roundRect">
@@ -7487,8 +7487,8 @@
         </p:nvSpPr>
         <p:spPr>
           <a:xfrm>
-            <a:off x="762000" y="10345801"/>
-            <a:ext cx="8890000" cy="203200"/>
+            <a:off x="762000" y="10308958"/>
+            <a:ext cx="8890000" cy="240042"/>
           </a:xfrm>
           <a:prstGeom prst="rect">
             <a:avLst/>
@@ -7526,8 +7526,8 @@
         </p:nvSpPr>
         <p:spPr>
           <a:xfrm>
-            <a:off x="18073751" y="10345801"/>
-            <a:ext cx="1270000" cy="203200"/>
+            <a:off x="18073751" y="10308958"/>
+            <a:ext cx="1270000" cy="240042"/>
           </a:xfrm>
           <a:prstGeom prst="rect">
             <a:avLst/>
@@ -7857,8 +7857,8 @@
         </p:nvSpPr>
         <p:spPr>
           <a:xfrm>
-            <a:off x="762000" y="10345801"/>
-            <a:ext cx="8890000" cy="203200"/>
+            <a:off x="762000" y="10308958"/>
+            <a:ext cx="8890000" cy="240042"/>
           </a:xfrm>
           <a:prstGeom prst="rect">
             <a:avLst/>
@@ -7896,8 +7896,8 @@
         </p:nvSpPr>
         <p:spPr>
           <a:xfrm>
-            <a:off x="18073751" y="10345801"/>
-            <a:ext cx="1270000" cy="203200"/>
+            <a:off x="18073751" y="10308958"/>
+            <a:ext cx="1270000" cy="240042"/>
           </a:xfrm>
           <a:prstGeom prst="rect">
             <a:avLst/>
@@ -8078,7 +8078,7 @@
         </p:nvSpPr>
         <p:spPr>
           <a:xfrm>
-            <a:off x="762000" y="6506789"/>
+            <a:off x="762000" y="6488368"/>
             <a:ext cx="9036875" cy="184647"/>
           </a:xfrm>
           <a:prstGeom prst="rect">
@@ -8117,7 +8117,7 @@
         </p:nvSpPr>
         <p:spPr>
           <a:xfrm>
-            <a:off x="762000" y="6895963"/>
+            <a:off x="762000" y="6877542"/>
             <a:ext cx="9036875" cy="430844"/>
           </a:xfrm>
           <a:prstGeom prst="rect">
@@ -8156,7 +8156,7 @@
         </p:nvSpPr>
         <p:spPr>
           <a:xfrm>
-            <a:off x="762000" y="7834808"/>
+            <a:off x="762000" y="7816387"/>
             <a:ext cx="9036875" cy="184647"/>
           </a:xfrm>
           <a:prstGeom prst="rect">
@@ -8195,7 +8195,7 @@
         </p:nvSpPr>
         <p:spPr>
           <a:xfrm>
-            <a:off x="762000" y="8223982"/>
+            <a:off x="762000" y="8205561"/>
             <a:ext cx="9036875" cy="430844"/>
           </a:xfrm>
           <a:prstGeom prst="rect">
@@ -8234,7 +8234,7 @@
         </p:nvSpPr>
         <p:spPr>
           <a:xfrm>
-            <a:off x="10306875" y="6506789"/>
+            <a:off x="10306875" y="6488368"/>
             <a:ext cx="9036875" cy="184647"/>
           </a:xfrm>
           <a:prstGeom prst="rect">
@@ -8273,7 +8273,7 @@
         </p:nvSpPr>
         <p:spPr>
           <a:xfrm>
-            <a:off x="10306875" y="6895963"/>
+            <a:off x="10306875" y="6877542"/>
             <a:ext cx="9036875" cy="430844"/>
           </a:xfrm>
           <a:prstGeom prst="rect">
@@ -8312,7 +8312,7 @@
         </p:nvSpPr>
         <p:spPr>
           <a:xfrm>
-            <a:off x="10306875" y="7834808"/>
+            <a:off x="10306875" y="7816387"/>
             <a:ext cx="9036875" cy="184647"/>
           </a:xfrm>
           <a:prstGeom prst="rect">
@@ -8351,7 +8351,7 @@
         </p:nvSpPr>
         <p:spPr>
           <a:xfrm>
-            <a:off x="10306875" y="8223982"/>
+            <a:off x="10306875" y="8205561"/>
             <a:ext cx="9036875" cy="430844"/>
           </a:xfrm>
           <a:prstGeom prst="rect">
@@ -8390,8 +8390,8 @@
         </p:nvSpPr>
         <p:spPr>
           <a:xfrm>
-            <a:off x="762000" y="10345801"/>
-            <a:ext cx="8890000" cy="203200"/>
+            <a:off x="762000" y="10308958"/>
+            <a:ext cx="8890000" cy="240042"/>
           </a:xfrm>
           <a:prstGeom prst="rect">
             <a:avLst/>
@@ -8429,8 +8429,8 @@
         </p:nvSpPr>
         <p:spPr>
           <a:xfrm>
-            <a:off x="18073751" y="10345801"/>
-            <a:ext cx="1270000" cy="203200"/>
+            <a:off x="18073751" y="10308958"/>
+            <a:ext cx="1270000" cy="240042"/>
           </a:xfrm>
           <a:prstGeom prst="rect">
             <a:avLst/>
@@ -8572,7 +8572,7 @@
         </p:nvSpPr>
         <p:spPr>
           <a:xfrm>
-            <a:off x="762000" y="5317933"/>
+            <a:off x="762000" y="5299511"/>
             <a:ext cx="4264437" cy="1946024"/>
           </a:xfrm>
           <a:prstGeom prst="roundRect">
@@ -8650,7 +8650,7 @@
         </p:nvSpPr>
         <p:spPr>
           <a:xfrm>
-            <a:off x="5534437" y="5317933"/>
+            <a:off x="5534437" y="5299511"/>
             <a:ext cx="4264437" cy="1946024"/>
           </a:xfrm>
           <a:prstGeom prst="roundRect">
@@ -8728,7 +8728,7 @@
         </p:nvSpPr>
         <p:spPr>
           <a:xfrm>
-            <a:off x="10306875" y="5317933"/>
+            <a:off x="10306875" y="5299511"/>
             <a:ext cx="4264437" cy="1946024"/>
           </a:xfrm>
           <a:prstGeom prst="roundRect">
@@ -8806,7 +8806,7 @@
         </p:nvSpPr>
         <p:spPr>
           <a:xfrm>
-            <a:off x="15079313" y="5317933"/>
+            <a:off x="15079313" y="5299511"/>
             <a:ext cx="4264437" cy="1946024"/>
           </a:xfrm>
           <a:prstGeom prst="roundRect">
@@ -8884,8 +8884,8 @@
         </p:nvSpPr>
         <p:spPr>
           <a:xfrm>
-            <a:off x="762000" y="10345801"/>
-            <a:ext cx="8890000" cy="203200"/>
+            <a:off x="762000" y="10308958"/>
+            <a:ext cx="8890000" cy="240042"/>
           </a:xfrm>
           <a:prstGeom prst="rect">
             <a:avLst/>
@@ -8923,8 +8923,8 @@
         </p:nvSpPr>
         <p:spPr>
           <a:xfrm>
-            <a:off x="18073751" y="10345801"/>
-            <a:ext cx="1270000" cy="203200"/>
+            <a:off x="18073751" y="10308958"/>
+            <a:ext cx="1270000" cy="240042"/>
           </a:xfrm>
           <a:prstGeom prst="rect">
             <a:avLst/>
@@ -9066,7 +9066,7 @@
         </p:nvSpPr>
         <p:spPr>
           <a:xfrm>
-            <a:off x="762000" y="3706111"/>
+            <a:off x="762000" y="3687690"/>
             <a:ext cx="9036875" cy="5211931"/>
           </a:xfrm>
           <a:prstGeom prst="roundRect">
@@ -9201,7 +9201,7 @@
         </p:nvSpPr>
         <p:spPr>
           <a:xfrm>
-            <a:off x="10306875" y="3706111"/>
+            <a:off x="10306875" y="3687690"/>
             <a:ext cx="9036875" cy="5211931"/>
           </a:xfrm>
           <a:prstGeom prst="roundRect">
@@ -9336,8 +9336,8 @@
         </p:nvSpPr>
         <p:spPr>
           <a:xfrm>
-            <a:off x="762000" y="10345801"/>
-            <a:ext cx="8890000" cy="203200"/>
+            <a:off x="762000" y="10308958"/>
+            <a:ext cx="8890000" cy="240042"/>
           </a:xfrm>
           <a:prstGeom prst="rect">
             <a:avLst/>
@@ -9375,8 +9375,8 @@
         </p:nvSpPr>
         <p:spPr>
           <a:xfrm>
-            <a:off x="18073751" y="10345801"/>
-            <a:ext cx="1270000" cy="203200"/>
+            <a:off x="18073751" y="10308958"/>
+            <a:ext cx="1270000" cy="240042"/>
           </a:xfrm>
           <a:prstGeom prst="rect">
             <a:avLst/>
@@ -9440,7 +9440,7 @@
         </p:nvSpPr>
         <p:spPr>
           <a:xfrm>
-            <a:off x="762000" y="1831135"/>
+            <a:off x="762000" y="1812714"/>
             <a:ext cx="13809313" cy="3846829"/>
           </a:xfrm>
           <a:prstGeom prst="rect">
@@ -9479,7 +9479,7 @@
         </p:nvSpPr>
         <p:spPr>
           <a:xfrm>
-            <a:off x="762000" y="5155262"/>
+            <a:off x="762000" y="5136841"/>
             <a:ext cx="13809313" cy="1107887"/>
           </a:xfrm>
           <a:prstGeom prst="rect">
@@ -9518,7 +9518,7 @@
         </p:nvSpPr>
         <p:spPr>
           <a:xfrm>
-            <a:off x="762000" y="6474307"/>
+            <a:off x="762000" y="6455886"/>
             <a:ext cx="9036875" cy="2040358"/>
           </a:xfrm>
           <a:prstGeom prst="rect">
@@ -9557,8 +9557,8 @@
         </p:nvSpPr>
         <p:spPr>
           <a:xfrm>
-            <a:off x="762000" y="10345801"/>
-            <a:ext cx="8890000" cy="203200"/>
+            <a:off x="762000" y="10308958"/>
+            <a:ext cx="8890000" cy="240042"/>
           </a:xfrm>
           <a:prstGeom prst="rect">
             <a:avLst/>
@@ -9596,8 +9596,8 @@
         </p:nvSpPr>
         <p:spPr>
           <a:xfrm>
-            <a:off x="18073751" y="10345801"/>
-            <a:ext cx="1270000" cy="203200"/>
+            <a:off x="18073751" y="10308958"/>
+            <a:ext cx="1270000" cy="240042"/>
           </a:xfrm>
           <a:prstGeom prst="rect">
             <a:avLst/>
@@ -9739,7 +9739,7 @@
         </p:nvSpPr>
         <p:spPr>
           <a:xfrm>
-            <a:off x="762000" y="3362306"/>
+            <a:off x="762000" y="3343885"/>
             <a:ext cx="3309950" cy="184647"/>
           </a:xfrm>
           <a:prstGeom prst="rect">
@@ -9778,7 +9778,7 @@
         </p:nvSpPr>
         <p:spPr>
           <a:xfrm>
-            <a:off x="762000" y="3751480"/>
+            <a:off x="762000" y="3733059"/>
             <a:ext cx="3309950" cy="430844"/>
           </a:xfrm>
           <a:prstGeom prst="rect">
@@ -9817,7 +9817,7 @@
         </p:nvSpPr>
         <p:spPr>
           <a:xfrm>
-            <a:off x="762000" y="4320886"/>
+            <a:off x="762000" y="4302465"/>
             <a:ext cx="3309950" cy="400070"/>
           </a:xfrm>
           <a:prstGeom prst="rect">
@@ -9856,7 +9856,7 @@
         </p:nvSpPr>
         <p:spPr>
           <a:xfrm>
-            <a:off x="4579950" y="3362306"/>
+            <a:off x="4579950" y="3343885"/>
             <a:ext cx="3309950" cy="184647"/>
           </a:xfrm>
           <a:prstGeom prst="rect">
@@ -9895,7 +9895,7 @@
         </p:nvSpPr>
         <p:spPr>
           <a:xfrm>
-            <a:off x="4579950" y="3751480"/>
+            <a:off x="4579950" y="3733059"/>
             <a:ext cx="3309950" cy="430844"/>
           </a:xfrm>
           <a:prstGeom prst="rect">
@@ -9934,7 +9934,7 @@
         </p:nvSpPr>
         <p:spPr>
           <a:xfrm>
-            <a:off x="4579950" y="4320886"/>
+            <a:off x="4579950" y="4302465"/>
             <a:ext cx="3309950" cy="400070"/>
           </a:xfrm>
           <a:prstGeom prst="rect">
@@ -9973,7 +9973,7 @@
         </p:nvSpPr>
         <p:spPr>
           <a:xfrm>
-            <a:off x="8397900" y="3362306"/>
+            <a:off x="8397900" y="3343885"/>
             <a:ext cx="3309950" cy="184647"/>
           </a:xfrm>
           <a:prstGeom prst="rect">
@@ -10012,7 +10012,7 @@
         </p:nvSpPr>
         <p:spPr>
           <a:xfrm>
-            <a:off x="8397900" y="3751480"/>
+            <a:off x="8397900" y="3733059"/>
             <a:ext cx="3309950" cy="430844"/>
           </a:xfrm>
           <a:prstGeom prst="rect">
@@ -10051,7 +10051,7 @@
         </p:nvSpPr>
         <p:spPr>
           <a:xfrm>
-            <a:off x="8397900" y="4320886"/>
+            <a:off x="8397900" y="4302465"/>
             <a:ext cx="3309950" cy="400070"/>
           </a:xfrm>
           <a:prstGeom prst="rect">
@@ -10090,7 +10090,7 @@
         </p:nvSpPr>
         <p:spPr>
           <a:xfrm>
-            <a:off x="12215850" y="3362306"/>
+            <a:off x="12215850" y="3343885"/>
             <a:ext cx="3309950" cy="184647"/>
           </a:xfrm>
           <a:prstGeom prst="rect">
@@ -10129,7 +10129,7 @@
         </p:nvSpPr>
         <p:spPr>
           <a:xfrm>
-            <a:off x="12215850" y="3751480"/>
+            <a:off x="12215850" y="3733059"/>
             <a:ext cx="3309950" cy="430844"/>
           </a:xfrm>
           <a:prstGeom prst="rect">
@@ -10168,7 +10168,7 @@
         </p:nvSpPr>
         <p:spPr>
           <a:xfrm>
-            <a:off x="12215850" y="4320886"/>
+            <a:off x="12215850" y="4302465"/>
             <a:ext cx="3309950" cy="400070"/>
           </a:xfrm>
           <a:prstGeom prst="rect">
@@ -10207,7 +10207,7 @@
         </p:nvSpPr>
         <p:spPr>
           <a:xfrm>
-            <a:off x="16033800" y="3362306"/>
+            <a:off x="16033800" y="3343885"/>
             <a:ext cx="3309950" cy="184647"/>
           </a:xfrm>
           <a:prstGeom prst="rect">
@@ -10246,7 +10246,7 @@
         </p:nvSpPr>
         <p:spPr>
           <a:xfrm>
-            <a:off x="16033800" y="3751480"/>
+            <a:off x="16033800" y="3733059"/>
             <a:ext cx="3309950" cy="430844"/>
           </a:xfrm>
           <a:prstGeom prst="rect">
@@ -10285,7 +10285,7 @@
         </p:nvSpPr>
         <p:spPr>
           <a:xfrm>
-            <a:off x="16033800" y="4320886"/>
+            <a:off x="16033800" y="4302465"/>
             <a:ext cx="3309950" cy="400070"/>
           </a:xfrm>
           <a:prstGeom prst="rect">
@@ -10324,7 +10324,7 @@
         </p:nvSpPr>
         <p:spPr>
           <a:xfrm>
-            <a:off x="762000" y="5632752"/>
+            <a:off x="762000" y="5614330"/>
             <a:ext cx="3309950" cy="184647"/>
           </a:xfrm>
           <a:prstGeom prst="rect">
@@ -10363,7 +10363,7 @@
         </p:nvSpPr>
         <p:spPr>
           <a:xfrm>
-            <a:off x="762000" y="6021926"/>
+            <a:off x="762000" y="6003505"/>
             <a:ext cx="3309950" cy="430844"/>
           </a:xfrm>
           <a:prstGeom prst="rect">
@@ -10402,7 +10402,7 @@
         </p:nvSpPr>
         <p:spPr>
           <a:xfrm>
-            <a:off x="762000" y="6591332"/>
+            <a:off x="762000" y="6572911"/>
             <a:ext cx="3309950" cy="400070"/>
           </a:xfrm>
           <a:prstGeom prst="rect">
@@ -10441,7 +10441,7 @@
         </p:nvSpPr>
         <p:spPr>
           <a:xfrm>
-            <a:off x="4579950" y="5632752"/>
+            <a:off x="4579950" y="5614330"/>
             <a:ext cx="3309950" cy="184647"/>
           </a:xfrm>
           <a:prstGeom prst="rect">
@@ -10480,7 +10480,7 @@
         </p:nvSpPr>
         <p:spPr>
           <a:xfrm>
-            <a:off x="4579950" y="6021926"/>
+            <a:off x="4579950" y="6003505"/>
             <a:ext cx="3309950" cy="430844"/>
           </a:xfrm>
           <a:prstGeom prst="rect">
@@ -10519,7 +10519,7 @@
         </p:nvSpPr>
         <p:spPr>
           <a:xfrm>
-            <a:off x="4579950" y="6591332"/>
+            <a:off x="4579950" y="6572911"/>
             <a:ext cx="3309950" cy="400070"/>
           </a:xfrm>
           <a:prstGeom prst="rect">
@@ -10558,7 +10558,7 @@
         </p:nvSpPr>
         <p:spPr>
           <a:xfrm>
-            <a:off x="8397900" y="5632752"/>
+            <a:off x="8397900" y="5614330"/>
             <a:ext cx="3309950" cy="184647"/>
           </a:xfrm>
           <a:prstGeom prst="rect">
@@ -10597,7 +10597,7 @@
         </p:nvSpPr>
         <p:spPr>
           <a:xfrm>
-            <a:off x="8397900" y="6021926"/>
+            <a:off x="8397900" y="6003505"/>
             <a:ext cx="3309950" cy="430844"/>
           </a:xfrm>
           <a:prstGeom prst="rect">
@@ -10636,7 +10636,7 @@
         </p:nvSpPr>
         <p:spPr>
           <a:xfrm>
-            <a:off x="8397900" y="6591332"/>
+            <a:off x="8397900" y="6572911"/>
             <a:ext cx="3309950" cy="400070"/>
           </a:xfrm>
           <a:prstGeom prst="rect">
@@ -10675,7 +10675,7 @@
         </p:nvSpPr>
         <p:spPr>
           <a:xfrm>
-            <a:off x="12215850" y="5632752"/>
+            <a:off x="12215850" y="5614330"/>
             <a:ext cx="3309950" cy="184647"/>
           </a:xfrm>
           <a:prstGeom prst="rect">
@@ -10714,7 +10714,7 @@
         </p:nvSpPr>
         <p:spPr>
           <a:xfrm>
-            <a:off x="12215850" y="6021926"/>
+            <a:off x="12215850" y="6003505"/>
             <a:ext cx="3309950" cy="430844"/>
           </a:xfrm>
           <a:prstGeom prst="rect">
@@ -10753,7 +10753,7 @@
         </p:nvSpPr>
         <p:spPr>
           <a:xfrm>
-            <a:off x="12215850" y="6591332"/>
+            <a:off x="12215850" y="6572911"/>
             <a:ext cx="3309950" cy="400070"/>
           </a:xfrm>
           <a:prstGeom prst="rect">
@@ -10792,7 +10792,7 @@
         </p:nvSpPr>
         <p:spPr>
           <a:xfrm>
-            <a:off x="16033800" y="5632752"/>
+            <a:off x="16033800" y="5614330"/>
             <a:ext cx="3309950" cy="184647"/>
           </a:xfrm>
           <a:prstGeom prst="rect">
@@ -10831,7 +10831,7 @@
         </p:nvSpPr>
         <p:spPr>
           <a:xfrm>
-            <a:off x="16033800" y="6021926"/>
+            <a:off x="16033800" y="6003505"/>
             <a:ext cx="3309950" cy="430844"/>
           </a:xfrm>
           <a:prstGeom prst="rect">
@@ -10870,7 +10870,7 @@
         </p:nvSpPr>
         <p:spPr>
           <a:xfrm>
-            <a:off x="16033800" y="6591332"/>
+            <a:off x="16033800" y="6572911"/>
             <a:ext cx="3309950" cy="400070"/>
           </a:xfrm>
           <a:prstGeom prst="rect">
@@ -10909,7 +10909,7 @@
         </p:nvSpPr>
         <p:spPr>
           <a:xfrm>
-            <a:off x="762000" y="7903197"/>
+            <a:off x="762000" y="7884776"/>
             <a:ext cx="3309950" cy="184647"/>
           </a:xfrm>
           <a:prstGeom prst="rect">
@@ -10948,7 +10948,7 @@
         </p:nvSpPr>
         <p:spPr>
           <a:xfrm>
-            <a:off x="762000" y="8292371"/>
+            <a:off x="762000" y="8273950"/>
             <a:ext cx="3309950" cy="430844"/>
           </a:xfrm>
           <a:prstGeom prst="rect">
@@ -10987,7 +10987,7 @@
         </p:nvSpPr>
         <p:spPr>
           <a:xfrm>
-            <a:off x="762000" y="8861778"/>
+            <a:off x="762000" y="8843357"/>
             <a:ext cx="3309950" cy="400070"/>
           </a:xfrm>
           <a:prstGeom prst="rect">
@@ -11026,7 +11026,7 @@
         </p:nvSpPr>
         <p:spPr>
           <a:xfrm>
-            <a:off x="4579950" y="7903197"/>
+            <a:off x="4579950" y="7884776"/>
             <a:ext cx="3309950" cy="184647"/>
           </a:xfrm>
           <a:prstGeom prst="rect">
@@ -11065,7 +11065,7 @@
         </p:nvSpPr>
         <p:spPr>
           <a:xfrm>
-            <a:off x="4579950" y="8292371"/>
+            <a:off x="4579950" y="8273950"/>
             <a:ext cx="3309950" cy="430844"/>
           </a:xfrm>
           <a:prstGeom prst="rect">
@@ -11104,7 +11104,7 @@
         </p:nvSpPr>
         <p:spPr>
           <a:xfrm>
-            <a:off x="4579950" y="8861778"/>
+            <a:off x="4579950" y="8843357"/>
             <a:ext cx="3309950" cy="400070"/>
           </a:xfrm>
           <a:prstGeom prst="rect">
@@ -11143,7 +11143,7 @@
         </p:nvSpPr>
         <p:spPr>
           <a:xfrm>
-            <a:off x="8397900" y="7903197"/>
+            <a:off x="8397900" y="7884776"/>
             <a:ext cx="3309950" cy="184647"/>
           </a:xfrm>
           <a:prstGeom prst="rect">
@@ -11182,7 +11182,7 @@
         </p:nvSpPr>
         <p:spPr>
           <a:xfrm>
-            <a:off x="8397900" y="8292371"/>
+            <a:off x="8397900" y="8273950"/>
             <a:ext cx="3309950" cy="430844"/>
           </a:xfrm>
           <a:prstGeom prst="rect">
@@ -11221,7 +11221,7 @@
         </p:nvSpPr>
         <p:spPr>
           <a:xfrm>
-            <a:off x="8397900" y="8861778"/>
+            <a:off x="8397900" y="8843357"/>
             <a:ext cx="3309950" cy="400070"/>
           </a:xfrm>
           <a:prstGeom prst="rect">
@@ -11260,7 +11260,7 @@
         </p:nvSpPr>
         <p:spPr>
           <a:xfrm>
-            <a:off x="12215850" y="7903197"/>
+            <a:off x="12215850" y="7884776"/>
             <a:ext cx="3309950" cy="184647"/>
           </a:xfrm>
           <a:prstGeom prst="rect">
@@ -11299,7 +11299,7 @@
         </p:nvSpPr>
         <p:spPr>
           <a:xfrm>
-            <a:off x="12215850" y="8292371"/>
+            <a:off x="12215850" y="8273950"/>
             <a:ext cx="3309950" cy="430844"/>
           </a:xfrm>
           <a:prstGeom prst="rect">
@@ -11338,7 +11338,7 @@
         </p:nvSpPr>
         <p:spPr>
           <a:xfrm>
-            <a:off x="12215850" y="8861778"/>
+            <a:off x="12215850" y="8843357"/>
             <a:ext cx="3309950" cy="400070"/>
           </a:xfrm>
           <a:prstGeom prst="rect">
@@ -11377,8 +11377,8 @@
         </p:nvSpPr>
         <p:spPr>
           <a:xfrm>
-            <a:off x="762000" y="10345801"/>
-            <a:ext cx="8890000" cy="203200"/>
+            <a:off x="762000" y="10308958"/>
+            <a:ext cx="8890000" cy="240042"/>
           </a:xfrm>
           <a:prstGeom prst="rect">
             <a:avLst/>
@@ -11416,8 +11416,8 @@
         </p:nvSpPr>
         <p:spPr>
           <a:xfrm>
-            <a:off x="18073751" y="10345801"/>
-            <a:ext cx="1270000" cy="203200"/>
+            <a:off x="18073751" y="10308958"/>
+            <a:ext cx="1270000" cy="240042"/>
           </a:xfrm>
           <a:prstGeom prst="rect">
             <a:avLst/>
@@ -11559,7 +11559,7 @@
         </p:nvSpPr>
         <p:spPr>
           <a:xfrm>
-            <a:off x="762000" y="7709204"/>
+            <a:off x="762000" y="7672362"/>
             <a:ext cx="3208350" cy="184647"/>
           </a:xfrm>
           <a:prstGeom prst="rect">
@@ -11598,7 +11598,7 @@
         </p:nvSpPr>
         <p:spPr>
           <a:xfrm>
-            <a:off x="762000" y="8066130"/>
+            <a:off x="762000" y="8029288"/>
             <a:ext cx="3208350" cy="430844"/>
           </a:xfrm>
           <a:prstGeom prst="rect">
@@ -11637,7 +11637,7 @@
         </p:nvSpPr>
         <p:spPr>
           <a:xfrm>
-            <a:off x="4478350" y="7709204"/>
+            <a:off x="4478350" y="7672362"/>
             <a:ext cx="3208350" cy="184647"/>
           </a:xfrm>
           <a:prstGeom prst="rect">
@@ -11676,7 +11676,7 @@
         </p:nvSpPr>
         <p:spPr>
           <a:xfrm>
-            <a:off x="4478350" y="8066130"/>
+            <a:off x="4478350" y="8029288"/>
             <a:ext cx="3208350" cy="430844"/>
           </a:xfrm>
           <a:prstGeom prst="rect">
@@ -11715,7 +11715,7 @@
         </p:nvSpPr>
         <p:spPr>
           <a:xfrm>
-            <a:off x="8194700" y="7709204"/>
+            <a:off x="8194700" y="7672362"/>
             <a:ext cx="3208350" cy="184647"/>
           </a:xfrm>
           <a:prstGeom prst="rect">
@@ -11754,7 +11754,7 @@
         </p:nvSpPr>
         <p:spPr>
           <a:xfrm>
-            <a:off x="8194700" y="8066130"/>
+            <a:off x="8194700" y="8029288"/>
             <a:ext cx="3208350" cy="430844"/>
           </a:xfrm>
           <a:prstGeom prst="rect">
@@ -11793,7 +11793,7 @@
         </p:nvSpPr>
         <p:spPr>
           <a:xfrm>
-            <a:off x="11911050" y="7709204"/>
+            <a:off x="11911050" y="7672362"/>
             <a:ext cx="3208350" cy="184647"/>
           </a:xfrm>
           <a:prstGeom prst="rect">
@@ -11832,7 +11832,7 @@
         </p:nvSpPr>
         <p:spPr>
           <a:xfrm>
-            <a:off x="11911050" y="8066130"/>
+            <a:off x="11911050" y="8029288"/>
             <a:ext cx="3208350" cy="430844"/>
           </a:xfrm>
           <a:prstGeom prst="rect">
@@ -11871,7 +11871,7 @@
         </p:nvSpPr>
         <p:spPr>
           <a:xfrm>
-            <a:off x="15627400" y="7709204"/>
+            <a:off x="15627400" y="7672362"/>
             <a:ext cx="3208350" cy="184647"/>
           </a:xfrm>
           <a:prstGeom prst="rect">
@@ -11910,7 +11910,7 @@
         </p:nvSpPr>
         <p:spPr>
           <a:xfrm>
-            <a:off x="15627400" y="8066130"/>
+            <a:off x="15627400" y="8029288"/>
             <a:ext cx="3208350" cy="430844"/>
           </a:xfrm>
           <a:prstGeom prst="rect">
@@ -11949,7 +11949,7 @@
         </p:nvSpPr>
         <p:spPr>
           <a:xfrm>
-            <a:off x="762000" y="9183730"/>
+            <a:off x="762000" y="9146888"/>
             <a:ext cx="13809313" cy="400070"/>
           </a:xfrm>
           <a:prstGeom prst="rect">
@@ -11988,7 +11988,7 @@
         </p:nvSpPr>
         <p:spPr>
           <a:xfrm>
-            <a:off x="762000" y="3049231"/>
+            <a:off x="762000" y="3030810"/>
             <a:ext cx="18581751" cy="3846829"/>
           </a:xfrm>
           <a:prstGeom prst="rect">
@@ -12027,8 +12027,8 @@
         </p:nvSpPr>
         <p:spPr>
           <a:xfrm>
-            <a:off x="762000" y="10345801"/>
-            <a:ext cx="8890000" cy="203200"/>
+            <a:off x="762000" y="10308958"/>
+            <a:ext cx="8890000" cy="240042"/>
           </a:xfrm>
           <a:prstGeom prst="rect">
             <a:avLst/>
@@ -12066,8 +12066,8 @@
         </p:nvSpPr>
         <p:spPr>
           <a:xfrm>
-            <a:off x="18073751" y="10345801"/>
-            <a:ext cx="1270000" cy="203200"/>
+            <a:off x="18073751" y="10308958"/>
+            <a:ext cx="1270000" cy="240042"/>
           </a:xfrm>
           <a:prstGeom prst="rect">
             <a:avLst/>
@@ -12209,7 +12209,7 @@
         </p:nvSpPr>
         <p:spPr>
           <a:xfrm>
-            <a:off x="762000" y="7709204"/>
+            <a:off x="762000" y="7672362"/>
             <a:ext cx="3208350" cy="184647"/>
           </a:xfrm>
           <a:prstGeom prst="rect">
@@ -12248,7 +12248,7 @@
         </p:nvSpPr>
         <p:spPr>
           <a:xfrm>
-            <a:off x="762000" y="8066130"/>
+            <a:off x="762000" y="8029288"/>
             <a:ext cx="3208350" cy="430844"/>
           </a:xfrm>
           <a:prstGeom prst="rect">
@@ -12287,7 +12287,7 @@
         </p:nvSpPr>
         <p:spPr>
           <a:xfrm>
-            <a:off x="4478350" y="7709204"/>
+            <a:off x="4478350" y="7672362"/>
             <a:ext cx="3208350" cy="184647"/>
           </a:xfrm>
           <a:prstGeom prst="rect">
@@ -12326,7 +12326,7 @@
         </p:nvSpPr>
         <p:spPr>
           <a:xfrm>
-            <a:off x="4478350" y="8066130"/>
+            <a:off x="4478350" y="8029288"/>
             <a:ext cx="3208350" cy="430844"/>
           </a:xfrm>
           <a:prstGeom prst="rect">
@@ -12365,7 +12365,7 @@
         </p:nvSpPr>
         <p:spPr>
           <a:xfrm>
-            <a:off x="8194700" y="7709204"/>
+            <a:off x="8194700" y="7672362"/>
             <a:ext cx="3208350" cy="184647"/>
           </a:xfrm>
           <a:prstGeom prst="rect">
@@ -12404,7 +12404,7 @@
         </p:nvSpPr>
         <p:spPr>
           <a:xfrm>
-            <a:off x="8194700" y="8066130"/>
+            <a:off x="8194700" y="8029288"/>
             <a:ext cx="3208350" cy="430844"/>
           </a:xfrm>
           <a:prstGeom prst="rect">
@@ -12443,7 +12443,7 @@
         </p:nvSpPr>
         <p:spPr>
           <a:xfrm>
-            <a:off x="11911050" y="7709204"/>
+            <a:off x="11911050" y="7672362"/>
             <a:ext cx="3208350" cy="184647"/>
           </a:xfrm>
           <a:prstGeom prst="rect">
@@ -12482,7 +12482,7 @@
         </p:nvSpPr>
         <p:spPr>
           <a:xfrm>
-            <a:off x="11911050" y="8066130"/>
+            <a:off x="11911050" y="8029288"/>
             <a:ext cx="3208350" cy="430844"/>
           </a:xfrm>
           <a:prstGeom prst="rect">
@@ -12521,7 +12521,7 @@
         </p:nvSpPr>
         <p:spPr>
           <a:xfrm>
-            <a:off x="15627400" y="7709204"/>
+            <a:off x="15627400" y="7672362"/>
             <a:ext cx="3208350" cy="184647"/>
           </a:xfrm>
           <a:prstGeom prst="rect">
@@ -12560,7 +12560,7 @@
         </p:nvSpPr>
         <p:spPr>
           <a:xfrm>
-            <a:off x="15627400" y="8066130"/>
+            <a:off x="15627400" y="8029288"/>
             <a:ext cx="3208350" cy="430844"/>
           </a:xfrm>
           <a:prstGeom prst="rect">
@@ -12599,7 +12599,7 @@
         </p:nvSpPr>
         <p:spPr>
           <a:xfrm>
-            <a:off x="762000" y="9183730"/>
+            <a:off x="762000" y="9146888"/>
             <a:ext cx="13809313" cy="400070"/>
           </a:xfrm>
           <a:prstGeom prst="rect">
@@ -12638,7 +12638,7 @@
         </p:nvSpPr>
         <p:spPr>
           <a:xfrm>
-            <a:off x="762000" y="3472055"/>
+            <a:off x="762000" y="3453634"/>
             <a:ext cx="18581751" cy="3001182"/>
           </a:xfrm>
           <a:prstGeom prst="rect">
@@ -12702,8 +12702,8 @@
         </p:nvSpPr>
         <p:spPr>
           <a:xfrm>
-            <a:off x="762000" y="10345801"/>
-            <a:ext cx="8890000" cy="203200"/>
+            <a:off x="762000" y="10308958"/>
+            <a:ext cx="8890000" cy="240042"/>
           </a:xfrm>
           <a:prstGeom prst="rect">
             <a:avLst/>
@@ -12741,8 +12741,8 @@
         </p:nvSpPr>
         <p:spPr>
           <a:xfrm>
-            <a:off x="18073751" y="10345801"/>
-            <a:ext cx="1270000" cy="203200"/>
+            <a:off x="18073751" y="10308958"/>
+            <a:ext cx="1270000" cy="240042"/>
           </a:xfrm>
           <a:prstGeom prst="rect">
             <a:avLst/>
@@ -12884,7 +12884,7 @@
         </p:nvSpPr>
         <p:spPr>
           <a:xfrm>
-            <a:off x="762000" y="7709204"/>
+            <a:off x="762000" y="7672362"/>
             <a:ext cx="3208350" cy="184647"/>
           </a:xfrm>
           <a:prstGeom prst="rect">
@@ -12923,7 +12923,7 @@
         </p:nvSpPr>
         <p:spPr>
           <a:xfrm>
-            <a:off x="762000" y="8066130"/>
+            <a:off x="762000" y="8029288"/>
             <a:ext cx="3208350" cy="430844"/>
           </a:xfrm>
           <a:prstGeom prst="rect">
@@ -12962,7 +12962,7 @@
         </p:nvSpPr>
         <p:spPr>
           <a:xfrm>
-            <a:off x="4478350" y="7709204"/>
+            <a:off x="4478350" y="7672362"/>
             <a:ext cx="3208350" cy="184647"/>
           </a:xfrm>
           <a:prstGeom prst="rect">
@@ -13001,7 +13001,7 @@
         </p:nvSpPr>
         <p:spPr>
           <a:xfrm>
-            <a:off x="4478350" y="8066130"/>
+            <a:off x="4478350" y="8029288"/>
             <a:ext cx="3208350" cy="430844"/>
           </a:xfrm>
           <a:prstGeom prst="rect">
@@ -13040,7 +13040,7 @@
         </p:nvSpPr>
         <p:spPr>
           <a:xfrm>
-            <a:off x="8194700" y="7709204"/>
+            <a:off x="8194700" y="7672362"/>
             <a:ext cx="3208350" cy="184647"/>
           </a:xfrm>
           <a:prstGeom prst="rect">
@@ -13079,7 +13079,7 @@
         </p:nvSpPr>
         <p:spPr>
           <a:xfrm>
-            <a:off x="8194700" y="8066130"/>
+            <a:off x="8194700" y="8029288"/>
             <a:ext cx="3208350" cy="430844"/>
           </a:xfrm>
           <a:prstGeom prst="rect">
@@ -13118,7 +13118,7 @@
         </p:nvSpPr>
         <p:spPr>
           <a:xfrm>
-            <a:off x="11911050" y="7709204"/>
+            <a:off x="11911050" y="7672362"/>
             <a:ext cx="3208350" cy="184647"/>
           </a:xfrm>
           <a:prstGeom prst="rect">
@@ -13157,7 +13157,7 @@
         </p:nvSpPr>
         <p:spPr>
           <a:xfrm>
-            <a:off x="11911050" y="8066130"/>
+            <a:off x="11911050" y="8029288"/>
             <a:ext cx="3208350" cy="430844"/>
           </a:xfrm>
           <a:prstGeom prst="rect">
@@ -13196,7 +13196,7 @@
         </p:nvSpPr>
         <p:spPr>
           <a:xfrm>
-            <a:off x="15627400" y="7709204"/>
+            <a:off x="15627400" y="7672362"/>
             <a:ext cx="3208350" cy="184647"/>
           </a:xfrm>
           <a:prstGeom prst="rect">
@@ -13235,7 +13235,7 @@
         </p:nvSpPr>
         <p:spPr>
           <a:xfrm>
-            <a:off x="15627400" y="8066130"/>
+            <a:off x="15627400" y="8029288"/>
             <a:ext cx="3208350" cy="430844"/>
           </a:xfrm>
           <a:prstGeom prst="rect">
@@ -13274,7 +13274,7 @@
         </p:nvSpPr>
         <p:spPr>
           <a:xfrm>
-            <a:off x="762000" y="9183730"/>
+            <a:off x="762000" y="9146888"/>
             <a:ext cx="13809313" cy="400070"/>
           </a:xfrm>
           <a:prstGeom prst="rect">
@@ -13313,7 +13313,7 @@
         </p:nvSpPr>
         <p:spPr>
           <a:xfrm>
-            <a:off x="762000" y="3864759"/>
+            <a:off x="762000" y="3846338"/>
             <a:ext cx="18581751" cy="2215774"/>
           </a:xfrm>
           <a:prstGeom prst="rect">
@@ -13368,8 +13368,8 @@
         </p:nvSpPr>
         <p:spPr>
           <a:xfrm>
-            <a:off x="762000" y="10345801"/>
-            <a:ext cx="8890000" cy="203200"/>
+            <a:off x="762000" y="10308958"/>
+            <a:ext cx="8890000" cy="240042"/>
           </a:xfrm>
           <a:prstGeom prst="rect">
             <a:avLst/>
@@ -13407,8 +13407,8 @@
         </p:nvSpPr>
         <p:spPr>
           <a:xfrm>
-            <a:off x="18073751" y="10345801"/>
-            <a:ext cx="1270000" cy="203200"/>
+            <a:off x="18073751" y="10308958"/>
+            <a:ext cx="1270000" cy="240042"/>
           </a:xfrm>
           <a:prstGeom prst="rect">
             <a:avLst/>
@@ -13550,7 +13550,7 @@
         </p:nvSpPr>
         <p:spPr>
           <a:xfrm>
-            <a:off x="762000" y="7709204"/>
+            <a:off x="762000" y="7672362"/>
             <a:ext cx="3208350" cy="184647"/>
           </a:xfrm>
           <a:prstGeom prst="rect">
@@ -13589,7 +13589,7 @@
         </p:nvSpPr>
         <p:spPr>
           <a:xfrm>
-            <a:off x="762000" y="8066130"/>
+            <a:off x="762000" y="8029288"/>
             <a:ext cx="3208350" cy="430844"/>
           </a:xfrm>
           <a:prstGeom prst="rect">
@@ -13628,7 +13628,7 @@
         </p:nvSpPr>
         <p:spPr>
           <a:xfrm>
-            <a:off x="4478350" y="7709204"/>
+            <a:off x="4478350" y="7672362"/>
             <a:ext cx="3208350" cy="184647"/>
           </a:xfrm>
           <a:prstGeom prst="rect">
@@ -13667,7 +13667,7 @@
         </p:nvSpPr>
         <p:spPr>
           <a:xfrm>
-            <a:off x="4478350" y="8066130"/>
+            <a:off x="4478350" y="8029288"/>
             <a:ext cx="3208350" cy="430844"/>
           </a:xfrm>
           <a:prstGeom prst="rect">
@@ -13706,7 +13706,7 @@
         </p:nvSpPr>
         <p:spPr>
           <a:xfrm>
-            <a:off x="8194700" y="7709204"/>
+            <a:off x="8194700" y="7672362"/>
             <a:ext cx="3208350" cy="184647"/>
           </a:xfrm>
           <a:prstGeom prst="rect">
@@ -13745,7 +13745,7 @@
         </p:nvSpPr>
         <p:spPr>
           <a:xfrm>
-            <a:off x="8194700" y="8066130"/>
+            <a:off x="8194700" y="8029288"/>
             <a:ext cx="3208350" cy="430844"/>
           </a:xfrm>
           <a:prstGeom prst="rect">
@@ -13784,7 +13784,7 @@
         </p:nvSpPr>
         <p:spPr>
           <a:xfrm>
-            <a:off x="11911050" y="7709204"/>
+            <a:off x="11911050" y="7672362"/>
             <a:ext cx="3208350" cy="184647"/>
           </a:xfrm>
           <a:prstGeom prst="rect">
@@ -13823,7 +13823,7 @@
         </p:nvSpPr>
         <p:spPr>
           <a:xfrm>
-            <a:off x="11911050" y="8066130"/>
+            <a:off x="11911050" y="8029288"/>
             <a:ext cx="3208350" cy="430844"/>
           </a:xfrm>
           <a:prstGeom prst="rect">
@@ -13862,7 +13862,7 @@
         </p:nvSpPr>
         <p:spPr>
           <a:xfrm>
-            <a:off x="15627400" y="7709204"/>
+            <a:off x="15627400" y="7672362"/>
             <a:ext cx="3208350" cy="184647"/>
           </a:xfrm>
           <a:prstGeom prst="rect">
@@ -13901,7 +13901,7 @@
         </p:nvSpPr>
         <p:spPr>
           <a:xfrm>
-            <a:off x="15627400" y="8066130"/>
+            <a:off x="15627400" y="8029288"/>
             <a:ext cx="3208350" cy="430844"/>
           </a:xfrm>
           <a:prstGeom prst="rect">
@@ -13940,7 +13940,7 @@
         </p:nvSpPr>
         <p:spPr>
           <a:xfrm>
-            <a:off x="762000" y="9183730"/>
+            <a:off x="762000" y="9146888"/>
             <a:ext cx="13809313" cy="400070"/>
           </a:xfrm>
           <a:prstGeom prst="rect">
@@ -13979,7 +13979,7 @@
         </p:nvSpPr>
         <p:spPr>
           <a:xfrm>
-            <a:off x="762000" y="4557189"/>
+            <a:off x="762000" y="4538768"/>
             <a:ext cx="18581751" cy="830915"/>
           </a:xfrm>
           <a:prstGeom prst="rect">
@@ -14018,8 +14018,8 @@
         </p:nvSpPr>
         <p:spPr>
           <a:xfrm>
-            <a:off x="762000" y="10345801"/>
-            <a:ext cx="8890000" cy="203200"/>
+            <a:off x="762000" y="10308958"/>
+            <a:ext cx="8890000" cy="240042"/>
           </a:xfrm>
           <a:prstGeom prst="rect">
             <a:avLst/>
@@ -14057,8 +14057,8 @@
         </p:nvSpPr>
         <p:spPr>
           <a:xfrm>
-            <a:off x="18073751" y="10345801"/>
-            <a:ext cx="1270000" cy="203200"/>
+            <a:off x="18073751" y="10308958"/>
+            <a:ext cx="1270000" cy="240042"/>
           </a:xfrm>
           <a:prstGeom prst="rect">
             <a:avLst/>
@@ -14200,7 +14200,7 @@
         </p:nvSpPr>
         <p:spPr>
           <a:xfrm>
-            <a:off x="762000" y="7709204"/>
+            <a:off x="762000" y="7672362"/>
             <a:ext cx="3208350" cy="184647"/>
           </a:xfrm>
           <a:prstGeom prst="rect">
@@ -14239,7 +14239,7 @@
         </p:nvSpPr>
         <p:spPr>
           <a:xfrm>
-            <a:off x="762000" y="8066130"/>
+            <a:off x="762000" y="8029288"/>
             <a:ext cx="3208350" cy="430844"/>
           </a:xfrm>
           <a:prstGeom prst="rect">
@@ -14278,7 +14278,7 @@
         </p:nvSpPr>
         <p:spPr>
           <a:xfrm>
-            <a:off x="4478350" y="7709204"/>
+            <a:off x="4478350" y="7672362"/>
             <a:ext cx="3208350" cy="184647"/>
           </a:xfrm>
           <a:prstGeom prst="rect">
@@ -14317,7 +14317,7 @@
         </p:nvSpPr>
         <p:spPr>
           <a:xfrm>
-            <a:off x="4478350" y="8066130"/>
+            <a:off x="4478350" y="8029288"/>
             <a:ext cx="3208350" cy="430844"/>
           </a:xfrm>
           <a:prstGeom prst="rect">
@@ -14356,7 +14356,7 @@
         </p:nvSpPr>
         <p:spPr>
           <a:xfrm>
-            <a:off x="8194700" y="7709204"/>
+            <a:off x="8194700" y="7672362"/>
             <a:ext cx="3208350" cy="184647"/>
           </a:xfrm>
           <a:prstGeom prst="rect">
@@ -14395,7 +14395,7 @@
         </p:nvSpPr>
         <p:spPr>
           <a:xfrm>
-            <a:off x="8194700" y="8066130"/>
+            <a:off x="8194700" y="8029288"/>
             <a:ext cx="3208350" cy="430844"/>
           </a:xfrm>
           <a:prstGeom prst="rect">
@@ -14434,7 +14434,7 @@
         </p:nvSpPr>
         <p:spPr>
           <a:xfrm>
-            <a:off x="11911050" y="7709204"/>
+            <a:off x="11911050" y="7672362"/>
             <a:ext cx="3208350" cy="184647"/>
           </a:xfrm>
           <a:prstGeom prst="rect">
@@ -14473,7 +14473,7 @@
         </p:nvSpPr>
         <p:spPr>
           <a:xfrm>
-            <a:off x="11911050" y="8066130"/>
+            <a:off x="11911050" y="8029288"/>
             <a:ext cx="3208350" cy="430844"/>
           </a:xfrm>
           <a:prstGeom prst="rect">
@@ -14512,7 +14512,7 @@
         </p:nvSpPr>
         <p:spPr>
           <a:xfrm>
-            <a:off x="15627400" y="7709204"/>
+            <a:off x="15627400" y="7672362"/>
             <a:ext cx="3208350" cy="184647"/>
           </a:xfrm>
           <a:prstGeom prst="rect">
@@ -14551,7 +14551,7 @@
         </p:nvSpPr>
         <p:spPr>
           <a:xfrm>
-            <a:off x="15627400" y="8066130"/>
+            <a:off x="15627400" y="8029288"/>
             <a:ext cx="3208350" cy="430844"/>
           </a:xfrm>
           <a:prstGeom prst="rect">
@@ -14590,7 +14590,7 @@
         </p:nvSpPr>
         <p:spPr>
           <a:xfrm>
-            <a:off x="762000" y="9183730"/>
+            <a:off x="762000" y="9146888"/>
             <a:ext cx="13809313" cy="400070"/>
           </a:xfrm>
           <a:prstGeom prst="rect">
@@ -14629,7 +14629,7 @@
         </p:nvSpPr>
         <p:spPr>
           <a:xfrm>
-            <a:off x="762000" y="4194048"/>
+            <a:off x="762000" y="4175627"/>
             <a:ext cx="18581751" cy="1557196"/>
           </a:xfrm>
           <a:prstGeom prst="rect">
@@ -14684,8 +14684,8 @@
         </p:nvSpPr>
         <p:spPr>
           <a:xfrm>
-            <a:off x="762000" y="10345801"/>
-            <a:ext cx="8890000" cy="203200"/>
+            <a:off x="762000" y="10308958"/>
+            <a:ext cx="8890000" cy="240042"/>
           </a:xfrm>
           <a:prstGeom prst="rect">
             <a:avLst/>
@@ -14723,8 +14723,8 @@
         </p:nvSpPr>
         <p:spPr>
           <a:xfrm>
-            <a:off x="18073751" y="10345801"/>
-            <a:ext cx="1270000" cy="203200"/>
+            <a:off x="18073751" y="10308958"/>
+            <a:ext cx="1270000" cy="240042"/>
           </a:xfrm>
           <a:prstGeom prst="rect">
             <a:avLst/>
@@ -14866,7 +14866,7 @@
         </p:nvSpPr>
         <p:spPr>
           <a:xfrm>
-            <a:off x="762000" y="7709204"/>
+            <a:off x="762000" y="7672362"/>
             <a:ext cx="3208350" cy="184647"/>
           </a:xfrm>
           <a:prstGeom prst="rect">
@@ -14905,7 +14905,7 @@
         </p:nvSpPr>
         <p:spPr>
           <a:xfrm>
-            <a:off x="762000" y="8066130"/>
+            <a:off x="762000" y="8029288"/>
             <a:ext cx="3208350" cy="430844"/>
           </a:xfrm>
           <a:prstGeom prst="rect">
@@ -14944,7 +14944,7 @@
         </p:nvSpPr>
         <p:spPr>
           <a:xfrm>
-            <a:off x="4478350" y="7709204"/>
+            <a:off x="4478350" y="7672362"/>
             <a:ext cx="3208350" cy="184647"/>
           </a:xfrm>
           <a:prstGeom prst="rect">
@@ -14983,7 +14983,7 @@
         </p:nvSpPr>
         <p:spPr>
           <a:xfrm>
-            <a:off x="4478350" y="8066130"/>
+            <a:off x="4478350" y="8029288"/>
             <a:ext cx="3208350" cy="430844"/>
           </a:xfrm>
           <a:prstGeom prst="rect">
@@ -15022,7 +15022,7 @@
         </p:nvSpPr>
         <p:spPr>
           <a:xfrm>
-            <a:off x="8194700" y="7709204"/>
+            <a:off x="8194700" y="7672362"/>
             <a:ext cx="3208350" cy="184647"/>
           </a:xfrm>
           <a:prstGeom prst="rect">
@@ -15061,7 +15061,7 @@
         </p:nvSpPr>
         <p:spPr>
           <a:xfrm>
-            <a:off x="8194700" y="8066130"/>
+            <a:off x="8194700" y="8029288"/>
             <a:ext cx="3208350" cy="430844"/>
           </a:xfrm>
           <a:prstGeom prst="rect">
@@ -15100,7 +15100,7 @@
         </p:nvSpPr>
         <p:spPr>
           <a:xfrm>
-            <a:off x="11911050" y="7709204"/>
+            <a:off x="11911050" y="7672362"/>
             <a:ext cx="3208350" cy="184647"/>
           </a:xfrm>
           <a:prstGeom prst="rect">
@@ -15139,7 +15139,7 @@
         </p:nvSpPr>
         <p:spPr>
           <a:xfrm>
-            <a:off x="11911050" y="8066130"/>
+            <a:off x="11911050" y="8029288"/>
             <a:ext cx="3208350" cy="430844"/>
           </a:xfrm>
           <a:prstGeom prst="rect">
@@ -15178,7 +15178,7 @@
         </p:nvSpPr>
         <p:spPr>
           <a:xfrm>
-            <a:off x="15627400" y="7709204"/>
+            <a:off x="15627400" y="7672362"/>
             <a:ext cx="3208350" cy="184647"/>
           </a:xfrm>
           <a:prstGeom prst="rect">
@@ -15217,7 +15217,7 @@
         </p:nvSpPr>
         <p:spPr>
           <a:xfrm>
-            <a:off x="15627400" y="8066130"/>
+            <a:off x="15627400" y="8029288"/>
             <a:ext cx="3208350" cy="430844"/>
           </a:xfrm>
           <a:prstGeom prst="rect">
@@ -15256,7 +15256,7 @@
         </p:nvSpPr>
         <p:spPr>
           <a:xfrm>
-            <a:off x="762000" y="9183730"/>
+            <a:off x="762000" y="9146888"/>
             <a:ext cx="13809313" cy="400070"/>
           </a:xfrm>
           <a:prstGeom prst="rect">
@@ -15295,7 +15295,7 @@
         </p:nvSpPr>
         <p:spPr>
           <a:xfrm>
-            <a:off x="762000" y="4724141"/>
+            <a:off x="762000" y="4705720"/>
             <a:ext cx="18581751" cy="497010"/>
           </a:xfrm>
           <a:prstGeom prst="rect">
@@ -15334,8 +15334,8 @@
         </p:nvSpPr>
         <p:spPr>
           <a:xfrm>
-            <a:off x="762000" y="10345801"/>
-            <a:ext cx="8890000" cy="203200"/>
+            <a:off x="762000" y="10308958"/>
+            <a:ext cx="8890000" cy="240042"/>
           </a:xfrm>
           <a:prstGeom prst="rect">
             <a:avLst/>
@@ -15373,8 +15373,8 @@
         </p:nvSpPr>
         <p:spPr>
           <a:xfrm>
-            <a:off x="18073751" y="10345801"/>
-            <a:ext cx="1270000" cy="203200"/>
+            <a:off x="18073751" y="10308958"/>
+            <a:ext cx="1270000" cy="240042"/>
           </a:xfrm>
           <a:prstGeom prst="rect">
             <a:avLst/>
@@ -15516,7 +15516,7 @@
         </p:nvSpPr>
         <p:spPr>
           <a:xfrm>
-            <a:off x="762000" y="3847003"/>
+            <a:off x="762000" y="3828582"/>
             <a:ext cx="4264437" cy="830915"/>
           </a:xfrm>
           <a:prstGeom prst="rect">
@@ -15555,7 +15555,7 @@
         </p:nvSpPr>
         <p:spPr>
           <a:xfrm>
-            <a:off x="762000" y="4709287"/>
+            <a:off x="762000" y="4690866"/>
             <a:ext cx="4264437" cy="430844"/>
           </a:xfrm>
           <a:prstGeom prst="rect">
@@ -15594,7 +15594,7 @@
         </p:nvSpPr>
         <p:spPr>
           <a:xfrm>
-            <a:off x="762000" y="5278693"/>
+            <a:off x="762000" y="5260272"/>
             <a:ext cx="4264437" cy="400070"/>
           </a:xfrm>
           <a:prstGeom prst="rect">
@@ -15633,7 +15633,7 @@
         </p:nvSpPr>
         <p:spPr>
           <a:xfrm>
-            <a:off x="5534437" y="3847003"/>
+            <a:off x="5534437" y="3828582"/>
             <a:ext cx="4264437" cy="830915"/>
           </a:xfrm>
           <a:prstGeom prst="rect">
@@ -15672,7 +15672,7 @@
         </p:nvSpPr>
         <p:spPr>
           <a:xfrm>
-            <a:off x="5534437" y="4709287"/>
+            <a:off x="5534437" y="4690866"/>
             <a:ext cx="4264437" cy="430844"/>
           </a:xfrm>
           <a:prstGeom prst="rect">
@@ -15711,7 +15711,7 @@
         </p:nvSpPr>
         <p:spPr>
           <a:xfrm>
-            <a:off x="5534437" y="5278693"/>
+            <a:off x="5534437" y="5260272"/>
             <a:ext cx="4264437" cy="400070"/>
           </a:xfrm>
           <a:prstGeom prst="rect">
@@ -15750,7 +15750,7 @@
         </p:nvSpPr>
         <p:spPr>
           <a:xfrm>
-            <a:off x="10306875" y="3847003"/>
+            <a:off x="10306875" y="3828582"/>
             <a:ext cx="4264437" cy="830915"/>
           </a:xfrm>
           <a:prstGeom prst="rect">
@@ -15789,7 +15789,7 @@
         </p:nvSpPr>
         <p:spPr>
           <a:xfrm>
-            <a:off x="10306875" y="4709287"/>
+            <a:off x="10306875" y="4690866"/>
             <a:ext cx="4264437" cy="430844"/>
           </a:xfrm>
           <a:prstGeom prst="rect">
@@ -15828,7 +15828,7 @@
         </p:nvSpPr>
         <p:spPr>
           <a:xfrm>
-            <a:off x="10306875" y="5278693"/>
+            <a:off x="10306875" y="5260272"/>
             <a:ext cx="4264437" cy="400070"/>
           </a:xfrm>
           <a:prstGeom prst="rect">
@@ -15867,7 +15867,7 @@
         </p:nvSpPr>
         <p:spPr>
           <a:xfrm>
-            <a:off x="15079313" y="3847003"/>
+            <a:off x="15079313" y="3828582"/>
             <a:ext cx="4264437" cy="830915"/>
           </a:xfrm>
           <a:prstGeom prst="rect">
@@ -15906,7 +15906,7 @@
         </p:nvSpPr>
         <p:spPr>
           <a:xfrm>
-            <a:off x="15079313" y="4709287"/>
+            <a:off x="15079313" y="4690866"/>
             <a:ext cx="4264437" cy="430844"/>
           </a:xfrm>
           <a:prstGeom prst="rect">
@@ -15945,7 +15945,7 @@
         </p:nvSpPr>
         <p:spPr>
           <a:xfrm>
-            <a:off x="15079313" y="5278693"/>
+            <a:off x="15079313" y="5260272"/>
             <a:ext cx="4264437" cy="400070"/>
           </a:xfrm>
           <a:prstGeom prst="rect">
@@ -15984,7 +15984,7 @@
         </p:nvSpPr>
         <p:spPr>
           <a:xfrm>
-            <a:off x="762000" y="6945390"/>
+            <a:off x="762000" y="6926969"/>
             <a:ext cx="4264437" cy="830915"/>
           </a:xfrm>
           <a:prstGeom prst="rect">
@@ -16023,7 +16023,7 @@
         </p:nvSpPr>
         <p:spPr>
           <a:xfrm>
-            <a:off x="762000" y="7807674"/>
+            <a:off x="762000" y="7789253"/>
             <a:ext cx="4264437" cy="430844"/>
           </a:xfrm>
           <a:prstGeom prst="rect">
@@ -16062,7 +16062,7 @@
         </p:nvSpPr>
         <p:spPr>
           <a:xfrm>
-            <a:off x="762000" y="8377080"/>
+            <a:off x="762000" y="8358659"/>
             <a:ext cx="4264437" cy="400070"/>
           </a:xfrm>
           <a:prstGeom prst="rect">
@@ -16101,7 +16101,7 @@
         </p:nvSpPr>
         <p:spPr>
           <a:xfrm>
-            <a:off x="5534437" y="6945390"/>
+            <a:off x="5534437" y="6926969"/>
             <a:ext cx="4264437" cy="830915"/>
           </a:xfrm>
           <a:prstGeom prst="rect">
@@ -16140,7 +16140,7 @@
         </p:nvSpPr>
         <p:spPr>
           <a:xfrm>
-            <a:off x="5534437" y="7807674"/>
+            <a:off x="5534437" y="7789253"/>
             <a:ext cx="4264437" cy="430844"/>
           </a:xfrm>
           <a:prstGeom prst="rect">
@@ -16179,7 +16179,7 @@
         </p:nvSpPr>
         <p:spPr>
           <a:xfrm>
-            <a:off x="5534437" y="8377080"/>
+            <a:off x="5534437" y="8358659"/>
             <a:ext cx="4264437" cy="400070"/>
           </a:xfrm>
           <a:prstGeom prst="rect">
@@ -16218,7 +16218,7 @@
         </p:nvSpPr>
         <p:spPr>
           <a:xfrm>
-            <a:off x="10306875" y="6945390"/>
+            <a:off x="10306875" y="6926969"/>
             <a:ext cx="4264437" cy="830915"/>
           </a:xfrm>
           <a:prstGeom prst="rect">
@@ -16257,7 +16257,7 @@
         </p:nvSpPr>
         <p:spPr>
           <a:xfrm>
-            <a:off x="10306875" y="7807674"/>
+            <a:off x="10306875" y="7789253"/>
             <a:ext cx="4264437" cy="430844"/>
           </a:xfrm>
           <a:prstGeom prst="rect">
@@ -16296,7 +16296,7 @@
         </p:nvSpPr>
         <p:spPr>
           <a:xfrm>
-            <a:off x="10306875" y="8377080"/>
+            <a:off x="10306875" y="8358659"/>
             <a:ext cx="4264437" cy="400070"/>
           </a:xfrm>
           <a:prstGeom prst="rect">
@@ -16335,7 +16335,7 @@
         </p:nvSpPr>
         <p:spPr>
           <a:xfrm>
-            <a:off x="15079313" y="6945390"/>
+            <a:off x="15079313" y="6926969"/>
             <a:ext cx="4264437" cy="830915"/>
           </a:xfrm>
           <a:prstGeom prst="rect">
@@ -16374,7 +16374,7 @@
         </p:nvSpPr>
         <p:spPr>
           <a:xfrm>
-            <a:off x="15079313" y="7807674"/>
+            <a:off x="15079313" y="7789253"/>
             <a:ext cx="4264437" cy="430844"/>
           </a:xfrm>
           <a:prstGeom prst="rect">
@@ -16413,7 +16413,7 @@
         </p:nvSpPr>
         <p:spPr>
           <a:xfrm>
-            <a:off x="15079313" y="8377080"/>
+            <a:off x="15079313" y="8358659"/>
             <a:ext cx="4264437" cy="400070"/>
           </a:xfrm>
           <a:prstGeom prst="rect">
@@ -16452,8 +16452,8 @@
         </p:nvSpPr>
         <p:spPr>
           <a:xfrm>
-            <a:off x="762000" y="10345801"/>
-            <a:ext cx="8890000" cy="203200"/>
+            <a:off x="762000" y="10308958"/>
+            <a:ext cx="8890000" cy="240042"/>
           </a:xfrm>
           <a:prstGeom prst="rect">
             <a:avLst/>
@@ -16491,8 +16491,8 @@
         </p:nvSpPr>
         <p:spPr>
           <a:xfrm>
-            <a:off x="18073751" y="10345801"/>
-            <a:ext cx="1270000" cy="203200"/>
+            <a:off x="18073751" y="10308958"/>
+            <a:ext cx="1270000" cy="240042"/>
           </a:xfrm>
           <a:prstGeom prst="rect">
             <a:avLst/>
@@ -16634,7 +16634,7 @@
         </p:nvSpPr>
         <p:spPr>
           <a:xfrm>
-            <a:off x="762000" y="7309134"/>
+            <a:off x="762000" y="7272291"/>
             <a:ext cx="3208350" cy="184647"/>
           </a:xfrm>
           <a:prstGeom prst="rect">
@@ -16673,7 +16673,7 @@
         </p:nvSpPr>
         <p:spPr>
           <a:xfrm>
-            <a:off x="762000" y="7666060"/>
+            <a:off x="762000" y="7629218"/>
             <a:ext cx="3208350" cy="430844"/>
           </a:xfrm>
           <a:prstGeom prst="rect">
@@ -16712,7 +16712,7 @@
         </p:nvSpPr>
         <p:spPr>
           <a:xfrm>
-            <a:off x="4478350" y="7309134"/>
+            <a:off x="4478350" y="7272291"/>
             <a:ext cx="3208350" cy="184647"/>
           </a:xfrm>
           <a:prstGeom prst="rect">
@@ -16751,7 +16751,7 @@
         </p:nvSpPr>
         <p:spPr>
           <a:xfrm>
-            <a:off x="4478350" y="7666060"/>
+            <a:off x="4478350" y="7629218"/>
             <a:ext cx="3208350" cy="430844"/>
           </a:xfrm>
           <a:prstGeom prst="rect">
@@ -16790,7 +16790,7 @@
         </p:nvSpPr>
         <p:spPr>
           <a:xfrm>
-            <a:off x="8194700" y="7309134"/>
+            <a:off x="8194700" y="7272291"/>
             <a:ext cx="3208350" cy="184647"/>
           </a:xfrm>
           <a:prstGeom prst="rect">
@@ -16829,7 +16829,7 @@
         </p:nvSpPr>
         <p:spPr>
           <a:xfrm>
-            <a:off x="8194700" y="7666060"/>
+            <a:off x="8194700" y="7629218"/>
             <a:ext cx="3208350" cy="430844"/>
           </a:xfrm>
           <a:prstGeom prst="rect">
@@ -16868,7 +16868,7 @@
         </p:nvSpPr>
         <p:spPr>
           <a:xfrm>
-            <a:off x="11911050" y="7309134"/>
+            <a:off x="11911050" y="7272291"/>
             <a:ext cx="3208350" cy="184647"/>
           </a:xfrm>
           <a:prstGeom prst="rect">
@@ -16907,7 +16907,7 @@
         </p:nvSpPr>
         <p:spPr>
           <a:xfrm>
-            <a:off x="11911050" y="7666060"/>
+            <a:off x="11911050" y="7629218"/>
             <a:ext cx="3208350" cy="430844"/>
           </a:xfrm>
           <a:prstGeom prst="rect">
@@ -16946,7 +16946,7 @@
         </p:nvSpPr>
         <p:spPr>
           <a:xfrm>
-            <a:off x="15627400" y="7309134"/>
+            <a:off x="15627400" y="7272291"/>
             <a:ext cx="3208350" cy="184647"/>
           </a:xfrm>
           <a:prstGeom prst="rect">
@@ -16985,7 +16985,7 @@
         </p:nvSpPr>
         <p:spPr>
           <a:xfrm>
-            <a:off x="15627400" y="7666060"/>
+            <a:off x="15627400" y="7629218"/>
             <a:ext cx="3208350" cy="430844"/>
           </a:xfrm>
           <a:prstGeom prst="rect">
@@ -17024,7 +17024,7 @@
         </p:nvSpPr>
         <p:spPr>
           <a:xfrm>
-            <a:off x="762000" y="8783660"/>
+            <a:off x="762000" y="8746818"/>
             <a:ext cx="13809313" cy="800140"/>
           </a:xfrm>
           <a:prstGeom prst="rect">
@@ -17063,7 +17063,7 @@
         </p:nvSpPr>
         <p:spPr>
           <a:xfrm>
-            <a:off x="762000" y="4092492"/>
+            <a:off x="762000" y="4074071"/>
             <a:ext cx="18581751" cy="1360239"/>
           </a:xfrm>
           <a:prstGeom prst="rect">
@@ -17118,8 +17118,8 @@
         </p:nvSpPr>
         <p:spPr>
           <a:xfrm>
-            <a:off x="762000" y="10345801"/>
-            <a:ext cx="8890000" cy="203200"/>
+            <a:off x="762000" y="10308958"/>
+            <a:ext cx="8890000" cy="240042"/>
           </a:xfrm>
           <a:prstGeom prst="rect">
             <a:avLst/>
@@ -17157,8 +17157,8 @@
         </p:nvSpPr>
         <p:spPr>
           <a:xfrm>
-            <a:off x="18073751" y="10345801"/>
-            <a:ext cx="1270000" cy="203200"/>
+            <a:off x="18073751" y="10308958"/>
+            <a:ext cx="1270000" cy="240042"/>
           </a:xfrm>
           <a:prstGeom prst="rect">
             <a:avLst/>
@@ -17300,7 +17300,7 @@
         </p:nvSpPr>
         <p:spPr>
           <a:xfrm>
-            <a:off x="762000" y="7709204"/>
+            <a:off x="762000" y="7672362"/>
             <a:ext cx="3208350" cy="184647"/>
           </a:xfrm>
           <a:prstGeom prst="rect">
@@ -17339,7 +17339,7 @@
         </p:nvSpPr>
         <p:spPr>
           <a:xfrm>
-            <a:off x="762000" y="8066130"/>
+            <a:off x="762000" y="8029288"/>
             <a:ext cx="3208350" cy="430844"/>
           </a:xfrm>
           <a:prstGeom prst="rect">
@@ -17378,7 +17378,7 @@
         </p:nvSpPr>
         <p:spPr>
           <a:xfrm>
-            <a:off x="4478350" y="7709204"/>
+            <a:off x="4478350" y="7672362"/>
             <a:ext cx="3208350" cy="184647"/>
           </a:xfrm>
           <a:prstGeom prst="rect">
@@ -17417,7 +17417,7 @@
         </p:nvSpPr>
         <p:spPr>
           <a:xfrm>
-            <a:off x="4478350" y="8066130"/>
+            <a:off x="4478350" y="8029288"/>
             <a:ext cx="3208350" cy="430844"/>
           </a:xfrm>
           <a:prstGeom prst="rect">
@@ -17456,7 +17456,7 @@
         </p:nvSpPr>
         <p:spPr>
           <a:xfrm>
-            <a:off x="8194700" y="7709204"/>
+            <a:off x="8194700" y="7672362"/>
             <a:ext cx="3208350" cy="184647"/>
           </a:xfrm>
           <a:prstGeom prst="rect">
@@ -17495,7 +17495,7 @@
         </p:nvSpPr>
         <p:spPr>
           <a:xfrm>
-            <a:off x="8194700" y="8066130"/>
+            <a:off x="8194700" y="8029288"/>
             <a:ext cx="3208350" cy="430844"/>
           </a:xfrm>
           <a:prstGeom prst="rect">
@@ -17534,7 +17534,7 @@
         </p:nvSpPr>
         <p:spPr>
           <a:xfrm>
-            <a:off x="11911050" y="7709204"/>
+            <a:off x="11911050" y="7672362"/>
             <a:ext cx="3208350" cy="184647"/>
           </a:xfrm>
           <a:prstGeom prst="rect">
@@ -17573,7 +17573,7 @@
         </p:nvSpPr>
         <p:spPr>
           <a:xfrm>
-            <a:off x="11911050" y="8066130"/>
+            <a:off x="11911050" y="8029288"/>
             <a:ext cx="3208350" cy="430844"/>
           </a:xfrm>
           <a:prstGeom prst="rect">
@@ -17612,7 +17612,7 @@
         </p:nvSpPr>
         <p:spPr>
           <a:xfrm>
-            <a:off x="15627400" y="7709204"/>
+            <a:off x="15627400" y="7672362"/>
             <a:ext cx="3208350" cy="184647"/>
           </a:xfrm>
           <a:prstGeom prst="rect">
@@ -17651,7 +17651,7 @@
         </p:nvSpPr>
         <p:spPr>
           <a:xfrm>
-            <a:off x="15627400" y="8066130"/>
+            <a:off x="15627400" y="8029288"/>
             <a:ext cx="3208350" cy="430844"/>
           </a:xfrm>
           <a:prstGeom prst="rect">
@@ -17690,7 +17690,7 @@
         </p:nvSpPr>
         <p:spPr>
           <a:xfrm>
-            <a:off x="762000" y="9183730"/>
+            <a:off x="762000" y="9146888"/>
             <a:ext cx="13809313" cy="400070"/>
           </a:xfrm>
           <a:prstGeom prst="rect">
@@ -17729,7 +17729,7 @@
         </p:nvSpPr>
         <p:spPr>
           <a:xfrm>
-            <a:off x="762000" y="4757224"/>
+            <a:off x="762000" y="4738803"/>
             <a:ext cx="18581751" cy="430844"/>
           </a:xfrm>
           <a:prstGeom prst="rect">
@@ -17768,8 +17768,8 @@
         </p:nvSpPr>
         <p:spPr>
           <a:xfrm>
-            <a:off x="762000" y="10345801"/>
-            <a:ext cx="8890000" cy="203200"/>
+            <a:off x="762000" y="10308958"/>
+            <a:ext cx="8890000" cy="240042"/>
           </a:xfrm>
           <a:prstGeom prst="rect">
             <a:avLst/>
@@ -17807,8 +17807,8 @@
         </p:nvSpPr>
         <p:spPr>
           <a:xfrm>
-            <a:off x="18073751" y="10345801"/>
-            <a:ext cx="1270000" cy="203200"/>
+            <a:off x="18073751" y="10308958"/>
+            <a:ext cx="1270000" cy="240042"/>
           </a:xfrm>
           <a:prstGeom prst="rect">
             <a:avLst/>
@@ -17950,7 +17950,7 @@
         </p:nvSpPr>
         <p:spPr>
           <a:xfrm>
-            <a:off x="762000" y="7709204"/>
+            <a:off x="762000" y="7672362"/>
             <a:ext cx="3208350" cy="184647"/>
           </a:xfrm>
           <a:prstGeom prst="rect">
@@ -17989,7 +17989,7 @@
         </p:nvSpPr>
         <p:spPr>
           <a:xfrm>
-            <a:off x="762000" y="8066130"/>
+            <a:off x="762000" y="8029288"/>
             <a:ext cx="3208350" cy="430844"/>
           </a:xfrm>
           <a:prstGeom prst="rect">
@@ -18028,7 +18028,7 @@
         </p:nvSpPr>
         <p:spPr>
           <a:xfrm>
-            <a:off x="4478350" y="7709204"/>
+            <a:off x="4478350" y="7672362"/>
             <a:ext cx="3208350" cy="184647"/>
           </a:xfrm>
           <a:prstGeom prst="rect">
@@ -18067,7 +18067,7 @@
         </p:nvSpPr>
         <p:spPr>
           <a:xfrm>
-            <a:off x="4478350" y="8066130"/>
+            <a:off x="4478350" y="8029288"/>
             <a:ext cx="3208350" cy="430844"/>
           </a:xfrm>
           <a:prstGeom prst="rect">
@@ -18106,7 +18106,7 @@
         </p:nvSpPr>
         <p:spPr>
           <a:xfrm>
-            <a:off x="8194700" y="7709204"/>
+            <a:off x="8194700" y="7672362"/>
             <a:ext cx="3208350" cy="184647"/>
           </a:xfrm>
           <a:prstGeom prst="rect">
@@ -18145,7 +18145,7 @@
         </p:nvSpPr>
         <p:spPr>
           <a:xfrm>
-            <a:off x="8194700" y="8066130"/>
+            <a:off x="8194700" y="8029288"/>
             <a:ext cx="3208350" cy="430844"/>
           </a:xfrm>
           <a:prstGeom prst="rect">
@@ -18184,7 +18184,7 @@
         </p:nvSpPr>
         <p:spPr>
           <a:xfrm>
-            <a:off x="11911050" y="7709204"/>
+            <a:off x="11911050" y="7672362"/>
             <a:ext cx="3208350" cy="184647"/>
           </a:xfrm>
           <a:prstGeom prst="rect">
@@ -18223,7 +18223,7 @@
         </p:nvSpPr>
         <p:spPr>
           <a:xfrm>
-            <a:off x="11911050" y="8066130"/>
+            <a:off x="11911050" y="8029288"/>
             <a:ext cx="3208350" cy="430844"/>
           </a:xfrm>
           <a:prstGeom prst="rect">
@@ -18262,7 +18262,7 @@
         </p:nvSpPr>
         <p:spPr>
           <a:xfrm>
-            <a:off x="15627400" y="7709204"/>
+            <a:off x="15627400" y="7672362"/>
             <a:ext cx="3208350" cy="184647"/>
           </a:xfrm>
           <a:prstGeom prst="rect">
@@ -18301,7 +18301,7 @@
         </p:nvSpPr>
         <p:spPr>
           <a:xfrm>
-            <a:off x="15627400" y="8066130"/>
+            <a:off x="15627400" y="8029288"/>
             <a:ext cx="3208350" cy="430844"/>
           </a:xfrm>
           <a:prstGeom prst="rect">
@@ -18340,7 +18340,7 @@
         </p:nvSpPr>
         <p:spPr>
           <a:xfrm>
-            <a:off x="762000" y="9183730"/>
+            <a:off x="762000" y="9146888"/>
             <a:ext cx="13809313" cy="400070"/>
           </a:xfrm>
           <a:prstGeom prst="rect">
@@ -18379,7 +18379,7 @@
         </p:nvSpPr>
         <p:spPr>
           <a:xfrm>
-            <a:off x="762000" y="4603351"/>
+            <a:off x="762000" y="4584930"/>
             <a:ext cx="18581751" cy="738591"/>
           </a:xfrm>
           <a:prstGeom prst="rect">
@@ -18434,8 +18434,8 @@
         </p:nvSpPr>
         <p:spPr>
           <a:xfrm>
-            <a:off x="762000" y="10345801"/>
-            <a:ext cx="8890000" cy="203200"/>
+            <a:off x="762000" y="10308958"/>
+            <a:ext cx="8890000" cy="240042"/>
           </a:xfrm>
           <a:prstGeom prst="rect">
             <a:avLst/>
@@ -18473,8 +18473,8 @@
         </p:nvSpPr>
         <p:spPr>
           <a:xfrm>
-            <a:off x="18073751" y="10345801"/>
-            <a:ext cx="1270000" cy="203200"/>
+            <a:off x="18073751" y="10308958"/>
+            <a:ext cx="1270000" cy="240042"/>
           </a:xfrm>
           <a:prstGeom prst="rect">
             <a:avLst/>
@@ -18616,7 +18616,7 @@
         </p:nvSpPr>
         <p:spPr>
           <a:xfrm>
-            <a:off x="762000" y="7709204"/>
+            <a:off x="762000" y="7672362"/>
             <a:ext cx="3208350" cy="184647"/>
           </a:xfrm>
           <a:prstGeom prst="rect">
@@ -18655,7 +18655,7 @@
         </p:nvSpPr>
         <p:spPr>
           <a:xfrm>
-            <a:off x="762000" y="8066130"/>
+            <a:off x="762000" y="8029288"/>
             <a:ext cx="3208350" cy="430844"/>
           </a:xfrm>
           <a:prstGeom prst="rect">
@@ -18694,7 +18694,7 @@
         </p:nvSpPr>
         <p:spPr>
           <a:xfrm>
-            <a:off x="4478350" y="7709204"/>
+            <a:off x="4478350" y="7672362"/>
             <a:ext cx="3208350" cy="184647"/>
           </a:xfrm>
           <a:prstGeom prst="rect">
@@ -18733,7 +18733,7 @@
         </p:nvSpPr>
         <p:spPr>
           <a:xfrm>
-            <a:off x="4478350" y="8066130"/>
+            <a:off x="4478350" y="8029288"/>
             <a:ext cx="3208350" cy="430844"/>
           </a:xfrm>
           <a:prstGeom prst="rect">
@@ -18772,7 +18772,7 @@
         </p:nvSpPr>
         <p:spPr>
           <a:xfrm>
-            <a:off x="8194700" y="7709204"/>
+            <a:off x="8194700" y="7672362"/>
             <a:ext cx="3208350" cy="184647"/>
           </a:xfrm>
           <a:prstGeom prst="rect">
@@ -18811,7 +18811,7 @@
         </p:nvSpPr>
         <p:spPr>
           <a:xfrm>
-            <a:off x="8194700" y="8066130"/>
+            <a:off x="8194700" y="8029288"/>
             <a:ext cx="3208350" cy="430844"/>
           </a:xfrm>
           <a:prstGeom prst="rect">
@@ -18850,7 +18850,7 @@
         </p:nvSpPr>
         <p:spPr>
           <a:xfrm>
-            <a:off x="11911050" y="7709204"/>
+            <a:off x="11911050" y="7672362"/>
             <a:ext cx="3208350" cy="184647"/>
           </a:xfrm>
           <a:prstGeom prst="rect">
@@ -18889,7 +18889,7 @@
         </p:nvSpPr>
         <p:spPr>
           <a:xfrm>
-            <a:off x="11911050" y="8066130"/>
+            <a:off x="11911050" y="8029288"/>
             <a:ext cx="3208350" cy="430844"/>
           </a:xfrm>
           <a:prstGeom prst="rect">
@@ -18928,7 +18928,7 @@
         </p:nvSpPr>
         <p:spPr>
           <a:xfrm>
-            <a:off x="15627400" y="7709204"/>
+            <a:off x="15627400" y="7672362"/>
             <a:ext cx="3208350" cy="184647"/>
           </a:xfrm>
           <a:prstGeom prst="rect">
@@ -18967,7 +18967,7 @@
         </p:nvSpPr>
         <p:spPr>
           <a:xfrm>
-            <a:off x="15627400" y="8066130"/>
+            <a:off x="15627400" y="8029288"/>
             <a:ext cx="3208350" cy="430844"/>
           </a:xfrm>
           <a:prstGeom prst="rect">
@@ -19006,7 +19006,7 @@
         </p:nvSpPr>
         <p:spPr>
           <a:xfrm>
-            <a:off x="762000" y="9183730"/>
+            <a:off x="762000" y="9146888"/>
             <a:ext cx="13809313" cy="400070"/>
           </a:xfrm>
           <a:prstGeom prst="rect">
@@ -19045,7 +19045,7 @@
         </p:nvSpPr>
         <p:spPr>
           <a:xfrm>
-            <a:off x="762000" y="4572576"/>
+            <a:off x="762000" y="4554155"/>
             <a:ext cx="18581751" cy="800140"/>
           </a:xfrm>
           <a:prstGeom prst="rect">
@@ -19100,8 +19100,8 @@
         </p:nvSpPr>
         <p:spPr>
           <a:xfrm>
-            <a:off x="762000" y="10345801"/>
-            <a:ext cx="8890000" cy="203200"/>
+            <a:off x="762000" y="10308958"/>
+            <a:ext cx="8890000" cy="240042"/>
           </a:xfrm>
           <a:prstGeom prst="rect">
             <a:avLst/>
@@ -19139,8 +19139,8 @@
         </p:nvSpPr>
         <p:spPr>
           <a:xfrm>
-            <a:off x="18073751" y="10345801"/>
-            <a:ext cx="1270000" cy="203200"/>
+            <a:off x="18073751" y="10308958"/>
+            <a:ext cx="1270000" cy="240042"/>
           </a:xfrm>
           <a:prstGeom prst="rect">
             <a:avLst/>
@@ -19282,7 +19282,7 @@
         </p:nvSpPr>
         <p:spPr>
           <a:xfrm>
-            <a:off x="762000" y="7709204"/>
+            <a:off x="762000" y="7672362"/>
             <a:ext cx="3208350" cy="184647"/>
           </a:xfrm>
           <a:prstGeom prst="rect">
@@ -19321,7 +19321,7 @@
         </p:nvSpPr>
         <p:spPr>
           <a:xfrm>
-            <a:off x="762000" y="8066130"/>
+            <a:off x="762000" y="8029288"/>
             <a:ext cx="3208350" cy="430844"/>
           </a:xfrm>
           <a:prstGeom prst="rect">
@@ -19360,7 +19360,7 @@
         </p:nvSpPr>
         <p:spPr>
           <a:xfrm>
-            <a:off x="4478350" y="7709204"/>
+            <a:off x="4478350" y="7672362"/>
             <a:ext cx="3208350" cy="184647"/>
           </a:xfrm>
           <a:prstGeom prst="rect">
@@ -19399,7 +19399,7 @@
         </p:nvSpPr>
         <p:spPr>
           <a:xfrm>
-            <a:off x="4478350" y="8066130"/>
+            <a:off x="4478350" y="8029288"/>
             <a:ext cx="3208350" cy="430844"/>
           </a:xfrm>
           <a:prstGeom prst="rect">
@@ -19438,7 +19438,7 @@
         </p:nvSpPr>
         <p:spPr>
           <a:xfrm>
-            <a:off x="8194700" y="7709204"/>
+            <a:off x="8194700" y="7672362"/>
             <a:ext cx="3208350" cy="184647"/>
           </a:xfrm>
           <a:prstGeom prst="rect">
@@ -19477,7 +19477,7 @@
         </p:nvSpPr>
         <p:spPr>
           <a:xfrm>
-            <a:off x="8194700" y="8066130"/>
+            <a:off x="8194700" y="8029288"/>
             <a:ext cx="3208350" cy="430844"/>
           </a:xfrm>
           <a:prstGeom prst="rect">
@@ -19516,7 +19516,7 @@
         </p:nvSpPr>
         <p:spPr>
           <a:xfrm>
-            <a:off x="11911050" y="7709204"/>
+            <a:off x="11911050" y="7672362"/>
             <a:ext cx="3208350" cy="184647"/>
           </a:xfrm>
           <a:prstGeom prst="rect">
@@ -19555,7 +19555,7 @@
         </p:nvSpPr>
         <p:spPr>
           <a:xfrm>
-            <a:off x="11911050" y="8066130"/>
+            <a:off x="11911050" y="8029288"/>
             <a:ext cx="3208350" cy="430844"/>
           </a:xfrm>
           <a:prstGeom prst="rect">
@@ -19594,7 +19594,7 @@
         </p:nvSpPr>
         <p:spPr>
           <a:xfrm>
-            <a:off x="15627400" y="7709204"/>
+            <a:off x="15627400" y="7672362"/>
             <a:ext cx="3208350" cy="184647"/>
           </a:xfrm>
           <a:prstGeom prst="rect">
@@ -19633,7 +19633,7 @@
         </p:nvSpPr>
         <p:spPr>
           <a:xfrm>
-            <a:off x="15627400" y="8066130"/>
+            <a:off x="15627400" y="8029288"/>
             <a:ext cx="3208350" cy="430844"/>
           </a:xfrm>
           <a:prstGeom prst="rect">
@@ -19672,7 +19672,7 @@
         </p:nvSpPr>
         <p:spPr>
           <a:xfrm>
-            <a:off x="762000" y="9183730"/>
+            <a:off x="762000" y="9146888"/>
             <a:ext cx="13809313" cy="400070"/>
           </a:xfrm>
           <a:prstGeom prst="rect">
@@ -19711,7 +19711,7 @@
         </p:nvSpPr>
         <p:spPr>
           <a:xfrm>
-            <a:off x="762000" y="4834161"/>
+            <a:off x="762000" y="4815739"/>
             <a:ext cx="18581751" cy="276971"/>
           </a:xfrm>
           <a:prstGeom prst="rect">
@@ -19750,8 +19750,8 @@
         </p:nvSpPr>
         <p:spPr>
           <a:xfrm>
-            <a:off x="762000" y="10345801"/>
-            <a:ext cx="8890000" cy="203200"/>
+            <a:off x="762000" y="10308958"/>
+            <a:ext cx="8890000" cy="240042"/>
           </a:xfrm>
           <a:prstGeom prst="rect">
             <a:avLst/>
@@ -19789,8 +19789,8 @@
         </p:nvSpPr>
         <p:spPr>
           <a:xfrm>
-            <a:off x="18073751" y="10345801"/>
-            <a:ext cx="1270000" cy="203200"/>
+            <a:off x="18073751" y="10308958"/>
+            <a:ext cx="1270000" cy="240042"/>
           </a:xfrm>
           <a:prstGeom prst="rect">
             <a:avLst/>
@@ -19932,7 +19932,7 @@
         </p:nvSpPr>
         <p:spPr>
           <a:xfrm>
-            <a:off x="762000" y="7709204"/>
+            <a:off x="762000" y="7672362"/>
             <a:ext cx="3208350" cy="184647"/>
           </a:xfrm>
           <a:prstGeom prst="rect">
@@ -19971,7 +19971,7 @@
         </p:nvSpPr>
         <p:spPr>
           <a:xfrm>
-            <a:off x="762000" y="8066130"/>
+            <a:off x="762000" y="8029288"/>
             <a:ext cx="3208350" cy="430844"/>
           </a:xfrm>
           <a:prstGeom prst="rect">
@@ -20010,7 +20010,7 @@
         </p:nvSpPr>
         <p:spPr>
           <a:xfrm>
-            <a:off x="4478350" y="7709204"/>
+            <a:off x="4478350" y="7672362"/>
             <a:ext cx="3208350" cy="184647"/>
           </a:xfrm>
           <a:prstGeom prst="rect">
@@ -20049,7 +20049,7 @@
         </p:nvSpPr>
         <p:spPr>
           <a:xfrm>
-            <a:off x="4478350" y="8066130"/>
+            <a:off x="4478350" y="8029288"/>
             <a:ext cx="3208350" cy="430844"/>
           </a:xfrm>
           <a:prstGeom prst="rect">
@@ -20088,7 +20088,7 @@
         </p:nvSpPr>
         <p:spPr>
           <a:xfrm>
-            <a:off x="8194700" y="7709204"/>
+            <a:off x="8194700" y="7672362"/>
             <a:ext cx="3208350" cy="184647"/>
           </a:xfrm>
           <a:prstGeom prst="rect">
@@ -20127,7 +20127,7 @@
         </p:nvSpPr>
         <p:spPr>
           <a:xfrm>
-            <a:off x="8194700" y="8066130"/>
+            <a:off x="8194700" y="8029288"/>
             <a:ext cx="3208350" cy="430844"/>
           </a:xfrm>
           <a:prstGeom prst="rect">
@@ -20166,7 +20166,7 @@
         </p:nvSpPr>
         <p:spPr>
           <a:xfrm>
-            <a:off x="11911050" y="7709204"/>
+            <a:off x="11911050" y="7672362"/>
             <a:ext cx="3208350" cy="184647"/>
           </a:xfrm>
           <a:prstGeom prst="rect">
@@ -20205,7 +20205,7 @@
         </p:nvSpPr>
         <p:spPr>
           <a:xfrm>
-            <a:off x="11911050" y="8066130"/>
+            <a:off x="11911050" y="8029288"/>
             <a:ext cx="3208350" cy="430844"/>
           </a:xfrm>
           <a:prstGeom prst="rect">
@@ -20244,7 +20244,7 @@
         </p:nvSpPr>
         <p:spPr>
           <a:xfrm>
-            <a:off x="15627400" y="7709204"/>
+            <a:off x="15627400" y="7672362"/>
             <a:ext cx="3208350" cy="184647"/>
           </a:xfrm>
           <a:prstGeom prst="rect">
@@ -20283,7 +20283,7 @@
         </p:nvSpPr>
         <p:spPr>
           <a:xfrm>
-            <a:off x="15627400" y="8066130"/>
+            <a:off x="15627400" y="8029288"/>
             <a:ext cx="3208350" cy="430844"/>
           </a:xfrm>
           <a:prstGeom prst="rect">
@@ -20322,7 +20322,7 @@
         </p:nvSpPr>
         <p:spPr>
           <a:xfrm>
-            <a:off x="762000" y="9183730"/>
+            <a:off x="762000" y="9146888"/>
             <a:ext cx="13809313" cy="400070"/>
           </a:xfrm>
           <a:prstGeom prst="rect">
@@ -20361,7 +20361,7 @@
         </p:nvSpPr>
         <p:spPr>
           <a:xfrm>
-            <a:off x="762000" y="4672594"/>
+            <a:off x="762000" y="4654173"/>
             <a:ext cx="18581751" cy="600105"/>
           </a:xfrm>
           <a:prstGeom prst="rect">
@@ -20416,8 +20416,8 @@
         </p:nvSpPr>
         <p:spPr>
           <a:xfrm>
-            <a:off x="762000" y="10345801"/>
-            <a:ext cx="8890000" cy="203200"/>
+            <a:off x="762000" y="10308958"/>
+            <a:ext cx="8890000" cy="240042"/>
           </a:xfrm>
           <a:prstGeom prst="rect">
             <a:avLst/>
@@ -20455,8 +20455,8 @@
         </p:nvSpPr>
         <p:spPr>
           <a:xfrm>
-            <a:off x="18073751" y="10345801"/>
-            <a:ext cx="1270000" cy="203200"/>
+            <a:off x="18073751" y="10308958"/>
+            <a:ext cx="1270000" cy="240042"/>
           </a:xfrm>
           <a:prstGeom prst="rect">
             <a:avLst/>
@@ -20598,7 +20598,7 @@
         </p:nvSpPr>
         <p:spPr>
           <a:xfrm>
-            <a:off x="762000" y="7709204"/>
+            <a:off x="762000" y="7672362"/>
             <a:ext cx="3208350" cy="184647"/>
           </a:xfrm>
           <a:prstGeom prst="rect">
@@ -20637,7 +20637,7 @@
         </p:nvSpPr>
         <p:spPr>
           <a:xfrm>
-            <a:off x="762000" y="8066130"/>
+            <a:off x="762000" y="8029288"/>
             <a:ext cx="3208350" cy="430844"/>
           </a:xfrm>
           <a:prstGeom prst="rect">
@@ -20676,7 +20676,7 @@
         </p:nvSpPr>
         <p:spPr>
           <a:xfrm>
-            <a:off x="4478350" y="7709204"/>
+            <a:off x="4478350" y="7672362"/>
             <a:ext cx="3208350" cy="184647"/>
           </a:xfrm>
           <a:prstGeom prst="rect">
@@ -20715,7 +20715,7 @@
         </p:nvSpPr>
         <p:spPr>
           <a:xfrm>
-            <a:off x="4478350" y="8066130"/>
+            <a:off x="4478350" y="8029288"/>
             <a:ext cx="3208350" cy="430844"/>
           </a:xfrm>
           <a:prstGeom prst="rect">
@@ -20754,7 +20754,7 @@
         </p:nvSpPr>
         <p:spPr>
           <a:xfrm>
-            <a:off x="8194700" y="7709204"/>
+            <a:off x="8194700" y="7672362"/>
             <a:ext cx="3208350" cy="184647"/>
           </a:xfrm>
           <a:prstGeom prst="rect">
@@ -20793,7 +20793,7 @@
         </p:nvSpPr>
         <p:spPr>
           <a:xfrm>
-            <a:off x="8194700" y="8066130"/>
+            <a:off x="8194700" y="8029288"/>
             <a:ext cx="3208350" cy="430844"/>
           </a:xfrm>
           <a:prstGeom prst="rect">
@@ -20832,7 +20832,7 @@
         </p:nvSpPr>
         <p:spPr>
           <a:xfrm>
-            <a:off x="11911050" y="7709204"/>
+            <a:off x="11911050" y="7672362"/>
             <a:ext cx="3208350" cy="184647"/>
           </a:xfrm>
           <a:prstGeom prst="rect">
@@ -20871,7 +20871,7 @@
         </p:nvSpPr>
         <p:spPr>
           <a:xfrm>
-            <a:off x="11911050" y="8066130"/>
+            <a:off x="11911050" y="8029288"/>
             <a:ext cx="3208350" cy="430844"/>
           </a:xfrm>
           <a:prstGeom prst="rect">
@@ -20910,7 +20910,7 @@
         </p:nvSpPr>
         <p:spPr>
           <a:xfrm>
-            <a:off x="15627400" y="7709204"/>
+            <a:off x="15627400" y="7672362"/>
             <a:ext cx="3208350" cy="184647"/>
           </a:xfrm>
           <a:prstGeom prst="rect">
@@ -20949,7 +20949,7 @@
         </p:nvSpPr>
         <p:spPr>
           <a:xfrm>
-            <a:off x="15627400" y="8066130"/>
+            <a:off x="15627400" y="8029288"/>
             <a:ext cx="3208350" cy="430844"/>
           </a:xfrm>
           <a:prstGeom prst="rect">
@@ -20988,7 +20988,7 @@
         </p:nvSpPr>
         <p:spPr>
           <a:xfrm>
-            <a:off x="762000" y="9183730"/>
+            <a:off x="762000" y="9146888"/>
             <a:ext cx="13809313" cy="400070"/>
           </a:xfrm>
           <a:prstGeom prst="rect">
@@ -21027,7 +21027,7 @@
         </p:nvSpPr>
         <p:spPr>
           <a:xfrm>
-            <a:off x="762000" y="4732604"/>
+            <a:off x="762000" y="4714183"/>
             <a:ext cx="18581751" cy="480084"/>
           </a:xfrm>
           <a:prstGeom prst="rect">
@@ -21082,8 +21082,8 @@
         </p:nvSpPr>
         <p:spPr>
           <a:xfrm>
-            <a:off x="762000" y="10345801"/>
-            <a:ext cx="8890000" cy="203200"/>
+            <a:off x="762000" y="10308958"/>
+            <a:ext cx="8890000" cy="240042"/>
           </a:xfrm>
           <a:prstGeom prst="rect">
             <a:avLst/>
@@ -21121,8 +21121,8 @@
         </p:nvSpPr>
         <p:spPr>
           <a:xfrm>
-            <a:off x="18073751" y="10345801"/>
-            <a:ext cx="1270000" cy="203200"/>
+            <a:off x="18073751" y="10308958"/>
+            <a:ext cx="1270000" cy="240042"/>
           </a:xfrm>
           <a:prstGeom prst="rect">
             <a:avLst/>
@@ -21264,7 +21264,7 @@
         </p:nvSpPr>
         <p:spPr>
           <a:xfrm>
-            <a:off x="762000" y="7709204"/>
+            <a:off x="762000" y="7672362"/>
             <a:ext cx="3208350" cy="184647"/>
           </a:xfrm>
           <a:prstGeom prst="rect">
@@ -21303,7 +21303,7 @@
         </p:nvSpPr>
         <p:spPr>
           <a:xfrm>
-            <a:off x="762000" y="8066130"/>
+            <a:off x="762000" y="8029288"/>
             <a:ext cx="3208350" cy="430844"/>
           </a:xfrm>
           <a:prstGeom prst="rect">
@@ -21342,7 +21342,7 @@
         </p:nvSpPr>
         <p:spPr>
           <a:xfrm>
-            <a:off x="4478350" y="7709204"/>
+            <a:off x="4478350" y="7672362"/>
             <a:ext cx="3208350" cy="184647"/>
           </a:xfrm>
           <a:prstGeom prst="rect">
@@ -21381,7 +21381,7 @@
         </p:nvSpPr>
         <p:spPr>
           <a:xfrm>
-            <a:off x="4478350" y="8066130"/>
+            <a:off x="4478350" y="8029288"/>
             <a:ext cx="3208350" cy="430844"/>
           </a:xfrm>
           <a:prstGeom prst="rect">
@@ -21420,7 +21420,7 @@
         </p:nvSpPr>
         <p:spPr>
           <a:xfrm>
-            <a:off x="8194700" y="7709204"/>
+            <a:off x="8194700" y="7672362"/>
             <a:ext cx="3208350" cy="184647"/>
           </a:xfrm>
           <a:prstGeom prst="rect">
@@ -21459,7 +21459,7 @@
         </p:nvSpPr>
         <p:spPr>
           <a:xfrm>
-            <a:off x="8194700" y="8066130"/>
+            <a:off x="8194700" y="8029288"/>
             <a:ext cx="3208350" cy="430844"/>
           </a:xfrm>
           <a:prstGeom prst="rect">
@@ -21498,7 +21498,7 @@
         </p:nvSpPr>
         <p:spPr>
           <a:xfrm>
-            <a:off x="11911050" y="7709204"/>
+            <a:off x="11911050" y="7672362"/>
             <a:ext cx="3208350" cy="184647"/>
           </a:xfrm>
           <a:prstGeom prst="rect">
@@ -21537,7 +21537,7 @@
         </p:nvSpPr>
         <p:spPr>
           <a:xfrm>
-            <a:off x="11911050" y="8066130"/>
+            <a:off x="11911050" y="8029288"/>
             <a:ext cx="3208350" cy="430844"/>
           </a:xfrm>
           <a:prstGeom prst="rect">
@@ -21576,7 +21576,7 @@
         </p:nvSpPr>
         <p:spPr>
           <a:xfrm>
-            <a:off x="15627400" y="7709204"/>
+            <a:off x="15627400" y="7672362"/>
             <a:ext cx="3208350" cy="184647"/>
           </a:xfrm>
           <a:prstGeom prst="rect">
@@ -21615,7 +21615,7 @@
         </p:nvSpPr>
         <p:spPr>
           <a:xfrm>
-            <a:off x="15627400" y="8066130"/>
+            <a:off x="15627400" y="8029288"/>
             <a:ext cx="3208350" cy="430844"/>
           </a:xfrm>
           <a:prstGeom prst="rect">
@@ -21654,7 +21654,7 @@
         </p:nvSpPr>
         <p:spPr>
           <a:xfrm>
-            <a:off x="762000" y="9183730"/>
+            <a:off x="762000" y="9146888"/>
             <a:ext cx="13809313" cy="400070"/>
           </a:xfrm>
           <a:prstGeom prst="rect">
@@ -21693,7 +21693,7 @@
         </p:nvSpPr>
         <p:spPr>
           <a:xfrm>
-            <a:off x="762000" y="4880322"/>
+            <a:off x="762000" y="4861901"/>
             <a:ext cx="18581751" cy="184647"/>
           </a:xfrm>
           <a:prstGeom prst="rect">
@@ -21732,8 +21732,8 @@
         </p:nvSpPr>
         <p:spPr>
           <a:xfrm>
-            <a:off x="762000" y="10345801"/>
-            <a:ext cx="8890000" cy="203200"/>
+            <a:off x="762000" y="10308958"/>
+            <a:ext cx="8890000" cy="240042"/>
           </a:xfrm>
           <a:prstGeom prst="rect">
             <a:avLst/>
@@ -21771,8 +21771,8 @@
         </p:nvSpPr>
         <p:spPr>
           <a:xfrm>
-            <a:off x="18073751" y="10345801"/>
-            <a:ext cx="1270000" cy="203200"/>
+            <a:off x="18073751" y="10308958"/>
+            <a:ext cx="1270000" cy="240042"/>
           </a:xfrm>
           <a:prstGeom prst="rect">
             <a:avLst/>
@@ -21836,7 +21836,7 @@
         </p:nvSpPr>
         <p:spPr>
           <a:xfrm>
-            <a:off x="762000" y="1430932"/>
+            <a:off x="762000" y="1412511"/>
             <a:ext cx="13809313" cy="276971"/>
           </a:xfrm>
           <a:prstGeom prst="rect">
@@ -21875,7 +21875,7 @@
         </p:nvSpPr>
         <p:spPr>
           <a:xfrm>
-            <a:off x="762000" y="2141693"/>
+            <a:off x="762000" y="2123272"/>
             <a:ext cx="13809313" cy="1661830"/>
           </a:xfrm>
           <a:prstGeom prst="rect">
@@ -21930,7 +21930,7 @@
         </p:nvSpPr>
         <p:spPr>
           <a:xfrm>
-            <a:off x="762000" y="4342892"/>
+            <a:off x="762000" y="4324471"/>
             <a:ext cx="13809313" cy="2040358"/>
           </a:xfrm>
           <a:prstGeom prst="rect">
@@ -21969,7 +21969,7 @@
         </p:nvSpPr>
         <p:spPr>
           <a:xfrm>
-            <a:off x="762000" y="7145251"/>
+            <a:off x="762000" y="7126830"/>
             <a:ext cx="4264437" cy="430844"/>
           </a:xfrm>
           <a:prstGeom prst="rect">
@@ -22008,7 +22008,7 @@
         </p:nvSpPr>
         <p:spPr>
           <a:xfrm>
-            <a:off x="762000" y="7714657"/>
+            <a:off x="762000" y="7696236"/>
             <a:ext cx="4264437" cy="800140"/>
           </a:xfrm>
           <a:prstGeom prst="rect">
@@ -22047,7 +22047,7 @@
         </p:nvSpPr>
         <p:spPr>
           <a:xfrm>
-            <a:off x="5534437" y="7145251"/>
+            <a:off x="5534437" y="7126830"/>
             <a:ext cx="4264437" cy="430844"/>
           </a:xfrm>
           <a:prstGeom prst="rect">
@@ -22086,7 +22086,7 @@
         </p:nvSpPr>
         <p:spPr>
           <a:xfrm>
-            <a:off x="5534437" y="7714657"/>
+            <a:off x="5534437" y="7696236"/>
             <a:ext cx="4264437" cy="800140"/>
           </a:xfrm>
           <a:prstGeom prst="rect">
@@ -22125,7 +22125,7 @@
         </p:nvSpPr>
         <p:spPr>
           <a:xfrm>
-            <a:off x="10306875" y="7145251"/>
+            <a:off x="10306875" y="7126830"/>
             <a:ext cx="4264437" cy="430844"/>
           </a:xfrm>
           <a:prstGeom prst="rect">
@@ -22164,7 +22164,7 @@
         </p:nvSpPr>
         <p:spPr>
           <a:xfrm>
-            <a:off x="10306875" y="7714657"/>
+            <a:off x="10306875" y="7696236"/>
             <a:ext cx="4264437" cy="1200210"/>
           </a:xfrm>
           <a:prstGeom prst="rect">
@@ -22203,8 +22203,8 @@
         </p:nvSpPr>
         <p:spPr>
           <a:xfrm>
-            <a:off x="762000" y="10345801"/>
-            <a:ext cx="8890000" cy="203200"/>
+            <a:off x="762000" y="10308958"/>
+            <a:ext cx="8890000" cy="240042"/>
           </a:xfrm>
           <a:prstGeom prst="rect">
             <a:avLst/>
@@ -22242,8 +22242,8 @@
         </p:nvSpPr>
         <p:spPr>
           <a:xfrm>
-            <a:off x="18073751" y="10345801"/>
-            <a:ext cx="1270000" cy="203200"/>
+            <a:off x="18073751" y="10308958"/>
+            <a:ext cx="1270000" cy="240042"/>
           </a:xfrm>
           <a:prstGeom prst="rect">
             <a:avLst/>
@@ -22385,7 +22385,7 @@
         </p:nvSpPr>
         <p:spPr>
           <a:xfrm>
-            <a:off x="762000" y="4177063"/>
+            <a:off x="762000" y="4158642"/>
             <a:ext cx="4264437" cy="184647"/>
           </a:xfrm>
           <a:prstGeom prst="rect">
@@ -22424,7 +22424,7 @@
         </p:nvSpPr>
         <p:spPr>
           <a:xfrm>
-            <a:off x="762000" y="4566237"/>
+            <a:off x="762000" y="4547816"/>
             <a:ext cx="4264437" cy="430844"/>
           </a:xfrm>
           <a:prstGeom prst="rect">
@@ -22463,7 +22463,7 @@
         </p:nvSpPr>
         <p:spPr>
           <a:xfrm>
-            <a:off x="762000" y="5505082"/>
+            <a:off x="762000" y="5486661"/>
             <a:ext cx="4264437" cy="184647"/>
           </a:xfrm>
           <a:prstGeom prst="rect">
@@ -22502,7 +22502,7 @@
         </p:nvSpPr>
         <p:spPr>
           <a:xfrm>
-            <a:off x="762000" y="5894257"/>
+            <a:off x="762000" y="5875835"/>
             <a:ext cx="4264437" cy="430844"/>
           </a:xfrm>
           <a:prstGeom prst="rect">
@@ -22541,7 +22541,7 @@
         </p:nvSpPr>
         <p:spPr>
           <a:xfrm>
-            <a:off x="762000" y="6833102"/>
+            <a:off x="762000" y="6814680"/>
             <a:ext cx="4264437" cy="184647"/>
           </a:xfrm>
           <a:prstGeom prst="rect">
@@ -22580,7 +22580,7 @@
         </p:nvSpPr>
         <p:spPr>
           <a:xfrm>
-            <a:off x="762000" y="7222276"/>
+            <a:off x="762000" y="7203855"/>
             <a:ext cx="4264437" cy="430844"/>
           </a:xfrm>
           <a:prstGeom prst="rect">
@@ -22619,7 +22619,7 @@
         </p:nvSpPr>
         <p:spPr>
           <a:xfrm>
-            <a:off x="762000" y="8161121"/>
+            <a:off x="762000" y="8142700"/>
             <a:ext cx="4264437" cy="184647"/>
           </a:xfrm>
           <a:prstGeom prst="rect">
@@ -22658,7 +22658,7 @@
         </p:nvSpPr>
         <p:spPr>
           <a:xfrm>
-            <a:off x="762000" y="8550295"/>
+            <a:off x="762000" y="8531874"/>
             <a:ext cx="4264437" cy="430844"/>
           </a:xfrm>
           <a:prstGeom prst="rect">
@@ -22697,7 +22697,7 @@
         </p:nvSpPr>
         <p:spPr>
           <a:xfrm>
-            <a:off x="5534437" y="4177063"/>
+            <a:off x="5534437" y="4158642"/>
             <a:ext cx="4264437" cy="184647"/>
           </a:xfrm>
           <a:prstGeom prst="rect">
@@ -22736,7 +22736,7 @@
         </p:nvSpPr>
         <p:spPr>
           <a:xfrm>
-            <a:off x="5534437" y="4566237"/>
+            <a:off x="5534437" y="4547816"/>
             <a:ext cx="4264437" cy="430844"/>
           </a:xfrm>
           <a:prstGeom prst="rect">
@@ -22775,7 +22775,7 @@
         </p:nvSpPr>
         <p:spPr>
           <a:xfrm>
-            <a:off x="5534437" y="5505082"/>
+            <a:off x="5534437" y="5486661"/>
             <a:ext cx="4264437" cy="184647"/>
           </a:xfrm>
           <a:prstGeom prst="rect">
@@ -22814,7 +22814,7 @@
         </p:nvSpPr>
         <p:spPr>
           <a:xfrm>
-            <a:off x="5534437" y="5894257"/>
+            <a:off x="5534437" y="5875835"/>
             <a:ext cx="4264437" cy="430844"/>
           </a:xfrm>
           <a:prstGeom prst="rect">
@@ -22853,7 +22853,7 @@
         </p:nvSpPr>
         <p:spPr>
           <a:xfrm>
-            <a:off x="5534437" y="6833102"/>
+            <a:off x="5534437" y="6814680"/>
             <a:ext cx="4264437" cy="184647"/>
           </a:xfrm>
           <a:prstGeom prst="rect">
@@ -22892,7 +22892,7 @@
         </p:nvSpPr>
         <p:spPr>
           <a:xfrm>
-            <a:off x="5534437" y="7222276"/>
+            <a:off x="5534437" y="7203855"/>
             <a:ext cx="4264437" cy="430844"/>
           </a:xfrm>
           <a:prstGeom prst="rect">
@@ -22931,7 +22931,7 @@
         </p:nvSpPr>
         <p:spPr>
           <a:xfrm>
-            <a:off x="5534437" y="8161121"/>
+            <a:off x="5534437" y="8142700"/>
             <a:ext cx="4264437" cy="184647"/>
           </a:xfrm>
           <a:prstGeom prst="rect">
@@ -22970,7 +22970,7 @@
         </p:nvSpPr>
         <p:spPr>
           <a:xfrm>
-            <a:off x="5534437" y="8550295"/>
+            <a:off x="5534437" y="8531874"/>
             <a:ext cx="4264437" cy="430844"/>
           </a:xfrm>
           <a:prstGeom prst="rect">
@@ -23009,7 +23009,7 @@
         </p:nvSpPr>
         <p:spPr>
           <a:xfrm>
-            <a:off x="10306875" y="4177063"/>
+            <a:off x="10306875" y="4158642"/>
             <a:ext cx="4264437" cy="184647"/>
           </a:xfrm>
           <a:prstGeom prst="rect">
@@ -23048,7 +23048,7 @@
         </p:nvSpPr>
         <p:spPr>
           <a:xfrm>
-            <a:off x="10306875" y="4566237"/>
+            <a:off x="10306875" y="4547816"/>
             <a:ext cx="4264437" cy="430844"/>
           </a:xfrm>
           <a:prstGeom prst="rect">
@@ -23087,7 +23087,7 @@
         </p:nvSpPr>
         <p:spPr>
           <a:xfrm>
-            <a:off x="10306875" y="5505082"/>
+            <a:off x="10306875" y="5486661"/>
             <a:ext cx="4264437" cy="184647"/>
           </a:xfrm>
           <a:prstGeom prst="rect">
@@ -23126,7 +23126,7 @@
         </p:nvSpPr>
         <p:spPr>
           <a:xfrm>
-            <a:off x="10306875" y="5894257"/>
+            <a:off x="10306875" y="5875835"/>
             <a:ext cx="4264437" cy="430844"/>
           </a:xfrm>
           <a:prstGeom prst="rect">
@@ -23165,7 +23165,7 @@
         </p:nvSpPr>
         <p:spPr>
           <a:xfrm>
-            <a:off x="10306875" y="6833102"/>
+            <a:off x="10306875" y="6814680"/>
             <a:ext cx="4264437" cy="184647"/>
           </a:xfrm>
           <a:prstGeom prst="rect">
@@ -23204,7 +23204,7 @@
         </p:nvSpPr>
         <p:spPr>
           <a:xfrm>
-            <a:off x="10306875" y="7222276"/>
+            <a:off x="10306875" y="7203855"/>
             <a:ext cx="4264437" cy="430844"/>
           </a:xfrm>
           <a:prstGeom prst="rect">
@@ -23243,7 +23243,7 @@
         </p:nvSpPr>
         <p:spPr>
           <a:xfrm>
-            <a:off x="10306875" y="8161121"/>
+            <a:off x="10306875" y="8142700"/>
             <a:ext cx="4264437" cy="184647"/>
           </a:xfrm>
           <a:prstGeom prst="rect">
@@ -23282,7 +23282,7 @@
         </p:nvSpPr>
         <p:spPr>
           <a:xfrm>
-            <a:off x="10306875" y="8550295"/>
+            <a:off x="10306875" y="8531874"/>
             <a:ext cx="4264437" cy="430844"/>
           </a:xfrm>
           <a:prstGeom prst="rect">
@@ -23321,7 +23321,7 @@
         </p:nvSpPr>
         <p:spPr>
           <a:xfrm>
-            <a:off x="15079313" y="4177063"/>
+            <a:off x="15079313" y="4158642"/>
             <a:ext cx="4264437" cy="184647"/>
           </a:xfrm>
           <a:prstGeom prst="rect">
@@ -23360,7 +23360,7 @@
         </p:nvSpPr>
         <p:spPr>
           <a:xfrm>
-            <a:off x="15079313" y="4566237"/>
+            <a:off x="15079313" y="4547816"/>
             <a:ext cx="4264437" cy="430844"/>
           </a:xfrm>
           <a:prstGeom prst="rect">
@@ -23399,7 +23399,7 @@
         </p:nvSpPr>
         <p:spPr>
           <a:xfrm>
-            <a:off x="15079313" y="5505082"/>
+            <a:off x="15079313" y="5486661"/>
             <a:ext cx="4264437" cy="184647"/>
           </a:xfrm>
           <a:prstGeom prst="rect">
@@ -23438,7 +23438,7 @@
         </p:nvSpPr>
         <p:spPr>
           <a:xfrm>
-            <a:off x="15079313" y="5894257"/>
+            <a:off x="15079313" y="5875835"/>
             <a:ext cx="4264437" cy="430844"/>
           </a:xfrm>
           <a:prstGeom prst="rect">
@@ -23477,8 +23477,8 @@
         </p:nvSpPr>
         <p:spPr>
           <a:xfrm>
-            <a:off x="762000" y="10345801"/>
-            <a:ext cx="8890000" cy="203200"/>
+            <a:off x="762000" y="10308958"/>
+            <a:ext cx="8890000" cy="240042"/>
           </a:xfrm>
           <a:prstGeom prst="rect">
             <a:avLst/>
@@ -23516,8 +23516,8 @@
         </p:nvSpPr>
         <p:spPr>
           <a:xfrm>
-            <a:off x="18073751" y="10345801"/>
-            <a:ext cx="1270000" cy="203200"/>
+            <a:off x="18073751" y="10308958"/>
+            <a:ext cx="1270000" cy="240042"/>
           </a:xfrm>
           <a:prstGeom prst="rect">
             <a:avLst/>
@@ -23581,7 +23581,7 @@
         </p:nvSpPr>
         <p:spPr>
           <a:xfrm>
-            <a:off x="762000" y="1831135"/>
+            <a:off x="762000" y="1812714"/>
             <a:ext cx="13809313" cy="3846829"/>
           </a:xfrm>
           <a:prstGeom prst="rect">
@@ -23620,7 +23620,7 @@
         </p:nvSpPr>
         <p:spPr>
           <a:xfrm>
-            <a:off x="762000" y="5155262"/>
+            <a:off x="762000" y="5136841"/>
             <a:ext cx="13809313" cy="1107887"/>
           </a:xfrm>
           <a:prstGeom prst="rect">
@@ -23659,7 +23659,7 @@
         </p:nvSpPr>
         <p:spPr>
           <a:xfrm>
-            <a:off x="762000" y="6474307"/>
+            <a:off x="762000" y="6455886"/>
             <a:ext cx="9036875" cy="2040358"/>
           </a:xfrm>
           <a:prstGeom prst="rect">
@@ -23698,8 +23698,8 @@
         </p:nvSpPr>
         <p:spPr>
           <a:xfrm>
-            <a:off x="762000" y="10345801"/>
-            <a:ext cx="8890000" cy="203200"/>
+            <a:off x="762000" y="10308958"/>
+            <a:ext cx="8890000" cy="240042"/>
           </a:xfrm>
           <a:prstGeom prst="rect">
             <a:avLst/>
@@ -23737,8 +23737,8 @@
         </p:nvSpPr>
         <p:spPr>
           <a:xfrm>
-            <a:off x="18073751" y="10345801"/>
-            <a:ext cx="1270000" cy="203200"/>
+            <a:off x="18073751" y="10308958"/>
+            <a:ext cx="1270000" cy="240042"/>
           </a:xfrm>
           <a:prstGeom prst="rect">
             <a:avLst/>
@@ -24061,8 +24061,8 @@
         </p:nvSpPr>
         <p:spPr>
           <a:xfrm>
-            <a:off x="762000" y="10345801"/>
-            <a:ext cx="8890000" cy="203200"/>
+            <a:off x="762000" y="10308958"/>
+            <a:ext cx="8890000" cy="240042"/>
           </a:xfrm>
           <a:prstGeom prst="rect">
             <a:avLst/>
@@ -24100,8 +24100,8 @@
         </p:nvSpPr>
         <p:spPr>
           <a:xfrm>
-            <a:off x="18073751" y="10345801"/>
-            <a:ext cx="1270000" cy="203200"/>
+            <a:off x="18073751" y="10308958"/>
+            <a:ext cx="1270000" cy="240042"/>
           </a:xfrm>
           <a:prstGeom prst="rect">
             <a:avLst/>
@@ -24431,8 +24431,8 @@
         </p:nvSpPr>
         <p:spPr>
           <a:xfrm>
-            <a:off x="762000" y="10345801"/>
-            <a:ext cx="8890000" cy="203200"/>
+            <a:off x="762000" y="10308958"/>
+            <a:ext cx="8890000" cy="240042"/>
           </a:xfrm>
           <a:prstGeom prst="rect">
             <a:avLst/>
@@ -24470,8 +24470,8 @@
         </p:nvSpPr>
         <p:spPr>
           <a:xfrm>
-            <a:off x="18073751" y="10345801"/>
-            <a:ext cx="1270000" cy="203200"/>
+            <a:off x="18073751" y="10308958"/>
+            <a:ext cx="1270000" cy="240042"/>
           </a:xfrm>
           <a:prstGeom prst="rect">
             <a:avLst/>
@@ -24535,7 +24535,7 @@
         </p:nvSpPr>
         <p:spPr>
           <a:xfrm>
-            <a:off x="762000" y="2171194"/>
+            <a:off x="762000" y="2152773"/>
             <a:ext cx="13809313" cy="3846829"/>
           </a:xfrm>
           <a:prstGeom prst="rect">
@@ -24574,7 +24574,7 @@
         </p:nvSpPr>
         <p:spPr>
           <a:xfrm>
-            <a:off x="762000" y="5495322"/>
+            <a:off x="762000" y="5476901"/>
             <a:ext cx="13809313" cy="1107887"/>
           </a:xfrm>
           <a:prstGeom prst="rect">
@@ -24613,7 +24613,7 @@
         </p:nvSpPr>
         <p:spPr>
           <a:xfrm>
-            <a:off x="762000" y="6814366"/>
+            <a:off x="762000" y="6795945"/>
             <a:ext cx="9036875" cy="1360239"/>
           </a:xfrm>
           <a:prstGeom prst="rect">
@@ -24652,8 +24652,8 @@
         </p:nvSpPr>
         <p:spPr>
           <a:xfrm>
-            <a:off x="762000" y="10345801"/>
-            <a:ext cx="8890000" cy="203200"/>
+            <a:off x="762000" y="10308958"/>
+            <a:ext cx="8890000" cy="240042"/>
           </a:xfrm>
           <a:prstGeom prst="rect">
             <a:avLst/>
@@ -24691,8 +24691,8 @@
         </p:nvSpPr>
         <p:spPr>
           <a:xfrm>
-            <a:off x="18073751" y="10345801"/>
-            <a:ext cx="1270000" cy="203200"/>
+            <a:off x="18073751" y="10308958"/>
+            <a:ext cx="1270000" cy="240042"/>
           </a:xfrm>
           <a:prstGeom prst="rect">
             <a:avLst/>
@@ -24834,7 +24834,7 @@
         </p:nvSpPr>
         <p:spPr>
           <a:xfrm>
-            <a:off x="762000" y="5107896"/>
+            <a:off x="762000" y="5089475"/>
             <a:ext cx="5855250" cy="2366098"/>
           </a:xfrm>
           <a:prstGeom prst="roundRect">
@@ -24912,7 +24912,7 @@
         </p:nvSpPr>
         <p:spPr>
           <a:xfrm>
-            <a:off x="7125250" y="5107896"/>
+            <a:off x="7125250" y="5089475"/>
             <a:ext cx="5855250" cy="2366098"/>
           </a:xfrm>
           <a:prstGeom prst="roundRect">
@@ -24990,7 +24990,7 @@
         </p:nvSpPr>
         <p:spPr>
           <a:xfrm>
-            <a:off x="13488500" y="5107896"/>
+            <a:off x="13488500" y="5089475"/>
             <a:ext cx="5855250" cy="2366098"/>
           </a:xfrm>
           <a:prstGeom prst="roundRect">
@@ -25068,8 +25068,8 @@
         </p:nvSpPr>
         <p:spPr>
           <a:xfrm>
-            <a:off x="762000" y="10345801"/>
-            <a:ext cx="8890000" cy="203200"/>
+            <a:off x="762000" y="10308958"/>
+            <a:ext cx="8890000" cy="240042"/>
           </a:xfrm>
           <a:prstGeom prst="rect">
             <a:avLst/>
@@ -25107,8 +25107,8 @@
         </p:nvSpPr>
         <p:spPr>
           <a:xfrm>
-            <a:off x="18073751" y="10345801"/>
-            <a:ext cx="1270000" cy="203200"/>
+            <a:off x="18073751" y="10308958"/>
+            <a:ext cx="1270000" cy="240042"/>
           </a:xfrm>
           <a:prstGeom prst="rect">
             <a:avLst/>
@@ -25250,7 +25250,7 @@
         </p:nvSpPr>
         <p:spPr>
           <a:xfrm>
-            <a:off x="762000" y="5344785"/>
+            <a:off x="762000" y="5326364"/>
             <a:ext cx="4264437" cy="1934583"/>
           </a:xfrm>
           <a:prstGeom prst="roundRect">
@@ -25347,7 +25347,7 @@
         </p:nvSpPr>
         <p:spPr>
           <a:xfrm>
-            <a:off x="5534437" y="5344785"/>
+            <a:off x="5534437" y="5326364"/>
             <a:ext cx="4264437" cy="1934583"/>
           </a:xfrm>
           <a:prstGeom prst="roundRect">
@@ -25444,7 +25444,7 @@
         </p:nvSpPr>
         <p:spPr>
           <a:xfrm>
-            <a:off x="10306875" y="5344785"/>
+            <a:off x="10306875" y="5326364"/>
             <a:ext cx="4264437" cy="1934583"/>
           </a:xfrm>
           <a:prstGeom prst="roundRect">
@@ -25541,7 +25541,7 @@
         </p:nvSpPr>
         <p:spPr>
           <a:xfrm>
-            <a:off x="15079313" y="5344785"/>
+            <a:off x="15079313" y="5326364"/>
             <a:ext cx="4264437" cy="1934583"/>
           </a:xfrm>
           <a:prstGeom prst="roundRect">
@@ -25638,8 +25638,8 @@
         </p:nvSpPr>
         <p:spPr>
           <a:xfrm>
-            <a:off x="762000" y="10345801"/>
-            <a:ext cx="8890000" cy="203200"/>
+            <a:off x="762000" y="10308958"/>
+            <a:ext cx="8890000" cy="240042"/>
           </a:xfrm>
           <a:prstGeom prst="rect">
             <a:avLst/>
@@ -25677,8 +25677,8 @@
         </p:nvSpPr>
         <p:spPr>
           <a:xfrm>
-            <a:off x="18073751" y="10345801"/>
-            <a:ext cx="1270000" cy="203200"/>
+            <a:off x="18073751" y="10308958"/>
+            <a:ext cx="1270000" cy="240042"/>
           </a:xfrm>
           <a:prstGeom prst="rect">
             <a:avLst/>
@@ -25820,7 +25820,7 @@
         </p:nvSpPr>
         <p:spPr>
           <a:xfrm>
-            <a:off x="762000" y="6185202"/>
+            <a:off x="762000" y="6166781"/>
             <a:ext cx="9036875" cy="184647"/>
           </a:xfrm>
           <a:prstGeom prst="rect">
@@ -25859,7 +25859,7 @@
         </p:nvSpPr>
         <p:spPr>
           <a:xfrm>
-            <a:off x="762000" y="6574376"/>
+            <a:off x="762000" y="6555955"/>
             <a:ext cx="9036875" cy="430844"/>
           </a:xfrm>
           <a:prstGeom prst="rect">
@@ -25898,7 +25898,7 @@
         </p:nvSpPr>
         <p:spPr>
           <a:xfrm>
-            <a:off x="762000" y="7513221"/>
+            <a:off x="762000" y="7494800"/>
             <a:ext cx="9036875" cy="184647"/>
           </a:xfrm>
           <a:prstGeom prst="rect">
@@ -25937,7 +25937,7 @@
         </p:nvSpPr>
         <p:spPr>
           <a:xfrm>
-            <a:off x="762000" y="7902395"/>
+            <a:off x="762000" y="7883974"/>
             <a:ext cx="9036875" cy="430844"/>
           </a:xfrm>
           <a:prstGeom prst="rect">
@@ -25976,7 +25976,7 @@
         </p:nvSpPr>
         <p:spPr>
           <a:xfrm>
-            <a:off x="10306875" y="6185202"/>
+            <a:off x="10306875" y="6166781"/>
             <a:ext cx="9036875" cy="184647"/>
           </a:xfrm>
           <a:prstGeom prst="rect">
@@ -26015,7 +26015,7 @@
         </p:nvSpPr>
         <p:spPr>
           <a:xfrm>
-            <a:off x="10306875" y="6574376"/>
+            <a:off x="10306875" y="6555955"/>
             <a:ext cx="9036875" cy="430844"/>
           </a:xfrm>
           <a:prstGeom prst="rect">
@@ -26054,7 +26054,7 @@
         </p:nvSpPr>
         <p:spPr>
           <a:xfrm>
-            <a:off x="10306875" y="7513221"/>
+            <a:off x="10306875" y="7494800"/>
             <a:ext cx="9036875" cy="184647"/>
           </a:xfrm>
           <a:prstGeom prst="rect">
@@ -26093,7 +26093,7 @@
         </p:nvSpPr>
         <p:spPr>
           <a:xfrm>
-            <a:off x="10306875" y="7902395"/>
+            <a:off x="10306875" y="7883974"/>
             <a:ext cx="9036875" cy="430844"/>
           </a:xfrm>
           <a:prstGeom prst="rect">
@@ -26132,8 +26132,8 @@
         </p:nvSpPr>
         <p:spPr>
           <a:xfrm>
-            <a:off x="762000" y="10345801"/>
-            <a:ext cx="8890000" cy="203200"/>
+            <a:off x="762000" y="10308958"/>
+            <a:ext cx="8890000" cy="240042"/>
           </a:xfrm>
           <a:prstGeom prst="rect">
             <a:avLst/>
@@ -26171,8 +26171,8 @@
         </p:nvSpPr>
         <p:spPr>
           <a:xfrm>
-            <a:off x="18073751" y="10345801"/>
-            <a:ext cx="1270000" cy="203200"/>
+            <a:off x="18073751" y="10308958"/>
+            <a:ext cx="1270000" cy="240042"/>
           </a:xfrm>
           <a:prstGeom prst="rect">
             <a:avLst/>
@@ -26314,7 +26314,7 @@
         </p:nvSpPr>
         <p:spPr>
           <a:xfrm>
-            <a:off x="762000" y="3706111"/>
+            <a:off x="762000" y="3687690"/>
             <a:ext cx="9036875" cy="5211931"/>
           </a:xfrm>
           <a:prstGeom prst="roundRect">
@@ -26449,7 +26449,7 @@
         </p:nvSpPr>
         <p:spPr>
           <a:xfrm>
-            <a:off x="10306875" y="3706111"/>
+            <a:off x="10306875" y="3687690"/>
             <a:ext cx="9036875" cy="5211931"/>
           </a:xfrm>
           <a:prstGeom prst="roundRect">
@@ -26584,8 +26584,8 @@
         </p:nvSpPr>
         <p:spPr>
           <a:xfrm>
-            <a:off x="762000" y="10345801"/>
-            <a:ext cx="8890000" cy="203200"/>
+            <a:off x="762000" y="10308958"/>
+            <a:ext cx="8890000" cy="240042"/>
           </a:xfrm>
           <a:prstGeom prst="rect">
             <a:avLst/>
@@ -26623,8 +26623,8 @@
         </p:nvSpPr>
         <p:spPr>
           <a:xfrm>
-            <a:off x="18073751" y="10345801"/>
-            <a:ext cx="1270000" cy="203200"/>
+            <a:off x="18073751" y="10308958"/>
+            <a:ext cx="1270000" cy="240042"/>
           </a:xfrm>
           <a:prstGeom prst="rect">
             <a:avLst/>
@@ -26688,7 +26688,7 @@
         </p:nvSpPr>
         <p:spPr>
           <a:xfrm>
-            <a:off x="762000" y="1831135"/>
+            <a:off x="762000" y="1812714"/>
             <a:ext cx="13809313" cy="3846829"/>
           </a:xfrm>
           <a:prstGeom prst="rect">
@@ -26727,7 +26727,7 @@
         </p:nvSpPr>
         <p:spPr>
           <a:xfrm>
-            <a:off x="762000" y="5155262"/>
+            <a:off x="762000" y="5136841"/>
             <a:ext cx="13809313" cy="1107887"/>
           </a:xfrm>
           <a:prstGeom prst="rect">
@@ -26766,7 +26766,7 @@
         </p:nvSpPr>
         <p:spPr>
           <a:xfrm>
-            <a:off x="762000" y="6474307"/>
+            <a:off x="762000" y="6455886"/>
             <a:ext cx="9036875" cy="2040358"/>
           </a:xfrm>
           <a:prstGeom prst="rect">
@@ -26805,8 +26805,8 @@
         </p:nvSpPr>
         <p:spPr>
           <a:xfrm>
-            <a:off x="762000" y="10345801"/>
-            <a:ext cx="8890000" cy="203200"/>
+            <a:off x="762000" y="10308958"/>
+            <a:ext cx="8890000" cy="240042"/>
           </a:xfrm>
           <a:prstGeom prst="rect">
             <a:avLst/>
@@ -26844,8 +26844,8 @@
         </p:nvSpPr>
         <p:spPr>
           <a:xfrm>
-            <a:off x="18073751" y="10345801"/>
-            <a:ext cx="1270000" cy="203200"/>
+            <a:off x="18073751" y="10308958"/>
+            <a:ext cx="1270000" cy="240042"/>
           </a:xfrm>
           <a:prstGeom prst="rect">
             <a:avLst/>
@@ -26987,7 +26987,7 @@
         </p:nvSpPr>
         <p:spPr>
           <a:xfrm>
-            <a:off x="762000" y="3626729"/>
+            <a:off x="762000" y="3608308"/>
             <a:ext cx="4264437" cy="2431348"/>
           </a:xfrm>
           <a:prstGeom prst="roundRect">
@@ -27084,7 +27084,7 @@
         </p:nvSpPr>
         <p:spPr>
           <a:xfrm>
-            <a:off x="5534437" y="3626729"/>
+            <a:off x="5534437" y="3608308"/>
             <a:ext cx="4264437" cy="2431348"/>
           </a:xfrm>
           <a:prstGeom prst="roundRect">
@@ -27181,7 +27181,7 @@
         </p:nvSpPr>
         <p:spPr>
           <a:xfrm>
-            <a:off x="10306875" y="3626729"/>
+            <a:off x="10306875" y="3608308"/>
             <a:ext cx="4264437" cy="2431348"/>
           </a:xfrm>
           <a:prstGeom prst="roundRect">
@@ -27278,7 +27278,7 @@
         </p:nvSpPr>
         <p:spPr>
           <a:xfrm>
-            <a:off x="15079313" y="3626729"/>
+            <a:off x="15079313" y="3608308"/>
             <a:ext cx="4264437" cy="2431348"/>
           </a:xfrm>
           <a:prstGeom prst="roundRect">
@@ -27375,7 +27375,7 @@
         </p:nvSpPr>
         <p:spPr>
           <a:xfrm>
-            <a:off x="762000" y="6566077"/>
+            <a:off x="762000" y="6547656"/>
             <a:ext cx="4264437" cy="2431348"/>
           </a:xfrm>
           <a:prstGeom prst="roundRect">
@@ -27472,7 +27472,7 @@
         </p:nvSpPr>
         <p:spPr>
           <a:xfrm>
-            <a:off x="5534437" y="6566077"/>
+            <a:off x="5534437" y="6547656"/>
             <a:ext cx="4264437" cy="2431348"/>
           </a:xfrm>
           <a:prstGeom prst="roundRect">
@@ -27569,7 +27569,7 @@
         </p:nvSpPr>
         <p:spPr>
           <a:xfrm>
-            <a:off x="10306875" y="6566077"/>
+            <a:off x="10306875" y="6547656"/>
             <a:ext cx="4264437" cy="2431348"/>
           </a:xfrm>
           <a:prstGeom prst="roundRect">
@@ -27666,8 +27666,8 @@
         </p:nvSpPr>
         <p:spPr>
           <a:xfrm>
-            <a:off x="762000" y="10345801"/>
-            <a:ext cx="8890000" cy="203200"/>
+            <a:off x="762000" y="10308958"/>
+            <a:ext cx="8890000" cy="240042"/>
           </a:xfrm>
           <a:prstGeom prst="rect">
             <a:avLst/>
@@ -27705,8 +27705,8 @@
         </p:nvSpPr>
         <p:spPr>
           <a:xfrm>
-            <a:off x="18073751" y="10345801"/>
-            <a:ext cx="1270000" cy="203200"/>
+            <a:off x="18073751" y="10308958"/>
+            <a:ext cx="1270000" cy="240042"/>
           </a:xfrm>
           <a:prstGeom prst="rect">
             <a:avLst/>
@@ -27848,7 +27848,7 @@
         </p:nvSpPr>
         <p:spPr>
           <a:xfrm>
-            <a:off x="762000" y="3626729"/>
+            <a:off x="762000" y="3608308"/>
             <a:ext cx="4264437" cy="2431348"/>
           </a:xfrm>
           <a:prstGeom prst="roundRect">
@@ -27945,7 +27945,7 @@
         </p:nvSpPr>
         <p:spPr>
           <a:xfrm>
-            <a:off x="5534437" y="3626729"/>
+            <a:off x="5534437" y="3608308"/>
             <a:ext cx="4264437" cy="2431348"/>
           </a:xfrm>
           <a:prstGeom prst="roundRect">
@@ -28042,7 +28042,7 @@
         </p:nvSpPr>
         <p:spPr>
           <a:xfrm>
-            <a:off x="10306875" y="3626729"/>
+            <a:off x="10306875" y="3608308"/>
             <a:ext cx="4264437" cy="2431348"/>
           </a:xfrm>
           <a:prstGeom prst="roundRect">
@@ -28139,7 +28139,7 @@
         </p:nvSpPr>
         <p:spPr>
           <a:xfrm>
-            <a:off x="15079313" y="3626729"/>
+            <a:off x="15079313" y="3608308"/>
             <a:ext cx="4264437" cy="2431348"/>
           </a:xfrm>
           <a:prstGeom prst="roundRect">
@@ -28236,7 +28236,7 @@
         </p:nvSpPr>
         <p:spPr>
           <a:xfrm>
-            <a:off x="762000" y="6566077"/>
+            <a:off x="762000" y="6547656"/>
             <a:ext cx="4264437" cy="2431348"/>
           </a:xfrm>
           <a:prstGeom prst="roundRect">
@@ -28333,7 +28333,7 @@
         </p:nvSpPr>
         <p:spPr>
           <a:xfrm>
-            <a:off x="5534437" y="6566077"/>
+            <a:off x="5534437" y="6547656"/>
             <a:ext cx="4264437" cy="2431348"/>
           </a:xfrm>
           <a:prstGeom prst="roundRect">
@@ -28430,7 +28430,7 @@
         </p:nvSpPr>
         <p:spPr>
           <a:xfrm>
-            <a:off x="10306875" y="6566077"/>
+            <a:off x="10306875" y="6547656"/>
             <a:ext cx="4264437" cy="2431348"/>
           </a:xfrm>
           <a:prstGeom prst="roundRect">
@@ -28527,8 +28527,8 @@
         </p:nvSpPr>
         <p:spPr>
           <a:xfrm>
-            <a:off x="762000" y="10345801"/>
-            <a:ext cx="8890000" cy="203200"/>
+            <a:off x="762000" y="10308958"/>
+            <a:ext cx="8890000" cy="240042"/>
           </a:xfrm>
           <a:prstGeom prst="rect">
             <a:avLst/>
@@ -28566,8 +28566,8 @@
         </p:nvSpPr>
         <p:spPr>
           <a:xfrm>
-            <a:off x="18073751" y="10345801"/>
-            <a:ext cx="1270000" cy="203200"/>
+            <a:off x="18073751" y="10308958"/>
+            <a:ext cx="1270000" cy="240042"/>
           </a:xfrm>
           <a:prstGeom prst="rect">
             <a:avLst/>
@@ -28741,8 +28741,8 @@
         </p:nvSpPr>
         <p:spPr>
           <a:xfrm>
-            <a:off x="12386341" y="1524000"/>
-            <a:ext cx="6957409" cy="3914067"/>
+            <a:off x="12451829" y="1524000"/>
+            <a:ext cx="6891921" cy="3877225"/>
           </a:xfrm>
           <a:prstGeom prst="rect">
             <a:avLst/>
@@ -28787,8 +28787,8 @@
         </p:nvSpPr>
         <p:spPr>
           <a:xfrm>
-            <a:off x="12386341" y="6200067"/>
-            <a:ext cx="6957409" cy="184647"/>
+            <a:off x="12451829" y="6163225"/>
+            <a:ext cx="6891921" cy="184647"/>
           </a:xfrm>
           <a:prstGeom prst="rect">
             <a:avLst/>
@@ -28826,8 +28826,8 @@
         </p:nvSpPr>
         <p:spPr>
           <a:xfrm>
-            <a:off x="12386341" y="6589241"/>
-            <a:ext cx="6957409" cy="400070"/>
+            <a:off x="12451829" y="6552399"/>
+            <a:ext cx="6891921" cy="400070"/>
           </a:xfrm>
           <a:prstGeom prst="rect">
             <a:avLst/>
@@ -28865,8 +28865,8 @@
         </p:nvSpPr>
         <p:spPr>
           <a:xfrm>
-            <a:off x="12386341" y="7390119"/>
-            <a:ext cx="6957409" cy="184647"/>
+            <a:off x="12451829" y="7353276"/>
+            <a:ext cx="6891921" cy="184647"/>
           </a:xfrm>
           <a:prstGeom prst="rect">
             <a:avLst/>
@@ -28904,8 +28904,8 @@
         </p:nvSpPr>
         <p:spPr>
           <a:xfrm>
-            <a:off x="12386341" y="7779293"/>
-            <a:ext cx="6957409" cy="400070"/>
+            <a:off x="12451829" y="7742450"/>
+            <a:ext cx="6891921" cy="400070"/>
           </a:xfrm>
           <a:prstGeom prst="rect">
             <a:avLst/>
@@ -28943,8 +28943,8 @@
         </p:nvSpPr>
         <p:spPr>
           <a:xfrm>
-            <a:off x="12386341" y="8580170"/>
-            <a:ext cx="6957409" cy="184647"/>
+            <a:off x="12451829" y="8543328"/>
+            <a:ext cx="6891921" cy="184647"/>
           </a:xfrm>
           <a:prstGeom prst="rect">
             <a:avLst/>
@@ -28982,8 +28982,8 @@
         </p:nvSpPr>
         <p:spPr>
           <a:xfrm>
-            <a:off x="12386341" y="8969344"/>
-            <a:ext cx="6957409" cy="400070"/>
+            <a:off x="12451829" y="8932502"/>
+            <a:ext cx="6891921" cy="400070"/>
           </a:xfrm>
           <a:prstGeom prst="rect">
             <a:avLst/>
@@ -29021,8 +29021,8 @@
         </p:nvSpPr>
         <p:spPr>
           <a:xfrm>
-            <a:off x="762000" y="10345801"/>
-            <a:ext cx="8890000" cy="203200"/>
+            <a:off x="762000" y="10308958"/>
+            <a:ext cx="8890000" cy="240042"/>
           </a:xfrm>
           <a:prstGeom prst="rect">
             <a:avLst/>
@@ -29060,8 +29060,8 @@
         </p:nvSpPr>
         <p:spPr>
           <a:xfrm>
-            <a:off x="18073751" y="10345801"/>
-            <a:ext cx="1270000" cy="203200"/>
+            <a:off x="18073751" y="10308958"/>
+            <a:ext cx="1270000" cy="240042"/>
           </a:xfrm>
           <a:prstGeom prst="rect">
             <a:avLst/>
@@ -29461,7 +29461,7 @@
         </p:nvSpPr>
         <p:spPr>
           <a:xfrm>
-            <a:off x="762000" y="1617251"/>
+            <a:off x="762000" y="1598830"/>
             <a:ext cx="13809313" cy="3846829"/>
           </a:xfrm>
           <a:prstGeom prst="rect">
@@ -29500,7 +29500,7 @@
         </p:nvSpPr>
         <p:spPr>
           <a:xfrm>
-            <a:off x="762000" y="4941378"/>
+            <a:off x="762000" y="4922957"/>
             <a:ext cx="13809313" cy="2215774"/>
           </a:xfrm>
           <a:prstGeom prst="rect">
@@ -29555,7 +29555,7 @@
         </p:nvSpPr>
         <p:spPr>
           <a:xfrm>
-            <a:off x="762000" y="7368310"/>
+            <a:off x="762000" y="7349889"/>
             <a:ext cx="9036875" cy="1360239"/>
           </a:xfrm>
           <a:prstGeom prst="rect">
@@ -29594,8 +29594,8 @@
         </p:nvSpPr>
         <p:spPr>
           <a:xfrm>
-            <a:off x="762000" y="10345801"/>
-            <a:ext cx="8890000" cy="203200"/>
+            <a:off x="762000" y="10308958"/>
+            <a:ext cx="8890000" cy="240042"/>
           </a:xfrm>
           <a:prstGeom prst="rect">
             <a:avLst/>
@@ -29633,8 +29633,8 @@
         </p:nvSpPr>
         <p:spPr>
           <a:xfrm>
-            <a:off x="18073751" y="10345801"/>
-            <a:ext cx="1270000" cy="203200"/>
+            <a:off x="18073751" y="10308958"/>
+            <a:ext cx="1270000" cy="240042"/>
           </a:xfrm>
           <a:prstGeom prst="rect">
             <a:avLst/>
@@ -29698,7 +29698,7 @@
         </p:nvSpPr>
         <p:spPr>
           <a:xfrm>
-            <a:off x="762000" y="1617251"/>
+            <a:off x="762000" y="1598830"/>
             <a:ext cx="13809313" cy="3846829"/>
           </a:xfrm>
           <a:prstGeom prst="rect">
@@ -29737,7 +29737,7 @@
         </p:nvSpPr>
         <p:spPr>
           <a:xfrm>
-            <a:off x="762000" y="4941378"/>
+            <a:off x="762000" y="4922957"/>
             <a:ext cx="13809313" cy="2215774"/>
           </a:xfrm>
           <a:prstGeom prst="rect">
@@ -29792,7 +29792,7 @@
         </p:nvSpPr>
         <p:spPr>
           <a:xfrm>
-            <a:off x="762000" y="7368310"/>
+            <a:off x="762000" y="7349889"/>
             <a:ext cx="9036875" cy="1360239"/>
           </a:xfrm>
           <a:prstGeom prst="rect">
@@ -29831,8 +29831,8 @@
         </p:nvSpPr>
         <p:spPr>
           <a:xfrm>
-            <a:off x="762000" y="10345801"/>
-            <a:ext cx="8890000" cy="203200"/>
+            <a:off x="762000" y="10308958"/>
+            <a:ext cx="8890000" cy="240042"/>
           </a:xfrm>
           <a:prstGeom prst="rect">
             <a:avLst/>
@@ -29870,8 +29870,8 @@
         </p:nvSpPr>
         <p:spPr>
           <a:xfrm>
-            <a:off x="18073751" y="10345801"/>
-            <a:ext cx="1270000" cy="203200"/>
+            <a:off x="18073751" y="10308958"/>
+            <a:ext cx="1270000" cy="240042"/>
           </a:xfrm>
           <a:prstGeom prst="rect">
             <a:avLst/>
@@ -30052,7 +30052,7 @@
         </p:nvSpPr>
         <p:spPr>
           <a:xfrm>
-            <a:off x="762000" y="6506789"/>
+            <a:off x="762000" y="6488368"/>
             <a:ext cx="9036875" cy="184647"/>
           </a:xfrm>
           <a:prstGeom prst="rect">
@@ -30091,7 +30091,7 @@
         </p:nvSpPr>
         <p:spPr>
           <a:xfrm>
-            <a:off x="762000" y="6895963"/>
+            <a:off x="762000" y="6877542"/>
             <a:ext cx="9036875" cy="430844"/>
           </a:xfrm>
           <a:prstGeom prst="rect">
@@ -30130,7 +30130,7 @@
         </p:nvSpPr>
         <p:spPr>
           <a:xfrm>
-            <a:off x="762000" y="7834808"/>
+            <a:off x="762000" y="7816387"/>
             <a:ext cx="9036875" cy="184647"/>
           </a:xfrm>
           <a:prstGeom prst="rect">
@@ -30169,7 +30169,7 @@
         </p:nvSpPr>
         <p:spPr>
           <a:xfrm>
-            <a:off x="762000" y="8223982"/>
+            <a:off x="762000" y="8205561"/>
             <a:ext cx="9036875" cy="430844"/>
           </a:xfrm>
           <a:prstGeom prst="rect">
@@ -30208,7 +30208,7 @@
         </p:nvSpPr>
         <p:spPr>
           <a:xfrm>
-            <a:off x="10306875" y="6506789"/>
+            <a:off x="10306875" y="6488368"/>
             <a:ext cx="9036875" cy="184647"/>
           </a:xfrm>
           <a:prstGeom prst="rect">
@@ -30247,7 +30247,7 @@
         </p:nvSpPr>
         <p:spPr>
           <a:xfrm>
-            <a:off x="10306875" y="6895963"/>
+            <a:off x="10306875" y="6877542"/>
             <a:ext cx="9036875" cy="430844"/>
           </a:xfrm>
           <a:prstGeom prst="rect">
@@ -30286,7 +30286,7 @@
         </p:nvSpPr>
         <p:spPr>
           <a:xfrm>
-            <a:off x="10306875" y="7834808"/>
+            <a:off x="10306875" y="7816387"/>
             <a:ext cx="9036875" cy="184647"/>
           </a:xfrm>
           <a:prstGeom prst="rect">
@@ -30325,7 +30325,7 @@
         </p:nvSpPr>
         <p:spPr>
           <a:xfrm>
-            <a:off x="10306875" y="8223982"/>
+            <a:off x="10306875" y="8205561"/>
             <a:ext cx="9036875" cy="430844"/>
           </a:xfrm>
           <a:prstGeom prst="rect">
@@ -30364,8 +30364,8 @@
         </p:nvSpPr>
         <p:spPr>
           <a:xfrm>
-            <a:off x="762000" y="10345801"/>
-            <a:ext cx="8890000" cy="203200"/>
+            <a:off x="762000" y="10308958"/>
+            <a:ext cx="8890000" cy="240042"/>
           </a:xfrm>
           <a:prstGeom prst="rect">
             <a:avLst/>
@@ -30403,8 +30403,8 @@
         </p:nvSpPr>
         <p:spPr>
           <a:xfrm>
-            <a:off x="18073751" y="10345801"/>
-            <a:ext cx="1270000" cy="203200"/>
+            <a:off x="18073751" y="10308958"/>
+            <a:ext cx="1270000" cy="240042"/>
           </a:xfrm>
           <a:prstGeom prst="rect">
             <a:avLst/>
@@ -30585,7 +30585,7 @@
         </p:nvSpPr>
         <p:spPr>
           <a:xfrm>
-            <a:off x="762000" y="6166729"/>
+            <a:off x="762000" y="6148308"/>
             <a:ext cx="9036875" cy="184647"/>
           </a:xfrm>
           <a:prstGeom prst="rect">
@@ -30624,7 +30624,7 @@
         </p:nvSpPr>
         <p:spPr>
           <a:xfrm>
-            <a:off x="762000" y="6555903"/>
+            <a:off x="762000" y="6537482"/>
             <a:ext cx="9036875" cy="430844"/>
           </a:xfrm>
           <a:prstGeom prst="rect">
@@ -30663,7 +30663,7 @@
         </p:nvSpPr>
         <p:spPr>
           <a:xfrm>
-            <a:off x="762000" y="7494748"/>
+            <a:off x="762000" y="7476327"/>
             <a:ext cx="9036875" cy="184647"/>
           </a:xfrm>
           <a:prstGeom prst="rect">
@@ -30702,7 +30702,7 @@
         </p:nvSpPr>
         <p:spPr>
           <a:xfrm>
-            <a:off x="762000" y="7883922"/>
+            <a:off x="762000" y="7865501"/>
             <a:ext cx="9036875" cy="430844"/>
           </a:xfrm>
           <a:prstGeom prst="rect">
@@ -30741,7 +30741,7 @@
         </p:nvSpPr>
         <p:spPr>
           <a:xfrm>
-            <a:off x="10306875" y="6166729"/>
+            <a:off x="10306875" y="6148308"/>
             <a:ext cx="9036875" cy="184647"/>
           </a:xfrm>
           <a:prstGeom prst="rect">
@@ -30780,7 +30780,7 @@
         </p:nvSpPr>
         <p:spPr>
           <a:xfrm>
-            <a:off x="10306875" y="6555903"/>
+            <a:off x="10306875" y="6537482"/>
             <a:ext cx="9036875" cy="430844"/>
           </a:xfrm>
           <a:prstGeom prst="rect">
@@ -30819,7 +30819,7 @@
         </p:nvSpPr>
         <p:spPr>
           <a:xfrm>
-            <a:off x="10306875" y="7494748"/>
+            <a:off x="10306875" y="7476327"/>
             <a:ext cx="9036875" cy="184647"/>
           </a:xfrm>
           <a:prstGeom prst="rect">
@@ -30858,7 +30858,7 @@
         </p:nvSpPr>
         <p:spPr>
           <a:xfrm>
-            <a:off x="10306875" y="7883922"/>
+            <a:off x="10306875" y="7865501"/>
             <a:ext cx="9036875" cy="430844"/>
           </a:xfrm>
           <a:prstGeom prst="rect">
@@ -30897,8 +30897,8 @@
         </p:nvSpPr>
         <p:spPr>
           <a:xfrm>
-            <a:off x="762000" y="10345801"/>
-            <a:ext cx="8890000" cy="203200"/>
+            <a:off x="762000" y="10308958"/>
+            <a:ext cx="8890000" cy="240042"/>
           </a:xfrm>
           <a:prstGeom prst="rect">
             <a:avLst/>
@@ -30936,8 +30936,8 @@
         </p:nvSpPr>
         <p:spPr>
           <a:xfrm>
-            <a:off x="18073751" y="10345801"/>
-            <a:ext cx="1270000" cy="203200"/>
+            <a:off x="18073751" y="10308958"/>
+            <a:ext cx="1270000" cy="240042"/>
           </a:xfrm>
           <a:prstGeom prst="rect">
             <a:avLst/>
@@ -31079,7 +31079,7 @@
         </p:nvSpPr>
         <p:spPr>
           <a:xfrm>
-            <a:off x="762000" y="7709204"/>
+            <a:off x="762000" y="7672362"/>
             <a:ext cx="3208350" cy="184647"/>
           </a:xfrm>
           <a:prstGeom prst="rect">
@@ -31118,7 +31118,7 @@
         </p:nvSpPr>
         <p:spPr>
           <a:xfrm>
-            <a:off x="762000" y="8066130"/>
+            <a:off x="762000" y="8029288"/>
             <a:ext cx="3208350" cy="430844"/>
           </a:xfrm>
           <a:prstGeom prst="rect">
@@ -31157,7 +31157,7 @@
         </p:nvSpPr>
         <p:spPr>
           <a:xfrm>
-            <a:off x="4478350" y="7709204"/>
+            <a:off x="4478350" y="7672362"/>
             <a:ext cx="3208350" cy="184647"/>
           </a:xfrm>
           <a:prstGeom prst="rect">
@@ -31196,7 +31196,7 @@
         </p:nvSpPr>
         <p:spPr>
           <a:xfrm>
-            <a:off x="4478350" y="8066130"/>
+            <a:off x="4478350" y="8029288"/>
             <a:ext cx="3208350" cy="430844"/>
           </a:xfrm>
           <a:prstGeom prst="rect">
@@ -31235,7 +31235,7 @@
         </p:nvSpPr>
         <p:spPr>
           <a:xfrm>
-            <a:off x="8194700" y="7709204"/>
+            <a:off x="8194700" y="7672362"/>
             <a:ext cx="3208350" cy="184647"/>
           </a:xfrm>
           <a:prstGeom prst="rect">
@@ -31274,7 +31274,7 @@
         </p:nvSpPr>
         <p:spPr>
           <a:xfrm>
-            <a:off x="8194700" y="8066130"/>
+            <a:off x="8194700" y="8029288"/>
             <a:ext cx="3208350" cy="430844"/>
           </a:xfrm>
           <a:prstGeom prst="rect">
@@ -31313,7 +31313,7 @@
         </p:nvSpPr>
         <p:spPr>
           <a:xfrm>
-            <a:off x="11911050" y="7709204"/>
+            <a:off x="11911050" y="7672362"/>
             <a:ext cx="3208350" cy="184647"/>
           </a:xfrm>
           <a:prstGeom prst="rect">
@@ -31352,7 +31352,7 @@
         </p:nvSpPr>
         <p:spPr>
           <a:xfrm>
-            <a:off x="11911050" y="8066130"/>
+            <a:off x="11911050" y="8029288"/>
             <a:ext cx="3208350" cy="430844"/>
           </a:xfrm>
           <a:prstGeom prst="rect">
@@ -31391,7 +31391,7 @@
         </p:nvSpPr>
         <p:spPr>
           <a:xfrm>
-            <a:off x="15627400" y="7709204"/>
+            <a:off x="15627400" y="7672362"/>
             <a:ext cx="3208350" cy="184647"/>
           </a:xfrm>
           <a:prstGeom prst="rect">
@@ -31430,7 +31430,7 @@
         </p:nvSpPr>
         <p:spPr>
           <a:xfrm>
-            <a:off x="15627400" y="8066130"/>
+            <a:off x="15627400" y="8029288"/>
             <a:ext cx="3208350" cy="430844"/>
           </a:xfrm>
           <a:prstGeom prst="rect">
@@ -31469,7 +31469,7 @@
         </p:nvSpPr>
         <p:spPr>
           <a:xfrm>
-            <a:off x="762000" y="9183730"/>
+            <a:off x="762000" y="9146888"/>
             <a:ext cx="13809313" cy="400070"/>
           </a:xfrm>
           <a:prstGeom prst="rect">
@@ -31508,7 +31508,7 @@
         </p:nvSpPr>
         <p:spPr>
           <a:xfrm>
-            <a:off x="762000" y="4557189"/>
+            <a:off x="762000" y="4538768"/>
             <a:ext cx="18581751" cy="830915"/>
           </a:xfrm>
           <a:prstGeom prst="rect">
@@ -31547,8 +31547,8 @@
         </p:nvSpPr>
         <p:spPr>
           <a:xfrm>
-            <a:off x="762000" y="10345801"/>
-            <a:ext cx="8890000" cy="203200"/>
+            <a:off x="762000" y="10308958"/>
+            <a:ext cx="8890000" cy="240042"/>
           </a:xfrm>
           <a:prstGeom prst="rect">
             <a:avLst/>
@@ -31586,8 +31586,8 @@
         </p:nvSpPr>
         <p:spPr>
           <a:xfrm>
-            <a:off x="18073751" y="10345801"/>
-            <a:ext cx="1270000" cy="203200"/>
+            <a:off x="18073751" y="10308958"/>
+            <a:ext cx="1270000" cy="240042"/>
           </a:xfrm>
           <a:prstGeom prst="rect">
             <a:avLst/>
@@ -31729,7 +31729,7 @@
         </p:nvSpPr>
         <p:spPr>
           <a:xfrm>
-            <a:off x="762000" y="7709204"/>
+            <a:off x="762000" y="7672362"/>
             <a:ext cx="3208350" cy="184647"/>
           </a:xfrm>
           <a:prstGeom prst="rect">
@@ -31768,7 +31768,7 @@
         </p:nvSpPr>
         <p:spPr>
           <a:xfrm>
-            <a:off x="762000" y="8066130"/>
+            <a:off x="762000" y="8029288"/>
             <a:ext cx="3208350" cy="430844"/>
           </a:xfrm>
           <a:prstGeom prst="rect">
@@ -31807,7 +31807,7 @@
         </p:nvSpPr>
         <p:spPr>
           <a:xfrm>
-            <a:off x="4478350" y="7709204"/>
+            <a:off x="4478350" y="7672362"/>
             <a:ext cx="3208350" cy="184647"/>
           </a:xfrm>
           <a:prstGeom prst="rect">
@@ -31846,7 +31846,7 @@
         </p:nvSpPr>
         <p:spPr>
           <a:xfrm>
-            <a:off x="4478350" y="8066130"/>
+            <a:off x="4478350" y="8029288"/>
             <a:ext cx="3208350" cy="430844"/>
           </a:xfrm>
           <a:prstGeom prst="rect">
@@ -31885,7 +31885,7 @@
         </p:nvSpPr>
         <p:spPr>
           <a:xfrm>
-            <a:off x="8194700" y="7709204"/>
+            <a:off x="8194700" y="7672362"/>
             <a:ext cx="3208350" cy="184647"/>
           </a:xfrm>
           <a:prstGeom prst="rect">
@@ -31924,7 +31924,7 @@
         </p:nvSpPr>
         <p:spPr>
           <a:xfrm>
-            <a:off x="8194700" y="8066130"/>
+            <a:off x="8194700" y="8029288"/>
             <a:ext cx="3208350" cy="430844"/>
           </a:xfrm>
           <a:prstGeom prst="rect">
@@ -31963,7 +31963,7 @@
         </p:nvSpPr>
         <p:spPr>
           <a:xfrm>
-            <a:off x="11911050" y="7709204"/>
+            <a:off x="11911050" y="7672362"/>
             <a:ext cx="3208350" cy="184647"/>
           </a:xfrm>
           <a:prstGeom prst="rect">
@@ -32002,7 +32002,7 @@
         </p:nvSpPr>
         <p:spPr>
           <a:xfrm>
-            <a:off x="11911050" y="8066130"/>
+            <a:off x="11911050" y="8029288"/>
             <a:ext cx="3208350" cy="430844"/>
           </a:xfrm>
           <a:prstGeom prst="rect">
@@ -32041,7 +32041,7 @@
         </p:nvSpPr>
         <p:spPr>
           <a:xfrm>
-            <a:off x="15627400" y="7709204"/>
+            <a:off x="15627400" y="7672362"/>
             <a:ext cx="3208350" cy="184647"/>
           </a:xfrm>
           <a:prstGeom prst="rect">
@@ -32080,7 +32080,7 @@
         </p:nvSpPr>
         <p:spPr>
           <a:xfrm>
-            <a:off x="15627400" y="8066130"/>
+            <a:off x="15627400" y="8029288"/>
             <a:ext cx="3208350" cy="430844"/>
           </a:xfrm>
           <a:prstGeom prst="rect">
@@ -32119,7 +32119,7 @@
         </p:nvSpPr>
         <p:spPr>
           <a:xfrm>
-            <a:off x="762000" y="9183730"/>
+            <a:off x="762000" y="9146888"/>
             <a:ext cx="13809313" cy="400070"/>
           </a:xfrm>
           <a:prstGeom prst="rect">
@@ -32158,7 +32158,7 @@
         </p:nvSpPr>
         <p:spPr>
           <a:xfrm>
-            <a:off x="762000" y="4194048"/>
+            <a:off x="762000" y="4175627"/>
             <a:ext cx="18581751" cy="1557196"/>
           </a:xfrm>
           <a:prstGeom prst="rect">
@@ -32213,8 +32213,8 @@
         </p:nvSpPr>
         <p:spPr>
           <a:xfrm>
-            <a:off x="762000" y="10345801"/>
-            <a:ext cx="8890000" cy="203200"/>
+            <a:off x="762000" y="10308958"/>
+            <a:ext cx="8890000" cy="240042"/>
           </a:xfrm>
           <a:prstGeom prst="rect">
             <a:avLst/>
@@ -32252,8 +32252,8 @@
         </p:nvSpPr>
         <p:spPr>
           <a:xfrm>
-            <a:off x="18073751" y="10345801"/>
-            <a:ext cx="1270000" cy="203200"/>
+            <a:off x="18073751" y="10308958"/>
+            <a:ext cx="1270000" cy="240042"/>
           </a:xfrm>
           <a:prstGeom prst="rect">
             <a:avLst/>
@@ -32396,11 +32396,11 @@
         <p:spPr>
           <a:xfrm>
             <a:off x="762000" y="2998089"/>
-            <a:ext cx="9036875" cy="6585711"/>
+            <a:ext cx="9036875" cy="6548869"/>
           </a:xfrm>
           <a:prstGeom prst="roundRect">
             <a:avLst>
-              <a:gd name="adj" fmla="val 3856"/>
+              <a:gd name="adj" fmla="val 3878"/>
             </a:avLst>
           </a:prstGeom>
           <a:solidFill>
@@ -32714,8 +32714,8 @@
         </p:nvSpPr>
         <p:spPr>
           <a:xfrm>
-            <a:off x="762000" y="10345801"/>
-            <a:ext cx="8890000" cy="203200"/>
+            <a:off x="762000" y="10308958"/>
+            <a:ext cx="8890000" cy="240042"/>
           </a:xfrm>
           <a:prstGeom prst="rect">
             <a:avLst/>
@@ -32753,8 +32753,8 @@
         </p:nvSpPr>
         <p:spPr>
           <a:xfrm>
-            <a:off x="18073751" y="10345801"/>
-            <a:ext cx="1270000" cy="203200"/>
+            <a:off x="18073751" y="10308958"/>
+            <a:ext cx="1270000" cy="240042"/>
           </a:xfrm>
           <a:prstGeom prst="rect">
             <a:avLst/>
@@ -32897,11 +32897,11 @@
         <p:spPr>
           <a:xfrm>
             <a:off x="762000" y="2998089"/>
-            <a:ext cx="9036875" cy="6585711"/>
+            <a:ext cx="9036875" cy="6548869"/>
           </a:xfrm>
           <a:prstGeom prst="roundRect">
             <a:avLst>
-              <a:gd name="adj" fmla="val 3856"/>
+              <a:gd name="adj" fmla="val 3878"/>
             </a:avLst>
           </a:prstGeom>
           <a:solidFill>
@@ -33217,8 +33217,8 @@
         </p:nvSpPr>
         <p:spPr>
           <a:xfrm>
-            <a:off x="762000" y="10345801"/>
-            <a:ext cx="8890000" cy="203200"/>
+            <a:off x="762000" y="10308958"/>
+            <a:ext cx="8890000" cy="240042"/>
           </a:xfrm>
           <a:prstGeom prst="rect">
             <a:avLst/>
@@ -33256,8 +33256,8 @@
         </p:nvSpPr>
         <p:spPr>
           <a:xfrm>
-            <a:off x="18073751" y="10345801"/>
-            <a:ext cx="1270000" cy="203200"/>
+            <a:off x="18073751" y="10308958"/>
+            <a:ext cx="1270000" cy="240042"/>
           </a:xfrm>
           <a:prstGeom prst="rect">
             <a:avLst/>
@@ -33399,8 +33399,8 @@
         </p:nvSpPr>
         <p:spPr>
           <a:xfrm>
-            <a:off x="12386341" y="1524000"/>
-            <a:ext cx="6957409" cy="3914067"/>
+            <a:off x="12451829" y="1524000"/>
+            <a:ext cx="6891921" cy="3877225"/>
           </a:xfrm>
           <a:prstGeom prst="rect">
             <a:avLst/>
@@ -33445,8 +33445,8 @@
         </p:nvSpPr>
         <p:spPr>
           <a:xfrm>
-            <a:off x="12650024" y="1787683"/>
-            <a:ext cx="6430043" cy="3386701"/>
+            <a:off x="12713030" y="1785201"/>
+            <a:ext cx="6369519" cy="3354823"/>
           </a:xfrm>
           <a:prstGeom prst="rect">
             <a:avLst/>
@@ -33489,8 +33489,8 @@
         </p:nvSpPr>
         <p:spPr>
           <a:xfrm>
-            <a:off x="12386341" y="6200067"/>
-            <a:ext cx="6957409" cy="184647"/>
+            <a:off x="12451829" y="6163225"/>
+            <a:ext cx="6891921" cy="184647"/>
           </a:xfrm>
           <a:prstGeom prst="rect">
             <a:avLst/>
@@ -33528,8 +33528,8 @@
         </p:nvSpPr>
         <p:spPr>
           <a:xfrm>
-            <a:off x="12386341" y="6589241"/>
-            <a:ext cx="6957409" cy="400070"/>
+            <a:off x="12451829" y="6552399"/>
+            <a:ext cx="6891921" cy="400070"/>
           </a:xfrm>
           <a:prstGeom prst="rect">
             <a:avLst/>
@@ -33567,8 +33567,8 @@
         </p:nvSpPr>
         <p:spPr>
           <a:xfrm>
-            <a:off x="12386341" y="7390119"/>
-            <a:ext cx="6957409" cy="184647"/>
+            <a:off x="12451829" y="7353276"/>
+            <a:ext cx="6891921" cy="184647"/>
           </a:xfrm>
           <a:prstGeom prst="rect">
             <a:avLst/>
@@ -33606,8 +33606,8 @@
         </p:nvSpPr>
         <p:spPr>
           <a:xfrm>
-            <a:off x="12386341" y="7779293"/>
-            <a:ext cx="6957409" cy="400070"/>
+            <a:off x="12451829" y="7742450"/>
+            <a:ext cx="6891921" cy="400070"/>
           </a:xfrm>
           <a:prstGeom prst="rect">
             <a:avLst/>
@@ -33645,8 +33645,8 @@
         </p:nvSpPr>
         <p:spPr>
           <a:xfrm>
-            <a:off x="12386341" y="8580170"/>
-            <a:ext cx="6957409" cy="184647"/>
+            <a:off x="12451829" y="8543328"/>
+            <a:ext cx="6891921" cy="184647"/>
           </a:xfrm>
           <a:prstGeom prst="rect">
             <a:avLst/>
@@ -33684,8 +33684,8 @@
         </p:nvSpPr>
         <p:spPr>
           <a:xfrm>
-            <a:off x="12386341" y="8969344"/>
-            <a:ext cx="6957409" cy="400070"/>
+            <a:off x="12451829" y="8932502"/>
+            <a:ext cx="6891921" cy="400070"/>
           </a:xfrm>
           <a:prstGeom prst="rect">
             <a:avLst/>
@@ -33723,8 +33723,8 @@
         </p:nvSpPr>
         <p:spPr>
           <a:xfrm>
-            <a:off x="762000" y="10345801"/>
-            <a:ext cx="8890000" cy="203200"/>
+            <a:off x="762000" y="10308958"/>
+            <a:ext cx="8890000" cy="240042"/>
           </a:xfrm>
           <a:prstGeom prst="rect">
             <a:avLst/>
@@ -33762,8 +33762,8 @@
         </p:nvSpPr>
         <p:spPr>
           <a:xfrm>
-            <a:off x="18073751" y="10345801"/>
-            <a:ext cx="1270000" cy="203200"/>
+            <a:off x="18073751" y="10308958"/>
+            <a:ext cx="1270000" cy="240042"/>
           </a:xfrm>
           <a:prstGeom prst="rect">
             <a:avLst/>
@@ -33905,7 +33905,7 @@
         </p:nvSpPr>
         <p:spPr>
           <a:xfrm>
-            <a:off x="762000" y="5317933"/>
+            <a:off x="762000" y="5299511"/>
             <a:ext cx="5855250" cy="1946024"/>
           </a:xfrm>
           <a:prstGeom prst="roundRect">
@@ -33983,7 +33983,7 @@
         </p:nvSpPr>
         <p:spPr>
           <a:xfrm>
-            <a:off x="7125250" y="5317933"/>
+            <a:off x="7125250" y="5299511"/>
             <a:ext cx="5855250" cy="1946024"/>
           </a:xfrm>
           <a:prstGeom prst="roundRect">
@@ -34061,7 +34061,7 @@
         </p:nvSpPr>
         <p:spPr>
           <a:xfrm>
-            <a:off x="13488500" y="5317933"/>
+            <a:off x="13488500" y="5299511"/>
             <a:ext cx="5855250" cy="1946024"/>
           </a:xfrm>
           <a:prstGeom prst="roundRect">
@@ -34139,8 +34139,8 @@
         </p:nvSpPr>
         <p:spPr>
           <a:xfrm>
-            <a:off x="762000" y="10345801"/>
-            <a:ext cx="8890000" cy="203200"/>
+            <a:off x="762000" y="10308958"/>
+            <a:ext cx="8890000" cy="240042"/>
           </a:xfrm>
           <a:prstGeom prst="rect">
             <a:avLst/>
@@ -34178,8 +34178,8 @@
         </p:nvSpPr>
         <p:spPr>
           <a:xfrm>
-            <a:off x="18073751" y="10345801"/>
-            <a:ext cx="1270000" cy="203200"/>
+            <a:off x="18073751" y="10308958"/>
+            <a:ext cx="1270000" cy="240042"/>
           </a:xfrm>
           <a:prstGeom prst="rect">
             <a:avLst/>
@@ -34321,7 +34321,7 @@
         </p:nvSpPr>
         <p:spPr>
           <a:xfrm>
-            <a:off x="762000" y="5063933"/>
+            <a:off x="762000" y="5045511"/>
             <a:ext cx="9036875" cy="2454024"/>
           </a:xfrm>
           <a:prstGeom prst="roundRect">
@@ -34399,7 +34399,7 @@
         </p:nvSpPr>
         <p:spPr>
           <a:xfrm>
-            <a:off x="10306875" y="5063933"/>
+            <a:off x="10306875" y="5045511"/>
             <a:ext cx="9036875" cy="2454024"/>
           </a:xfrm>
           <a:prstGeom prst="roundRect">
@@ -34477,8 +34477,8 @@
         </p:nvSpPr>
         <p:spPr>
           <a:xfrm>
-            <a:off x="762000" y="10345801"/>
-            <a:ext cx="8890000" cy="203200"/>
+            <a:off x="762000" y="10308958"/>
+            <a:ext cx="8890000" cy="240042"/>
           </a:xfrm>
           <a:prstGeom prst="rect">
             <a:avLst/>
@@ -34516,8 +34516,8 @@
         </p:nvSpPr>
         <p:spPr>
           <a:xfrm>
-            <a:off x="18073751" y="10345801"/>
-            <a:ext cx="1270000" cy="203200"/>
+            <a:off x="18073751" y="10308958"/>
+            <a:ext cx="1270000" cy="240042"/>
           </a:xfrm>
           <a:prstGeom prst="rect">
             <a:avLst/>
@@ -34659,7 +34659,7 @@
         </p:nvSpPr>
         <p:spPr>
           <a:xfrm>
-            <a:off x="762000" y="5096403"/>
+            <a:off x="762000" y="5077982"/>
             <a:ext cx="4264437" cy="2431348"/>
           </a:xfrm>
           <a:prstGeom prst="roundRect">
@@ -34756,7 +34756,7 @@
         </p:nvSpPr>
         <p:spPr>
           <a:xfrm>
-            <a:off x="5534437" y="5096403"/>
+            <a:off x="5534437" y="5077982"/>
             <a:ext cx="4264437" cy="2431348"/>
           </a:xfrm>
           <a:prstGeom prst="roundRect">
@@ -34853,7 +34853,7 @@
         </p:nvSpPr>
         <p:spPr>
           <a:xfrm>
-            <a:off x="10306875" y="5096403"/>
+            <a:off x="10306875" y="5077982"/>
             <a:ext cx="4264437" cy="2431348"/>
           </a:xfrm>
           <a:prstGeom prst="roundRect">
@@ -34950,7 +34950,7 @@
         </p:nvSpPr>
         <p:spPr>
           <a:xfrm>
-            <a:off x="15079313" y="5096403"/>
+            <a:off x="15079313" y="5077982"/>
             <a:ext cx="4264437" cy="2431348"/>
           </a:xfrm>
           <a:prstGeom prst="roundRect">
@@ -35047,8 +35047,8 @@
         </p:nvSpPr>
         <p:spPr>
           <a:xfrm>
-            <a:off x="762000" y="10345801"/>
-            <a:ext cx="8890000" cy="203200"/>
+            <a:off x="762000" y="10308958"/>
+            <a:ext cx="8890000" cy="240042"/>
           </a:xfrm>
           <a:prstGeom prst="rect">
             <a:avLst/>
@@ -35086,8 +35086,8 @@
         </p:nvSpPr>
         <p:spPr>
           <a:xfrm>
-            <a:off x="18073751" y="10345801"/>
-            <a:ext cx="1270000" cy="203200"/>
+            <a:off x="18073751" y="10308958"/>
+            <a:ext cx="1270000" cy="240042"/>
           </a:xfrm>
           <a:prstGeom prst="rect">
             <a:avLst/>
@@ -35229,7 +35229,7 @@
         </p:nvSpPr>
         <p:spPr>
           <a:xfrm>
-            <a:off x="762000" y="5090785"/>
+            <a:off x="762000" y="5072364"/>
             <a:ext cx="9036875" cy="2442583"/>
           </a:xfrm>
           <a:prstGeom prst="roundRect">
@@ -35326,7 +35326,7 @@
         </p:nvSpPr>
         <p:spPr>
           <a:xfrm>
-            <a:off x="10306875" y="5090785"/>
+            <a:off x="10306875" y="5072364"/>
             <a:ext cx="9036875" cy="2442583"/>
           </a:xfrm>
           <a:prstGeom prst="roundRect">
@@ -35423,8 +35423,8 @@
         </p:nvSpPr>
         <p:spPr>
           <a:xfrm>
-            <a:off x="762000" y="10345801"/>
-            <a:ext cx="8890000" cy="203200"/>
+            <a:off x="762000" y="10308958"/>
+            <a:ext cx="8890000" cy="240042"/>
           </a:xfrm>
           <a:prstGeom prst="rect">
             <a:avLst/>
@@ -35462,8 +35462,8 @@
         </p:nvSpPr>
         <p:spPr>
           <a:xfrm>
-            <a:off x="18073751" y="10345801"/>
-            <a:ext cx="1270000" cy="203200"/>
+            <a:off x="18073751" y="10308958"/>
+            <a:ext cx="1270000" cy="240042"/>
           </a:xfrm>
           <a:prstGeom prst="rect">
             <a:avLst/>
@@ -35605,7 +35605,7 @@
         </p:nvSpPr>
         <p:spPr>
           <a:xfrm>
-            <a:off x="762000" y="5196162"/>
+            <a:off x="762000" y="5177741"/>
             <a:ext cx="4264437" cy="830915"/>
           </a:xfrm>
           <a:prstGeom prst="rect">
@@ -35644,7 +35644,7 @@
         </p:nvSpPr>
         <p:spPr>
           <a:xfrm>
-            <a:off x="762000" y="6058445"/>
+            <a:off x="762000" y="6040024"/>
             <a:ext cx="4264437" cy="430844"/>
           </a:xfrm>
           <a:prstGeom prst="rect">
@@ -35683,7 +35683,7 @@
         </p:nvSpPr>
         <p:spPr>
           <a:xfrm>
-            <a:off x="762000" y="6627851"/>
+            <a:off x="762000" y="6609430"/>
             <a:ext cx="4264437" cy="800140"/>
           </a:xfrm>
           <a:prstGeom prst="rect">
@@ -35722,7 +35722,7 @@
         </p:nvSpPr>
         <p:spPr>
           <a:xfrm>
-            <a:off x="5534437" y="5196162"/>
+            <a:off x="5534437" y="5177741"/>
             <a:ext cx="4264437" cy="830915"/>
           </a:xfrm>
           <a:prstGeom prst="rect">
@@ -35761,7 +35761,7 @@
         </p:nvSpPr>
         <p:spPr>
           <a:xfrm>
-            <a:off x="5534437" y="6058445"/>
+            <a:off x="5534437" y="6040024"/>
             <a:ext cx="4264437" cy="430844"/>
           </a:xfrm>
           <a:prstGeom prst="rect">
@@ -35800,7 +35800,7 @@
         </p:nvSpPr>
         <p:spPr>
           <a:xfrm>
-            <a:off x="5534437" y="6627851"/>
+            <a:off x="5534437" y="6609430"/>
             <a:ext cx="4264437" cy="800140"/>
           </a:xfrm>
           <a:prstGeom prst="rect">
@@ -35839,7 +35839,7 @@
         </p:nvSpPr>
         <p:spPr>
           <a:xfrm>
-            <a:off x="10306875" y="5196162"/>
+            <a:off x="10306875" y="5177741"/>
             <a:ext cx="4264437" cy="830915"/>
           </a:xfrm>
           <a:prstGeom prst="rect">
@@ -35878,7 +35878,7 @@
         </p:nvSpPr>
         <p:spPr>
           <a:xfrm>
-            <a:off x="10306875" y="6058445"/>
+            <a:off x="10306875" y="6040024"/>
             <a:ext cx="4264437" cy="430844"/>
           </a:xfrm>
           <a:prstGeom prst="rect">
@@ -35917,7 +35917,7 @@
         </p:nvSpPr>
         <p:spPr>
           <a:xfrm>
-            <a:off x="10306875" y="6627851"/>
+            <a:off x="10306875" y="6609430"/>
             <a:ext cx="4264437" cy="800140"/>
           </a:xfrm>
           <a:prstGeom prst="rect">
@@ -35956,7 +35956,7 @@
         </p:nvSpPr>
         <p:spPr>
           <a:xfrm>
-            <a:off x="15079313" y="5196162"/>
+            <a:off x="15079313" y="5177741"/>
             <a:ext cx="4264437" cy="830915"/>
           </a:xfrm>
           <a:prstGeom prst="rect">
@@ -35995,7 +35995,7 @@
         </p:nvSpPr>
         <p:spPr>
           <a:xfrm>
-            <a:off x="15079313" y="6058445"/>
+            <a:off x="15079313" y="6040024"/>
             <a:ext cx="4264437" cy="430844"/>
           </a:xfrm>
           <a:prstGeom prst="rect">
@@ -36034,7 +36034,7 @@
         </p:nvSpPr>
         <p:spPr>
           <a:xfrm>
-            <a:off x="15079313" y="6627851"/>
+            <a:off x="15079313" y="6609430"/>
             <a:ext cx="4264437" cy="800140"/>
           </a:xfrm>
           <a:prstGeom prst="rect">
@@ -36073,8 +36073,8 @@
         </p:nvSpPr>
         <p:spPr>
           <a:xfrm>
-            <a:off x="762000" y="10345801"/>
-            <a:ext cx="8890000" cy="203200"/>
+            <a:off x="762000" y="10308958"/>
+            <a:ext cx="8890000" cy="240042"/>
           </a:xfrm>
           <a:prstGeom prst="rect">
             <a:avLst/>
@@ -36112,8 +36112,8 @@
         </p:nvSpPr>
         <p:spPr>
           <a:xfrm>
-            <a:off x="18073751" y="10345801"/>
-            <a:ext cx="1270000" cy="203200"/>
+            <a:off x="18073751" y="10308958"/>
+            <a:ext cx="1270000" cy="240042"/>
           </a:xfrm>
           <a:prstGeom prst="rect">
             <a:avLst/>
@@ -36255,7 +36255,7 @@
         </p:nvSpPr>
         <p:spPr>
           <a:xfrm>
-            <a:off x="762000" y="5196162"/>
+            <a:off x="762000" y="5177741"/>
             <a:ext cx="4264437" cy="830915"/>
           </a:xfrm>
           <a:prstGeom prst="rect">
@@ -36294,7 +36294,7 @@
         </p:nvSpPr>
         <p:spPr>
           <a:xfrm>
-            <a:off x="762000" y="6058445"/>
+            <a:off x="762000" y="6040024"/>
             <a:ext cx="4264437" cy="430844"/>
           </a:xfrm>
           <a:prstGeom prst="rect">
@@ -36333,7 +36333,7 @@
         </p:nvSpPr>
         <p:spPr>
           <a:xfrm>
-            <a:off x="762000" y="6627851"/>
+            <a:off x="762000" y="6609430"/>
             <a:ext cx="4264437" cy="800140"/>
           </a:xfrm>
           <a:prstGeom prst="rect">
@@ -36372,7 +36372,7 @@
         </p:nvSpPr>
         <p:spPr>
           <a:xfrm>
-            <a:off x="5534437" y="5196162"/>
+            <a:off x="5534437" y="5177741"/>
             <a:ext cx="4264437" cy="830915"/>
           </a:xfrm>
           <a:prstGeom prst="rect">
@@ -36411,7 +36411,7 @@
         </p:nvSpPr>
         <p:spPr>
           <a:xfrm>
-            <a:off x="5534437" y="6058445"/>
+            <a:off x="5534437" y="6040024"/>
             <a:ext cx="4264437" cy="430844"/>
           </a:xfrm>
           <a:prstGeom prst="rect">
@@ -36450,7 +36450,7 @@
         </p:nvSpPr>
         <p:spPr>
           <a:xfrm>
-            <a:off x="5534437" y="6627851"/>
+            <a:off x="5534437" y="6609430"/>
             <a:ext cx="4264437" cy="800140"/>
           </a:xfrm>
           <a:prstGeom prst="rect">
@@ -36489,7 +36489,7 @@
         </p:nvSpPr>
         <p:spPr>
           <a:xfrm>
-            <a:off x="10306875" y="5196162"/>
+            <a:off x="10306875" y="5177741"/>
             <a:ext cx="4264437" cy="830915"/>
           </a:xfrm>
           <a:prstGeom prst="rect">
@@ -36528,7 +36528,7 @@
         </p:nvSpPr>
         <p:spPr>
           <a:xfrm>
-            <a:off x="10306875" y="6058445"/>
+            <a:off x="10306875" y="6040024"/>
             <a:ext cx="4264437" cy="430844"/>
           </a:xfrm>
           <a:prstGeom prst="rect">
@@ -36567,7 +36567,7 @@
         </p:nvSpPr>
         <p:spPr>
           <a:xfrm>
-            <a:off x="10306875" y="6627851"/>
+            <a:off x="10306875" y="6609430"/>
             <a:ext cx="4264437" cy="800140"/>
           </a:xfrm>
           <a:prstGeom prst="rect">
@@ -36606,8 +36606,8 @@
         </p:nvSpPr>
         <p:spPr>
           <a:xfrm>
-            <a:off x="762000" y="10345801"/>
-            <a:ext cx="8890000" cy="203200"/>
+            <a:off x="762000" y="10308958"/>
+            <a:ext cx="8890000" cy="240042"/>
           </a:xfrm>
           <a:prstGeom prst="rect">
             <a:avLst/>
@@ -36645,8 +36645,8 @@
         </p:nvSpPr>
         <p:spPr>
           <a:xfrm>
-            <a:off x="18073751" y="10345801"/>
-            <a:ext cx="1270000" cy="203200"/>
+            <a:off x="18073751" y="10308958"/>
+            <a:ext cx="1270000" cy="240042"/>
           </a:xfrm>
           <a:prstGeom prst="rect">
             <a:avLst/>
@@ -36710,7 +36710,7 @@
         </p:nvSpPr>
         <p:spPr>
           <a:xfrm>
-            <a:off x="762000" y="1706365"/>
+            <a:off x="762000" y="1687944"/>
             <a:ext cx="13809313" cy="276971"/>
           </a:xfrm>
           <a:prstGeom prst="rect">
@@ -36749,7 +36749,7 @@
         </p:nvSpPr>
         <p:spPr>
           <a:xfrm>
-            <a:off x="762000" y="2417126"/>
+            <a:off x="762000" y="2398705"/>
             <a:ext cx="13809313" cy="830915"/>
           </a:xfrm>
           <a:prstGeom prst="rect">
@@ -36788,7 +36788,7 @@
         </p:nvSpPr>
         <p:spPr>
           <a:xfrm>
-            <a:off x="762000" y="3787410"/>
+            <a:off x="762000" y="3768989"/>
             <a:ext cx="13809313" cy="2720478"/>
           </a:xfrm>
           <a:prstGeom prst="rect">
@@ -36859,7 +36859,7 @@
         </p:nvSpPr>
         <p:spPr>
           <a:xfrm>
-            <a:off x="762000" y="7269888"/>
+            <a:off x="762000" y="7251467"/>
             <a:ext cx="4264437" cy="430844"/>
           </a:xfrm>
           <a:prstGeom prst="rect">
@@ -36898,7 +36898,7 @@
         </p:nvSpPr>
         <p:spPr>
           <a:xfrm>
-            <a:off x="762000" y="7839294"/>
+            <a:off x="762000" y="7820873"/>
             <a:ext cx="4264437" cy="400070"/>
           </a:xfrm>
           <a:prstGeom prst="rect">
@@ -36937,7 +36937,7 @@
         </p:nvSpPr>
         <p:spPr>
           <a:xfrm>
-            <a:off x="5534437" y="7269888"/>
+            <a:off x="5534437" y="7251467"/>
             <a:ext cx="4264437" cy="430844"/>
           </a:xfrm>
           <a:prstGeom prst="rect">
@@ -36976,7 +36976,7 @@
         </p:nvSpPr>
         <p:spPr>
           <a:xfrm>
-            <a:off x="5534437" y="7839294"/>
+            <a:off x="5534437" y="7820873"/>
             <a:ext cx="4264437" cy="800140"/>
           </a:xfrm>
           <a:prstGeom prst="rect">
@@ -37015,7 +37015,7 @@
         </p:nvSpPr>
         <p:spPr>
           <a:xfrm>
-            <a:off x="10306875" y="7269888"/>
+            <a:off x="10306875" y="7251467"/>
             <a:ext cx="4264437" cy="430844"/>
           </a:xfrm>
           <a:prstGeom prst="rect">
@@ -37054,7 +37054,7 @@
         </p:nvSpPr>
         <p:spPr>
           <a:xfrm>
-            <a:off x="10306875" y="7839294"/>
+            <a:off x="10306875" y="7820873"/>
             <a:ext cx="4264437" cy="400070"/>
           </a:xfrm>
           <a:prstGeom prst="rect">
@@ -37093,8 +37093,8 @@
         </p:nvSpPr>
         <p:spPr>
           <a:xfrm>
-            <a:off x="762000" y="10345801"/>
-            <a:ext cx="8890000" cy="203200"/>
+            <a:off x="762000" y="10308958"/>
+            <a:ext cx="8890000" cy="240042"/>
           </a:xfrm>
           <a:prstGeom prst="rect">
             <a:avLst/>
@@ -37132,8 +37132,8 @@
         </p:nvSpPr>
         <p:spPr>
           <a:xfrm>
-            <a:off x="18073751" y="10345801"/>
-            <a:ext cx="1270000" cy="203200"/>
+            <a:off x="18073751" y="10308958"/>
+            <a:ext cx="1270000" cy="240042"/>
           </a:xfrm>
           <a:prstGeom prst="rect">
             <a:avLst/>
@@ -37197,7 +37197,7 @@
         </p:nvSpPr>
         <p:spPr>
           <a:xfrm>
-            <a:off x="762000" y="2246460"/>
+            <a:off x="762000" y="2228039"/>
             <a:ext cx="13809313" cy="276971"/>
           </a:xfrm>
           <a:prstGeom prst="rect">
@@ -37236,7 +37236,7 @@
         </p:nvSpPr>
         <p:spPr>
           <a:xfrm>
-            <a:off x="762000" y="2957221"/>
+            <a:off x="762000" y="2938800"/>
             <a:ext cx="13809313" cy="830915"/>
           </a:xfrm>
           <a:prstGeom prst="rect">
@@ -37275,7 +37275,7 @@
         </p:nvSpPr>
         <p:spPr>
           <a:xfrm>
-            <a:off x="762000" y="4327505"/>
+            <a:off x="762000" y="4309084"/>
             <a:ext cx="13809313" cy="2040358"/>
           </a:xfrm>
           <a:prstGeom prst="rect">
@@ -37314,7 +37314,7 @@
         </p:nvSpPr>
         <p:spPr>
           <a:xfrm>
-            <a:off x="762000" y="7129863"/>
+            <a:off x="762000" y="7111442"/>
             <a:ext cx="9036875" cy="430844"/>
           </a:xfrm>
           <a:prstGeom prst="rect">
@@ -37353,7 +37353,7 @@
         </p:nvSpPr>
         <p:spPr>
           <a:xfrm>
-            <a:off x="762000" y="7699270"/>
+            <a:off x="762000" y="7680849"/>
             <a:ext cx="9036875" cy="400070"/>
           </a:xfrm>
           <a:prstGeom prst="rect">
@@ -37392,7 +37392,7 @@
         </p:nvSpPr>
         <p:spPr>
           <a:xfrm>
-            <a:off x="10306875" y="7129863"/>
+            <a:off x="10306875" y="7111442"/>
             <a:ext cx="9036875" cy="430844"/>
           </a:xfrm>
           <a:prstGeom prst="rect">
@@ -37431,7 +37431,7 @@
         </p:nvSpPr>
         <p:spPr>
           <a:xfrm>
-            <a:off x="10306875" y="7699270"/>
+            <a:off x="10306875" y="7680849"/>
             <a:ext cx="9036875" cy="400070"/>
           </a:xfrm>
           <a:prstGeom prst="rect">
@@ -37470,8 +37470,8 @@
         </p:nvSpPr>
         <p:spPr>
           <a:xfrm>
-            <a:off x="762000" y="10345801"/>
-            <a:ext cx="8890000" cy="203200"/>
+            <a:off x="762000" y="10308958"/>
+            <a:ext cx="8890000" cy="240042"/>
           </a:xfrm>
           <a:prstGeom prst="rect">
             <a:avLst/>
@@ -37509,8 +37509,8 @@
         </p:nvSpPr>
         <p:spPr>
           <a:xfrm>
-            <a:off x="18073751" y="10345801"/>
-            <a:ext cx="1270000" cy="203200"/>
+            <a:off x="18073751" y="10308958"/>
+            <a:ext cx="1270000" cy="240042"/>
           </a:xfrm>
           <a:prstGeom prst="rect">
             <a:avLst/>
@@ -37574,7 +37574,7 @@
         </p:nvSpPr>
         <p:spPr>
           <a:xfrm>
-            <a:off x="762000" y="2372494"/>
+            <a:off x="762000" y="2354073"/>
             <a:ext cx="13809313" cy="184647"/>
           </a:xfrm>
           <a:prstGeom prst="rect">
@@ -37613,7 +37613,7 @@
         </p:nvSpPr>
         <p:spPr>
           <a:xfrm>
-            <a:off x="762000" y="3015668"/>
+            <a:off x="762000" y="2997247"/>
             <a:ext cx="13809313" cy="830915"/>
           </a:xfrm>
           <a:prstGeom prst="rect">
@@ -37652,7 +37652,7 @@
         </p:nvSpPr>
         <p:spPr>
           <a:xfrm>
-            <a:off x="762000" y="4385952"/>
+            <a:off x="762000" y="4367531"/>
             <a:ext cx="13809313" cy="1360239"/>
           </a:xfrm>
           <a:prstGeom prst="rect">
@@ -37691,7 +37691,7 @@
         </p:nvSpPr>
         <p:spPr>
           <a:xfrm>
-            <a:off x="762000" y="6508191"/>
+            <a:off x="762000" y="6489770"/>
             <a:ext cx="4264437" cy="1107887"/>
           </a:xfrm>
           <a:prstGeom prst="rect">
@@ -37730,7 +37730,7 @@
         </p:nvSpPr>
         <p:spPr>
           <a:xfrm>
-            <a:off x="762000" y="7573236"/>
+            <a:off x="762000" y="7554814"/>
             <a:ext cx="4264437" cy="400070"/>
           </a:xfrm>
           <a:prstGeom prst="rect">
@@ -37769,7 +37769,7 @@
         </p:nvSpPr>
         <p:spPr>
           <a:xfrm>
-            <a:off x="5534437" y="6508191"/>
+            <a:off x="5534437" y="6489770"/>
             <a:ext cx="4264437" cy="1107887"/>
           </a:xfrm>
           <a:prstGeom prst="rect">
@@ -37808,7 +37808,7 @@
         </p:nvSpPr>
         <p:spPr>
           <a:xfrm>
-            <a:off x="5534437" y="7573236"/>
+            <a:off x="5534437" y="7554814"/>
             <a:ext cx="4264437" cy="400070"/>
           </a:xfrm>
           <a:prstGeom prst="rect">
@@ -37847,7 +37847,7 @@
         </p:nvSpPr>
         <p:spPr>
           <a:xfrm>
-            <a:off x="10306875" y="6508191"/>
+            <a:off x="10306875" y="6489770"/>
             <a:ext cx="4264437" cy="1107887"/>
           </a:xfrm>
           <a:prstGeom prst="rect">
@@ -37886,7 +37886,7 @@
         </p:nvSpPr>
         <p:spPr>
           <a:xfrm>
-            <a:off x="10306875" y="7573236"/>
+            <a:off x="10306875" y="7554814"/>
             <a:ext cx="4264437" cy="400070"/>
           </a:xfrm>
           <a:prstGeom prst="rect">
@@ -37925,7 +37925,7 @@
         </p:nvSpPr>
         <p:spPr>
           <a:xfrm>
-            <a:off x="15079313" y="6508191"/>
+            <a:off x="15079313" y="6489770"/>
             <a:ext cx="4264437" cy="1107887"/>
           </a:xfrm>
           <a:prstGeom prst="rect">
@@ -37964,7 +37964,7 @@
         </p:nvSpPr>
         <p:spPr>
           <a:xfrm>
-            <a:off x="15079313" y="7573236"/>
+            <a:off x="15079313" y="7554814"/>
             <a:ext cx="4264437" cy="400070"/>
           </a:xfrm>
           <a:prstGeom prst="rect">
@@ -38003,8 +38003,8 @@
         </p:nvSpPr>
         <p:spPr>
           <a:xfrm>
-            <a:off x="762000" y="10345801"/>
-            <a:ext cx="8890000" cy="203200"/>
+            <a:off x="762000" y="10308958"/>
+            <a:ext cx="8890000" cy="240042"/>
           </a:xfrm>
           <a:prstGeom prst="rect">
             <a:avLst/>
@@ -38042,8 +38042,8 @@
         </p:nvSpPr>
         <p:spPr>
           <a:xfrm>
-            <a:off x="18073751" y="10345801"/>
-            <a:ext cx="1270000" cy="203200"/>
+            <a:off x="18073751" y="10308958"/>
+            <a:ext cx="1270000" cy="240042"/>
           </a:xfrm>
           <a:prstGeom prst="rect">
             <a:avLst/>
@@ -38107,7 +38107,7 @@
         </p:nvSpPr>
         <p:spPr>
           <a:xfrm>
-            <a:off x="762000" y="2372494"/>
+            <a:off x="762000" y="2354073"/>
             <a:ext cx="13809313" cy="184647"/>
           </a:xfrm>
           <a:prstGeom prst="rect">
@@ -38146,7 +38146,7 @@
         </p:nvSpPr>
         <p:spPr>
           <a:xfrm>
-            <a:off x="762000" y="3015668"/>
+            <a:off x="762000" y="2997247"/>
             <a:ext cx="13809313" cy="830915"/>
           </a:xfrm>
           <a:prstGeom prst="rect">
@@ -38185,7 +38185,7 @@
         </p:nvSpPr>
         <p:spPr>
           <a:xfrm>
-            <a:off x="762000" y="4385952"/>
+            <a:off x="762000" y="4367531"/>
             <a:ext cx="13809313" cy="1360239"/>
           </a:xfrm>
           <a:prstGeom prst="rect">
@@ -38224,7 +38224,7 @@
         </p:nvSpPr>
         <p:spPr>
           <a:xfrm>
-            <a:off x="762000" y="6508191"/>
+            <a:off x="762000" y="6489770"/>
             <a:ext cx="4264437" cy="1107887"/>
           </a:xfrm>
           <a:prstGeom prst="rect">
@@ -38263,7 +38263,7 @@
         </p:nvSpPr>
         <p:spPr>
           <a:xfrm>
-            <a:off x="762000" y="7573236"/>
+            <a:off x="762000" y="7554814"/>
             <a:ext cx="4264437" cy="400070"/>
           </a:xfrm>
           <a:prstGeom prst="rect">
@@ -38302,7 +38302,7 @@
         </p:nvSpPr>
         <p:spPr>
           <a:xfrm>
-            <a:off x="5534437" y="6508191"/>
+            <a:off x="5534437" y="6489770"/>
             <a:ext cx="4264437" cy="1107887"/>
           </a:xfrm>
           <a:prstGeom prst="rect">
@@ -38341,7 +38341,7 @@
         </p:nvSpPr>
         <p:spPr>
           <a:xfrm>
-            <a:off x="5534437" y="7573236"/>
+            <a:off x="5534437" y="7554814"/>
             <a:ext cx="4264437" cy="400070"/>
           </a:xfrm>
           <a:prstGeom prst="rect">
@@ -38380,7 +38380,7 @@
         </p:nvSpPr>
         <p:spPr>
           <a:xfrm>
-            <a:off x="10306875" y="6508191"/>
+            <a:off x="10306875" y="6489770"/>
             <a:ext cx="4264437" cy="1107887"/>
           </a:xfrm>
           <a:prstGeom prst="rect">
@@ -38419,7 +38419,7 @@
         </p:nvSpPr>
         <p:spPr>
           <a:xfrm>
-            <a:off x="10306875" y="7573236"/>
+            <a:off x="10306875" y="7554814"/>
             <a:ext cx="4264437" cy="400070"/>
           </a:xfrm>
           <a:prstGeom prst="rect">
@@ -38458,8 +38458,8 @@
         </p:nvSpPr>
         <p:spPr>
           <a:xfrm>
-            <a:off x="762000" y="10345801"/>
-            <a:ext cx="8890000" cy="203200"/>
+            <a:off x="762000" y="10308958"/>
+            <a:ext cx="8890000" cy="240042"/>
           </a:xfrm>
           <a:prstGeom prst="rect">
             <a:avLst/>
@@ -38497,8 +38497,8 @@
         </p:nvSpPr>
         <p:spPr>
           <a:xfrm>
-            <a:off x="18073751" y="10345801"/>
-            <a:ext cx="1270000" cy="203200"/>
+            <a:off x="18073751" y="10308958"/>
+            <a:ext cx="1270000" cy="240042"/>
           </a:xfrm>
           <a:prstGeom prst="rect">
             <a:avLst/>
@@ -38640,8 +38640,8 @@
         </p:nvSpPr>
         <p:spPr>
           <a:xfrm>
-            <a:off x="12386341" y="1524000"/>
-            <a:ext cx="6957409" cy="3914067"/>
+            <a:off x="12451829" y="1524000"/>
+            <a:ext cx="6891921" cy="3877225"/>
           </a:xfrm>
           <a:prstGeom prst="rect">
             <a:avLst/>
@@ -38686,8 +38686,8 @@
         </p:nvSpPr>
         <p:spPr>
           <a:xfrm>
-            <a:off x="12650024" y="1787683"/>
-            <a:ext cx="6430043" cy="3386701"/>
+            <a:off x="12713030" y="1785201"/>
+            <a:ext cx="6369519" cy="3354823"/>
           </a:xfrm>
           <a:prstGeom prst="rect">
             <a:avLst/>
@@ -38730,8 +38730,8 @@
         </p:nvSpPr>
         <p:spPr>
           <a:xfrm>
-            <a:off x="12650024" y="5174384"/>
-            <a:ext cx="87894" cy="87894"/>
+            <a:off x="12713030" y="5140024"/>
+            <a:ext cx="87067" cy="87067"/>
           </a:xfrm>
           <a:prstGeom prst="rect">
             <a:avLst/>
@@ -38774,8 +38774,8 @@
         </p:nvSpPr>
         <p:spPr>
           <a:xfrm>
-            <a:off x="12825812" y="5174384"/>
-            <a:ext cx="87894" cy="87894"/>
+            <a:off x="12887164" y="5140024"/>
+            <a:ext cx="87067" cy="87067"/>
           </a:xfrm>
           <a:prstGeom prst="rect">
             <a:avLst/>
@@ -38818,8 +38818,8 @@
         </p:nvSpPr>
         <p:spPr>
           <a:xfrm>
-            <a:off x="13001601" y="5174384"/>
-            <a:ext cx="87894" cy="87894"/>
+            <a:off x="13061298" y="5140024"/>
+            <a:ext cx="87067" cy="87067"/>
           </a:xfrm>
           <a:prstGeom prst="rect">
             <a:avLst/>
@@ -38862,8 +38862,8 @@
         </p:nvSpPr>
         <p:spPr>
           <a:xfrm>
-            <a:off x="13177390" y="5174384"/>
-            <a:ext cx="87894" cy="87894"/>
+            <a:off x="13235432" y="5140024"/>
+            <a:ext cx="87067" cy="87067"/>
           </a:xfrm>
           <a:prstGeom prst="rect">
             <a:avLst/>
@@ -38906,8 +38906,8 @@
         </p:nvSpPr>
         <p:spPr>
           <a:xfrm>
-            <a:off x="13353179" y="5174384"/>
-            <a:ext cx="87894" cy="87894"/>
+            <a:off x="13409566" y="5140024"/>
+            <a:ext cx="87067" cy="87067"/>
           </a:xfrm>
           <a:prstGeom prst="rect">
             <a:avLst/>
@@ -38950,8 +38950,8 @@
         </p:nvSpPr>
         <p:spPr>
           <a:xfrm>
-            <a:off x="13528967" y="5174384"/>
-            <a:ext cx="87894" cy="87894"/>
+            <a:off x="13583700" y="5140024"/>
+            <a:ext cx="87067" cy="87067"/>
           </a:xfrm>
           <a:prstGeom prst="rect">
             <a:avLst/>
@@ -38994,8 +38994,8 @@
         </p:nvSpPr>
         <p:spPr>
           <a:xfrm>
-            <a:off x="13704756" y="5174384"/>
-            <a:ext cx="87894" cy="87894"/>
+            <a:off x="13757835" y="5140024"/>
+            <a:ext cx="87067" cy="87067"/>
           </a:xfrm>
           <a:prstGeom prst="rect">
             <a:avLst/>
@@ -39038,8 +39038,8 @@
         </p:nvSpPr>
         <p:spPr>
           <a:xfrm>
-            <a:off x="13880545" y="5174384"/>
-            <a:ext cx="87894" cy="87894"/>
+            <a:off x="13931969" y="5140024"/>
+            <a:ext cx="87067" cy="87067"/>
           </a:xfrm>
           <a:prstGeom prst="rect">
             <a:avLst/>
@@ -39082,8 +39082,8 @@
         </p:nvSpPr>
         <p:spPr>
           <a:xfrm>
-            <a:off x="12386341" y="6200067"/>
-            <a:ext cx="6957409" cy="184647"/>
+            <a:off x="12451829" y="6163225"/>
+            <a:ext cx="6891921" cy="184647"/>
           </a:xfrm>
           <a:prstGeom prst="rect">
             <a:avLst/>
@@ -39121,8 +39121,8 @@
         </p:nvSpPr>
         <p:spPr>
           <a:xfrm>
-            <a:off x="12386341" y="6589241"/>
-            <a:ext cx="6957409" cy="400070"/>
+            <a:off x="12451829" y="6552399"/>
+            <a:ext cx="6891921" cy="400070"/>
           </a:xfrm>
           <a:prstGeom prst="rect">
             <a:avLst/>
@@ -39160,8 +39160,8 @@
         </p:nvSpPr>
         <p:spPr>
           <a:xfrm>
-            <a:off x="12386341" y="7390119"/>
-            <a:ext cx="6957409" cy="184647"/>
+            <a:off x="12451829" y="7353276"/>
+            <a:ext cx="6891921" cy="184647"/>
           </a:xfrm>
           <a:prstGeom prst="rect">
             <a:avLst/>
@@ -39199,8 +39199,8 @@
         </p:nvSpPr>
         <p:spPr>
           <a:xfrm>
-            <a:off x="12386341" y="7779293"/>
-            <a:ext cx="6957409" cy="400070"/>
+            <a:off x="12451829" y="7742450"/>
+            <a:ext cx="6891921" cy="400070"/>
           </a:xfrm>
           <a:prstGeom prst="rect">
             <a:avLst/>
@@ -39238,8 +39238,8 @@
         </p:nvSpPr>
         <p:spPr>
           <a:xfrm>
-            <a:off x="12386341" y="8580170"/>
-            <a:ext cx="6957409" cy="184647"/>
+            <a:off x="12451829" y="8543328"/>
+            <a:ext cx="6891921" cy="184647"/>
           </a:xfrm>
           <a:prstGeom prst="rect">
             <a:avLst/>
@@ -39277,8 +39277,8 @@
         </p:nvSpPr>
         <p:spPr>
           <a:xfrm>
-            <a:off x="12386341" y="8969344"/>
-            <a:ext cx="6957409" cy="400070"/>
+            <a:off x="12451829" y="8932502"/>
+            <a:ext cx="6891921" cy="400070"/>
           </a:xfrm>
           <a:prstGeom prst="rect">
             <a:avLst/>
@@ -39316,8 +39316,8 @@
         </p:nvSpPr>
         <p:spPr>
           <a:xfrm>
-            <a:off x="762000" y="10345801"/>
-            <a:ext cx="8890000" cy="203200"/>
+            <a:off x="762000" y="10308958"/>
+            <a:ext cx="8890000" cy="240042"/>
           </a:xfrm>
           <a:prstGeom prst="rect">
             <a:avLst/>
@@ -39355,8 +39355,8 @@
         </p:nvSpPr>
         <p:spPr>
           <a:xfrm>
-            <a:off x="18073751" y="10345801"/>
-            <a:ext cx="1270000" cy="203200"/>
+            <a:off x="18073751" y="10308958"/>
+            <a:ext cx="1270000" cy="240042"/>
           </a:xfrm>
           <a:prstGeom prst="rect">
             <a:avLst/>
@@ -39654,8 +39654,8 @@
         </p:nvSpPr>
         <p:spPr>
           <a:xfrm>
-            <a:off x="762000" y="10345801"/>
-            <a:ext cx="8890000" cy="203200"/>
+            <a:off x="762000" y="10308958"/>
+            <a:ext cx="8890000" cy="240042"/>
           </a:xfrm>
           <a:prstGeom prst="rect">
             <a:avLst/>
@@ -39693,8 +39693,8 @@
         </p:nvSpPr>
         <p:spPr>
           <a:xfrm>
-            <a:off x="18073751" y="10345801"/>
-            <a:ext cx="1270000" cy="203200"/>
+            <a:off x="18073751" y="10308958"/>
+            <a:ext cx="1270000" cy="240042"/>
           </a:xfrm>
           <a:prstGeom prst="rect">
             <a:avLst/>
@@ -39976,8 +39976,8 @@
         </p:nvSpPr>
         <p:spPr>
           <a:xfrm>
-            <a:off x="762000" y="10345801"/>
-            <a:ext cx="8890000" cy="203200"/>
+            <a:off x="762000" y="10308958"/>
+            <a:ext cx="8890000" cy="240042"/>
           </a:xfrm>
           <a:prstGeom prst="rect">
             <a:avLst/>
@@ -40015,8 +40015,8 @@
         </p:nvSpPr>
         <p:spPr>
           <a:xfrm>
-            <a:off x="18073751" y="10345801"/>
-            <a:ext cx="1270000" cy="203200"/>
+            <a:off x="18073751" y="10308958"/>
+            <a:ext cx="1270000" cy="240042"/>
           </a:xfrm>
           <a:prstGeom prst="rect">
             <a:avLst/>
@@ -40158,7 +40158,7 @@
         </p:nvSpPr>
         <p:spPr>
           <a:xfrm>
-            <a:off x="762000" y="4182848"/>
+            <a:off x="762000" y="4164427"/>
             <a:ext cx="9036875" cy="4258457"/>
           </a:xfrm>
           <a:prstGeom prst="roundRect">
@@ -40274,7 +40274,7 @@
         </p:nvSpPr>
         <p:spPr>
           <a:xfrm>
-            <a:off x="10306875" y="4182848"/>
+            <a:off x="10306875" y="4164427"/>
             <a:ext cx="9036875" cy="4258457"/>
           </a:xfrm>
           <a:prstGeom prst="roundRect">
@@ -40390,8 +40390,8 @@
         </p:nvSpPr>
         <p:spPr>
           <a:xfrm>
-            <a:off x="762000" y="10345801"/>
-            <a:ext cx="8890000" cy="203200"/>
+            <a:off x="762000" y="10308958"/>
+            <a:ext cx="8890000" cy="240042"/>
           </a:xfrm>
           <a:prstGeom prst="rect">
             <a:avLst/>
@@ -40429,8 +40429,8 @@
         </p:nvSpPr>
         <p:spPr>
           <a:xfrm>
-            <a:off x="18073751" y="10345801"/>
-            <a:ext cx="1270000" cy="203200"/>
+            <a:off x="18073751" y="10308958"/>
+            <a:ext cx="1270000" cy="240042"/>
           </a:xfrm>
           <a:prstGeom prst="rect">
             <a:avLst/>
@@ -40572,7 +40572,7 @@
         </p:nvSpPr>
         <p:spPr>
           <a:xfrm>
-            <a:off x="762000" y="4659585"/>
+            <a:off x="762000" y="4641164"/>
             <a:ext cx="9036875" cy="3304983"/>
           </a:xfrm>
           <a:prstGeom prst="roundRect">
@@ -40669,7 +40669,7 @@
         </p:nvSpPr>
         <p:spPr>
           <a:xfrm>
-            <a:off x="10306875" y="4659585"/>
+            <a:off x="10306875" y="4641164"/>
             <a:ext cx="9036875" cy="3304983"/>
           </a:xfrm>
           <a:prstGeom prst="roundRect">
@@ -40766,8 +40766,8 @@
         </p:nvSpPr>
         <p:spPr>
           <a:xfrm>
-            <a:off x="762000" y="10345801"/>
-            <a:ext cx="8890000" cy="203200"/>
+            <a:off x="762000" y="10308958"/>
+            <a:ext cx="8890000" cy="240042"/>
           </a:xfrm>
           <a:prstGeom prst="rect">
             <a:avLst/>
@@ -40805,8 +40805,8 @@
         </p:nvSpPr>
         <p:spPr>
           <a:xfrm>
-            <a:off x="18073751" y="10345801"/>
-            <a:ext cx="1270000" cy="203200"/>
+            <a:off x="18073751" y="10308958"/>
+            <a:ext cx="1270000" cy="240042"/>
           </a:xfrm>
           <a:prstGeom prst="rect">
             <a:avLst/>
@@ -40948,8 +40948,8 @@
         </p:nvSpPr>
         <p:spPr>
           <a:xfrm>
-            <a:off x="12386341" y="1524000"/>
-            <a:ext cx="6957409" cy="3914067"/>
+            <a:off x="12451829" y="1524000"/>
+            <a:ext cx="6891921" cy="3877225"/>
           </a:xfrm>
           <a:prstGeom prst="rect">
             <a:avLst/>
@@ -40994,8 +40994,8 @@
         </p:nvSpPr>
         <p:spPr>
           <a:xfrm>
-            <a:off x="12650024" y="1787683"/>
-            <a:ext cx="6430043" cy="3386701"/>
+            <a:off x="12713030" y="1785201"/>
+            <a:ext cx="6369519" cy="3354823"/>
           </a:xfrm>
           <a:prstGeom prst="rect">
             <a:avLst/>
@@ -41038,8 +41038,8 @@
         </p:nvSpPr>
         <p:spPr>
           <a:xfrm>
-            <a:off x="12650024" y="5174384"/>
-            <a:ext cx="87894" cy="87894"/>
+            <a:off x="12713030" y="5140024"/>
+            <a:ext cx="87067" cy="87067"/>
           </a:xfrm>
           <a:prstGeom prst="rect">
             <a:avLst/>
@@ -41082,8 +41082,8 @@
         </p:nvSpPr>
         <p:spPr>
           <a:xfrm>
-            <a:off x="12825812" y="5174384"/>
-            <a:ext cx="87894" cy="87894"/>
+            <a:off x="12887164" y="5140024"/>
+            <a:ext cx="87067" cy="87067"/>
           </a:xfrm>
           <a:prstGeom prst="rect">
             <a:avLst/>
@@ -41126,8 +41126,8 @@
         </p:nvSpPr>
         <p:spPr>
           <a:xfrm>
-            <a:off x="13001601" y="5174384"/>
-            <a:ext cx="87894" cy="87894"/>
+            <a:off x="13061298" y="5140024"/>
+            <a:ext cx="87067" cy="87067"/>
           </a:xfrm>
           <a:prstGeom prst="rect">
             <a:avLst/>
@@ -41170,8 +41170,8 @@
         </p:nvSpPr>
         <p:spPr>
           <a:xfrm>
-            <a:off x="13177390" y="5174384"/>
-            <a:ext cx="87894" cy="87894"/>
+            <a:off x="13235432" y="5140024"/>
+            <a:ext cx="87067" cy="87067"/>
           </a:xfrm>
           <a:prstGeom prst="rect">
             <a:avLst/>
@@ -41214,8 +41214,8 @@
         </p:nvSpPr>
         <p:spPr>
           <a:xfrm>
-            <a:off x="13353179" y="5174384"/>
-            <a:ext cx="87894" cy="87894"/>
+            <a:off x="13409566" y="5140024"/>
+            <a:ext cx="87067" cy="87067"/>
           </a:xfrm>
           <a:prstGeom prst="rect">
             <a:avLst/>
@@ -41258,8 +41258,8 @@
         </p:nvSpPr>
         <p:spPr>
           <a:xfrm>
-            <a:off x="13528967" y="5174384"/>
-            <a:ext cx="87894" cy="87894"/>
+            <a:off x="13583700" y="5140024"/>
+            <a:ext cx="87067" cy="87067"/>
           </a:xfrm>
           <a:prstGeom prst="rect">
             <a:avLst/>
@@ -41302,8 +41302,8 @@
         </p:nvSpPr>
         <p:spPr>
           <a:xfrm>
-            <a:off x="13704756" y="5174384"/>
-            <a:ext cx="87894" cy="87894"/>
+            <a:off x="13757835" y="5140024"/>
+            <a:ext cx="87067" cy="87067"/>
           </a:xfrm>
           <a:prstGeom prst="rect">
             <a:avLst/>
@@ -41346,8 +41346,8 @@
         </p:nvSpPr>
         <p:spPr>
           <a:xfrm>
-            <a:off x="13880545" y="5174384"/>
-            <a:ext cx="87894" cy="87894"/>
+            <a:off x="13931969" y="5140024"/>
+            <a:ext cx="87067" cy="87067"/>
           </a:xfrm>
           <a:prstGeom prst="rect">
             <a:avLst/>
@@ -41390,8 +41390,8 @@
         </p:nvSpPr>
         <p:spPr>
           <a:xfrm>
-            <a:off x="12386341" y="6200067"/>
-            <a:ext cx="6957409" cy="184647"/>
+            <a:off x="12451829" y="6163225"/>
+            <a:ext cx="6891921" cy="184647"/>
           </a:xfrm>
           <a:prstGeom prst="rect">
             <a:avLst/>
@@ -41429,8 +41429,8 @@
         </p:nvSpPr>
         <p:spPr>
           <a:xfrm>
-            <a:off x="12386341" y="6589241"/>
-            <a:ext cx="6957409" cy="400070"/>
+            <a:off x="12451829" y="6552399"/>
+            <a:ext cx="6891921" cy="400070"/>
           </a:xfrm>
           <a:prstGeom prst="rect">
             <a:avLst/>
@@ -41468,8 +41468,8 @@
         </p:nvSpPr>
         <p:spPr>
           <a:xfrm>
-            <a:off x="12386341" y="7390119"/>
-            <a:ext cx="6957409" cy="184647"/>
+            <a:off x="12451829" y="7353276"/>
+            <a:ext cx="6891921" cy="184647"/>
           </a:xfrm>
           <a:prstGeom prst="rect">
             <a:avLst/>
@@ -41507,8 +41507,8 @@
         </p:nvSpPr>
         <p:spPr>
           <a:xfrm>
-            <a:off x="12386341" y="7779293"/>
-            <a:ext cx="6957409" cy="400070"/>
+            <a:off x="12451829" y="7742450"/>
+            <a:ext cx="6891921" cy="400070"/>
           </a:xfrm>
           <a:prstGeom prst="rect">
             <a:avLst/>
@@ -41546,8 +41546,8 @@
         </p:nvSpPr>
         <p:spPr>
           <a:xfrm>
-            <a:off x="12386341" y="8580170"/>
-            <a:ext cx="6957409" cy="184647"/>
+            <a:off x="12451829" y="8543328"/>
+            <a:ext cx="6891921" cy="184647"/>
           </a:xfrm>
           <a:prstGeom prst="rect">
             <a:avLst/>
@@ -41585,8 +41585,8 @@
         </p:nvSpPr>
         <p:spPr>
           <a:xfrm>
-            <a:off x="12386341" y="8969344"/>
-            <a:ext cx="6957409" cy="400070"/>
+            <a:off x="12451829" y="8932502"/>
+            <a:ext cx="6891921" cy="400070"/>
           </a:xfrm>
           <a:prstGeom prst="rect">
             <a:avLst/>
@@ -41624,8 +41624,8 @@
         </p:nvSpPr>
         <p:spPr>
           <a:xfrm>
-            <a:off x="762000" y="10345801"/>
-            <a:ext cx="8890000" cy="203200"/>
+            <a:off x="762000" y="10308958"/>
+            <a:ext cx="8890000" cy="240042"/>
           </a:xfrm>
           <a:prstGeom prst="rect">
             <a:avLst/>
@@ -41663,8 +41663,8 @@
         </p:nvSpPr>
         <p:spPr>
           <a:xfrm>
-            <a:off x="18073751" y="10345801"/>
-            <a:ext cx="1270000" cy="203200"/>
+            <a:off x="18073751" y="10308958"/>
+            <a:ext cx="1270000" cy="240042"/>
           </a:xfrm>
           <a:prstGeom prst="rect">
             <a:avLst/>
@@ -42052,8 +42052,8 @@
         </p:nvSpPr>
         <p:spPr>
           <a:xfrm>
-            <a:off x="762000" y="10345801"/>
-            <a:ext cx="8890000" cy="203200"/>
+            <a:off x="762000" y="10308958"/>
+            <a:ext cx="8890000" cy="240042"/>
           </a:xfrm>
           <a:prstGeom prst="rect">
             <a:avLst/>
@@ -42091,8 +42091,8 @@
         </p:nvSpPr>
         <p:spPr>
           <a:xfrm>
-            <a:off x="18073751" y="10345801"/>
-            <a:ext cx="1270000" cy="203200"/>
+            <a:off x="18073751" y="10308958"/>
+            <a:ext cx="1270000" cy="240042"/>
           </a:xfrm>
           <a:prstGeom prst="rect">
             <a:avLst/>
@@ -42336,7 +42336,7 @@
         </p:nvSpPr>
         <p:spPr>
           <a:xfrm>
-            <a:off x="762000" y="2171194"/>
+            <a:off x="762000" y="2152773"/>
             <a:ext cx="13809313" cy="3846829"/>
           </a:xfrm>
           <a:prstGeom prst="rect">
@@ -42375,7 +42375,7 @@
         </p:nvSpPr>
         <p:spPr>
           <a:xfrm>
-            <a:off x="762000" y="5495322"/>
+            <a:off x="762000" y="5476901"/>
             <a:ext cx="13809313" cy="1107887"/>
           </a:xfrm>
           <a:prstGeom prst="rect">
@@ -42414,7 +42414,7 @@
         </p:nvSpPr>
         <p:spPr>
           <a:xfrm>
-            <a:off x="762000" y="6814366"/>
+            <a:off x="762000" y="6795945"/>
             <a:ext cx="9036875" cy="1360239"/>
           </a:xfrm>
           <a:prstGeom prst="rect">
@@ -42453,8 +42453,8 @@
         </p:nvSpPr>
         <p:spPr>
           <a:xfrm>
-            <a:off x="762000" y="10345801"/>
-            <a:ext cx="8890000" cy="203200"/>
+            <a:off x="762000" y="10308958"/>
+            <a:ext cx="8890000" cy="240042"/>
           </a:xfrm>
           <a:prstGeom prst="rect">
             <a:avLst/>
@@ -42492,8 +42492,8 @@
         </p:nvSpPr>
         <p:spPr>
           <a:xfrm>
-            <a:off x="18073751" y="10345801"/>
-            <a:ext cx="1270000" cy="203200"/>
+            <a:off x="18073751" y="10308958"/>
+            <a:ext cx="1270000" cy="240042"/>
           </a:xfrm>
           <a:prstGeom prst="rect">
             <a:avLst/>
@@ -42635,7 +42635,7 @@
         </p:nvSpPr>
         <p:spPr>
           <a:xfrm>
-            <a:off x="762000" y="3706111"/>
+            <a:off x="762000" y="3687690"/>
             <a:ext cx="9036875" cy="5211931"/>
           </a:xfrm>
           <a:prstGeom prst="roundRect">
@@ -42770,7 +42770,7 @@
         </p:nvSpPr>
         <p:spPr>
           <a:xfrm>
-            <a:off x="10306875" y="3706111"/>
+            <a:off x="10306875" y="3687690"/>
             <a:ext cx="9036875" cy="5211931"/>
           </a:xfrm>
           <a:prstGeom prst="roundRect">
@@ -42905,8 +42905,8 @@
         </p:nvSpPr>
         <p:spPr>
           <a:xfrm>
-            <a:off x="762000" y="10345801"/>
-            <a:ext cx="8890000" cy="203200"/>
+            <a:off x="762000" y="10308958"/>
+            <a:ext cx="8890000" cy="240042"/>
           </a:xfrm>
           <a:prstGeom prst="rect">
             <a:avLst/>
@@ -42944,8 +42944,8 @@
         </p:nvSpPr>
         <p:spPr>
           <a:xfrm>
-            <a:off x="18073751" y="10345801"/>
-            <a:ext cx="1270000" cy="203200"/>
+            <a:off x="18073751" y="10308958"/>
+            <a:ext cx="1270000" cy="240042"/>
           </a:xfrm>
           <a:prstGeom prst="rect">
             <a:avLst/>
@@ -43087,7 +43087,7 @@
         </p:nvSpPr>
         <p:spPr>
           <a:xfrm>
-            <a:off x="762000" y="6185202"/>
+            <a:off x="762000" y="6166781"/>
             <a:ext cx="9036875" cy="184647"/>
           </a:xfrm>
           <a:prstGeom prst="rect">
@@ -43126,7 +43126,7 @@
         </p:nvSpPr>
         <p:spPr>
           <a:xfrm>
-            <a:off x="762000" y="6574376"/>
+            <a:off x="762000" y="6555955"/>
             <a:ext cx="9036875" cy="430844"/>
           </a:xfrm>
           <a:prstGeom prst="rect">
@@ -43165,7 +43165,7 @@
         </p:nvSpPr>
         <p:spPr>
           <a:xfrm>
-            <a:off x="762000" y="7513221"/>
+            <a:off x="762000" y="7494800"/>
             <a:ext cx="9036875" cy="184647"/>
           </a:xfrm>
           <a:prstGeom prst="rect">
@@ -43204,7 +43204,7 @@
         </p:nvSpPr>
         <p:spPr>
           <a:xfrm>
-            <a:off x="762000" y="7902395"/>
+            <a:off x="762000" y="7883974"/>
             <a:ext cx="9036875" cy="430844"/>
           </a:xfrm>
           <a:prstGeom prst="rect">
@@ -43243,7 +43243,7 @@
         </p:nvSpPr>
         <p:spPr>
           <a:xfrm>
-            <a:off x="10306875" y="6185202"/>
+            <a:off x="10306875" y="6166781"/>
             <a:ext cx="9036875" cy="184647"/>
           </a:xfrm>
           <a:prstGeom prst="rect">
@@ -43282,7 +43282,7 @@
         </p:nvSpPr>
         <p:spPr>
           <a:xfrm>
-            <a:off x="10306875" y="6574376"/>
+            <a:off x="10306875" y="6555955"/>
             <a:ext cx="9036875" cy="430844"/>
           </a:xfrm>
           <a:prstGeom prst="rect">
@@ -43321,7 +43321,7 @@
         </p:nvSpPr>
         <p:spPr>
           <a:xfrm>
-            <a:off x="10306875" y="7513221"/>
+            <a:off x="10306875" y="7494800"/>
             <a:ext cx="9036875" cy="184647"/>
           </a:xfrm>
           <a:prstGeom prst="rect">
@@ -43360,7 +43360,7 @@
         </p:nvSpPr>
         <p:spPr>
           <a:xfrm>
-            <a:off x="10306875" y="7902395"/>
+            <a:off x="10306875" y="7883974"/>
             <a:ext cx="9036875" cy="430844"/>
           </a:xfrm>
           <a:prstGeom prst="rect">
@@ -43399,8 +43399,8 @@
         </p:nvSpPr>
         <p:spPr>
           <a:xfrm>
-            <a:off x="762000" y="10345801"/>
-            <a:ext cx="8890000" cy="203200"/>
+            <a:off x="762000" y="10308958"/>
+            <a:ext cx="8890000" cy="240042"/>
           </a:xfrm>
           <a:prstGeom prst="rect">
             <a:avLst/>
@@ -43438,8 +43438,8 @@
         </p:nvSpPr>
         <p:spPr>
           <a:xfrm>
-            <a:off x="18073751" y="10345801"/>
-            <a:ext cx="1270000" cy="203200"/>
+            <a:off x="18073751" y="10308958"/>
+            <a:ext cx="1270000" cy="240042"/>
           </a:xfrm>
           <a:prstGeom prst="rect">
             <a:avLst/>
@@ -43581,7 +43581,7 @@
         </p:nvSpPr>
         <p:spPr>
           <a:xfrm>
-            <a:off x="762000" y="3847003"/>
+            <a:off x="762000" y="3828582"/>
             <a:ext cx="4264437" cy="830915"/>
           </a:xfrm>
           <a:prstGeom prst="rect">
@@ -43620,7 +43620,7 @@
         </p:nvSpPr>
         <p:spPr>
           <a:xfrm>
-            <a:off x="762000" y="4709287"/>
+            <a:off x="762000" y="4690866"/>
             <a:ext cx="4264437" cy="430844"/>
           </a:xfrm>
           <a:prstGeom prst="rect">
@@ -43659,7 +43659,7 @@
         </p:nvSpPr>
         <p:spPr>
           <a:xfrm>
-            <a:off x="762000" y="5278693"/>
+            <a:off x="762000" y="5260272"/>
             <a:ext cx="4264437" cy="400070"/>
           </a:xfrm>
           <a:prstGeom prst="rect">
@@ -43698,7 +43698,7 @@
         </p:nvSpPr>
         <p:spPr>
           <a:xfrm>
-            <a:off x="5534437" y="3847003"/>
+            <a:off x="5534437" y="3828582"/>
             <a:ext cx="4264437" cy="830915"/>
           </a:xfrm>
           <a:prstGeom prst="rect">
@@ -43737,7 +43737,7 @@
         </p:nvSpPr>
         <p:spPr>
           <a:xfrm>
-            <a:off x="5534437" y="4709287"/>
+            <a:off x="5534437" y="4690866"/>
             <a:ext cx="4264437" cy="430844"/>
           </a:xfrm>
           <a:prstGeom prst="rect">
@@ -43776,7 +43776,7 @@
         </p:nvSpPr>
         <p:spPr>
           <a:xfrm>
-            <a:off x="5534437" y="5278693"/>
+            <a:off x="5534437" y="5260272"/>
             <a:ext cx="4264437" cy="400070"/>
           </a:xfrm>
           <a:prstGeom prst="rect">
@@ -43815,7 +43815,7 @@
         </p:nvSpPr>
         <p:spPr>
           <a:xfrm>
-            <a:off x="10306875" y="3847003"/>
+            <a:off x="10306875" y="3828582"/>
             <a:ext cx="4264437" cy="830915"/>
           </a:xfrm>
           <a:prstGeom prst="rect">
@@ -43854,7 +43854,7 @@
         </p:nvSpPr>
         <p:spPr>
           <a:xfrm>
-            <a:off x="10306875" y="4709287"/>
+            <a:off x="10306875" y="4690866"/>
             <a:ext cx="4264437" cy="430844"/>
           </a:xfrm>
           <a:prstGeom prst="rect">
@@ -43893,7 +43893,7 @@
         </p:nvSpPr>
         <p:spPr>
           <a:xfrm>
-            <a:off x="10306875" y="5278693"/>
+            <a:off x="10306875" y="5260272"/>
             <a:ext cx="4264437" cy="400070"/>
           </a:xfrm>
           <a:prstGeom prst="rect">
@@ -43932,7 +43932,7 @@
         </p:nvSpPr>
         <p:spPr>
           <a:xfrm>
-            <a:off x="762000" y="6945390"/>
+            <a:off x="762000" y="6926969"/>
             <a:ext cx="4264437" cy="830915"/>
           </a:xfrm>
           <a:prstGeom prst="rect">
@@ -43971,7 +43971,7 @@
         </p:nvSpPr>
         <p:spPr>
           <a:xfrm>
-            <a:off x="762000" y="7807674"/>
+            <a:off x="762000" y="7789253"/>
             <a:ext cx="4264437" cy="430844"/>
           </a:xfrm>
           <a:prstGeom prst="rect">
@@ -44010,7 +44010,7 @@
         </p:nvSpPr>
         <p:spPr>
           <a:xfrm>
-            <a:off x="762000" y="8377080"/>
+            <a:off x="762000" y="8358659"/>
             <a:ext cx="4264437" cy="400070"/>
           </a:xfrm>
           <a:prstGeom prst="rect">
@@ -44049,7 +44049,7 @@
         </p:nvSpPr>
         <p:spPr>
           <a:xfrm>
-            <a:off x="5534437" y="6945390"/>
+            <a:off x="5534437" y="6926969"/>
             <a:ext cx="4264437" cy="830915"/>
           </a:xfrm>
           <a:prstGeom prst="rect">
@@ -44088,7 +44088,7 @@
         </p:nvSpPr>
         <p:spPr>
           <a:xfrm>
-            <a:off x="5534437" y="7807674"/>
+            <a:off x="5534437" y="7789253"/>
             <a:ext cx="4264437" cy="430844"/>
           </a:xfrm>
           <a:prstGeom prst="rect">
@@ -44127,7 +44127,7 @@
         </p:nvSpPr>
         <p:spPr>
           <a:xfrm>
-            <a:off x="5534437" y="8377080"/>
+            <a:off x="5534437" y="8358659"/>
             <a:ext cx="4264437" cy="400070"/>
           </a:xfrm>
           <a:prstGeom prst="rect">
@@ -44166,7 +44166,7 @@
         </p:nvSpPr>
         <p:spPr>
           <a:xfrm>
-            <a:off x="10306875" y="6945390"/>
+            <a:off x="10306875" y="6926969"/>
             <a:ext cx="4264437" cy="830915"/>
           </a:xfrm>
           <a:prstGeom prst="rect">
@@ -44205,7 +44205,7 @@
         </p:nvSpPr>
         <p:spPr>
           <a:xfrm>
-            <a:off x="10306875" y="7807674"/>
+            <a:off x="10306875" y="7789253"/>
             <a:ext cx="4264437" cy="430844"/>
           </a:xfrm>
           <a:prstGeom prst="rect">
@@ -44244,7 +44244,7 @@
         </p:nvSpPr>
         <p:spPr>
           <a:xfrm>
-            <a:off x="10306875" y="8377080"/>
+            <a:off x="10306875" y="8358659"/>
             <a:ext cx="4264437" cy="400070"/>
           </a:xfrm>
           <a:prstGeom prst="rect">
@@ -44283,8 +44283,8 @@
         </p:nvSpPr>
         <p:spPr>
           <a:xfrm>
-            <a:off x="762000" y="10345801"/>
-            <a:ext cx="8890000" cy="203200"/>
+            <a:off x="762000" y="10308958"/>
+            <a:ext cx="8890000" cy="240042"/>
           </a:xfrm>
           <a:prstGeom prst="rect">
             <a:avLst/>
@@ -44322,8 +44322,8 @@
         </p:nvSpPr>
         <p:spPr>
           <a:xfrm>
-            <a:off x="18073751" y="10345801"/>
-            <a:ext cx="1270000" cy="203200"/>
+            <a:off x="18073751" y="10308958"/>
+            <a:ext cx="1270000" cy="240042"/>
           </a:xfrm>
           <a:prstGeom prst="rect">
             <a:avLst/>
@@ -44465,7 +44465,7 @@
         </p:nvSpPr>
         <p:spPr>
           <a:xfrm>
-            <a:off x="762000" y="5181133"/>
+            <a:off x="762000" y="5162712"/>
             <a:ext cx="9036875" cy="184647"/>
           </a:xfrm>
           <a:prstGeom prst="rect">
@@ -44504,7 +44504,7 @@
         </p:nvSpPr>
         <p:spPr>
           <a:xfrm>
-            <a:off x="762000" y="5570307"/>
+            <a:off x="762000" y="5551886"/>
             <a:ext cx="9036875" cy="430844"/>
           </a:xfrm>
           <a:prstGeom prst="rect">
@@ -44543,7 +44543,7 @@
         </p:nvSpPr>
         <p:spPr>
           <a:xfrm>
-            <a:off x="762000" y="6509152"/>
+            <a:off x="762000" y="6490731"/>
             <a:ext cx="9036875" cy="184647"/>
           </a:xfrm>
           <a:prstGeom prst="rect">
@@ -44582,7 +44582,7 @@
         </p:nvSpPr>
         <p:spPr>
           <a:xfrm>
-            <a:off x="762000" y="6898326"/>
+            <a:off x="762000" y="6879905"/>
             <a:ext cx="9036875" cy="430844"/>
           </a:xfrm>
           <a:prstGeom prst="rect">
@@ -44621,7 +44621,7 @@
         </p:nvSpPr>
         <p:spPr>
           <a:xfrm>
-            <a:off x="762000" y="7837171"/>
+            <a:off x="762000" y="7818750"/>
             <a:ext cx="9036875" cy="184647"/>
           </a:xfrm>
           <a:prstGeom prst="rect">
@@ -44660,7 +44660,7 @@
         </p:nvSpPr>
         <p:spPr>
           <a:xfrm>
-            <a:off x="762000" y="8226345"/>
+            <a:off x="762000" y="8207924"/>
             <a:ext cx="9036875" cy="430844"/>
           </a:xfrm>
           <a:prstGeom prst="rect">
@@ -44699,7 +44699,7 @@
         </p:nvSpPr>
         <p:spPr>
           <a:xfrm>
-            <a:off x="10306875" y="5181133"/>
+            <a:off x="10306875" y="5162712"/>
             <a:ext cx="9036875" cy="184647"/>
           </a:xfrm>
           <a:prstGeom prst="rect">
@@ -44738,7 +44738,7 @@
         </p:nvSpPr>
         <p:spPr>
           <a:xfrm>
-            <a:off x="10306875" y="5570307"/>
+            <a:off x="10306875" y="5551886"/>
             <a:ext cx="9036875" cy="430844"/>
           </a:xfrm>
           <a:prstGeom prst="rect">
@@ -44777,7 +44777,7 @@
         </p:nvSpPr>
         <p:spPr>
           <a:xfrm>
-            <a:off x="10306875" y="6509152"/>
+            <a:off x="10306875" y="6490731"/>
             <a:ext cx="9036875" cy="184647"/>
           </a:xfrm>
           <a:prstGeom prst="rect">
@@ -44816,7 +44816,7 @@
         </p:nvSpPr>
         <p:spPr>
           <a:xfrm>
-            <a:off x="10306875" y="6898326"/>
+            <a:off x="10306875" y="6879905"/>
             <a:ext cx="9036875" cy="430844"/>
           </a:xfrm>
           <a:prstGeom prst="rect">
@@ -44855,7 +44855,7 @@
         </p:nvSpPr>
         <p:spPr>
           <a:xfrm>
-            <a:off x="10306875" y="7837171"/>
+            <a:off x="10306875" y="7818750"/>
             <a:ext cx="9036875" cy="184647"/>
           </a:xfrm>
           <a:prstGeom prst="rect">
@@ -44894,7 +44894,7 @@
         </p:nvSpPr>
         <p:spPr>
           <a:xfrm>
-            <a:off x="10306875" y="8226345"/>
+            <a:off x="10306875" y="8207924"/>
             <a:ext cx="9036875" cy="430844"/>
           </a:xfrm>
           <a:prstGeom prst="rect">
@@ -44933,8 +44933,8 @@
         </p:nvSpPr>
         <p:spPr>
           <a:xfrm>
-            <a:off x="762000" y="10345801"/>
-            <a:ext cx="8890000" cy="203200"/>
+            <a:off x="762000" y="10308958"/>
+            <a:ext cx="8890000" cy="240042"/>
           </a:xfrm>
           <a:prstGeom prst="rect">
             <a:avLst/>
@@ -44972,8 +44972,8 @@
         </p:nvSpPr>
         <p:spPr>
           <a:xfrm>
-            <a:off x="18073751" y="10345801"/>
-            <a:ext cx="1270000" cy="203200"/>
+            <a:off x="18073751" y="10308958"/>
+            <a:ext cx="1270000" cy="240042"/>
           </a:xfrm>
           <a:prstGeom prst="rect">
             <a:avLst/>
@@ -45037,7 +45037,7 @@
         </p:nvSpPr>
         <p:spPr>
           <a:xfrm>
-            <a:off x="762000" y="2511254"/>
+            <a:off x="762000" y="2492833"/>
             <a:ext cx="13809313" cy="3846829"/>
           </a:xfrm>
           <a:prstGeom prst="rect">
@@ -45076,7 +45076,7 @@
         </p:nvSpPr>
         <p:spPr>
           <a:xfrm>
-            <a:off x="762000" y="5835382"/>
+            <a:off x="762000" y="5816960"/>
             <a:ext cx="13809313" cy="1107887"/>
           </a:xfrm>
           <a:prstGeom prst="rect">
@@ -45115,7 +45115,7 @@
         </p:nvSpPr>
         <p:spPr>
           <a:xfrm>
-            <a:off x="762000" y="7154426"/>
+            <a:off x="762000" y="7136005"/>
             <a:ext cx="9036875" cy="680119"/>
           </a:xfrm>
           <a:prstGeom prst="rect">
@@ -45154,8 +45154,8 @@
         </p:nvSpPr>
         <p:spPr>
           <a:xfrm>
-            <a:off x="762000" y="10345801"/>
-            <a:ext cx="8890000" cy="203200"/>
+            <a:off x="762000" y="10308958"/>
+            <a:ext cx="8890000" cy="240042"/>
           </a:xfrm>
           <a:prstGeom prst="rect">
             <a:avLst/>
@@ -45193,8 +45193,8 @@
         </p:nvSpPr>
         <p:spPr>
           <a:xfrm>
-            <a:off x="18073751" y="10345801"/>
-            <a:ext cx="1270000" cy="203200"/>
+            <a:off x="18073751" y="10308958"/>
+            <a:ext cx="1270000" cy="240042"/>
           </a:xfrm>
           <a:prstGeom prst="rect">
             <a:avLst/>
@@ -45336,7 +45336,7 @@
         </p:nvSpPr>
         <p:spPr>
           <a:xfrm>
-            <a:off x="762000" y="4897859"/>
+            <a:off x="762000" y="4879438"/>
             <a:ext cx="5855250" cy="2786171"/>
           </a:xfrm>
           <a:prstGeom prst="roundRect">
@@ -45414,7 +45414,7 @@
         </p:nvSpPr>
         <p:spPr>
           <a:xfrm>
-            <a:off x="7125250" y="4897859"/>
+            <a:off x="7125250" y="4879438"/>
             <a:ext cx="5855250" cy="2786171"/>
           </a:xfrm>
           <a:prstGeom prst="roundRect">
@@ -45492,7 +45492,7 @@
         </p:nvSpPr>
         <p:spPr>
           <a:xfrm>
-            <a:off x="13488500" y="4897859"/>
+            <a:off x="13488500" y="4879438"/>
             <a:ext cx="5855250" cy="2786171"/>
           </a:xfrm>
           <a:prstGeom prst="roundRect">
@@ -45570,8 +45570,8 @@
         </p:nvSpPr>
         <p:spPr>
           <a:xfrm>
-            <a:off x="762000" y="10345801"/>
-            <a:ext cx="8890000" cy="203200"/>
+            <a:off x="762000" y="10308958"/>
+            <a:ext cx="8890000" cy="240042"/>
           </a:xfrm>
           <a:prstGeom prst="rect">
             <a:avLst/>
@@ -45609,8 +45609,8 @@
         </p:nvSpPr>
         <p:spPr>
           <a:xfrm>
-            <a:off x="18073751" y="10345801"/>
-            <a:ext cx="1270000" cy="203200"/>
+            <a:off x="18073751" y="10308958"/>
+            <a:ext cx="1270000" cy="240042"/>
           </a:xfrm>
           <a:prstGeom prst="rect">
             <a:avLst/>
@@ -45972,8 +45972,8 @@
         </p:nvSpPr>
         <p:spPr>
           <a:xfrm>
-            <a:off x="762000" y="10345801"/>
-            <a:ext cx="8890000" cy="203200"/>
+            <a:off x="762000" y="10308958"/>
+            <a:ext cx="8890000" cy="240042"/>
           </a:xfrm>
           <a:prstGeom prst="rect">
             <a:avLst/>
@@ -46011,8 +46011,8 @@
         </p:nvSpPr>
         <p:spPr>
           <a:xfrm>
-            <a:off x="18073751" y="10345801"/>
-            <a:ext cx="1270000" cy="203200"/>
+            <a:off x="18073751" y="10308958"/>
+            <a:ext cx="1270000" cy="240042"/>
           </a:xfrm>
           <a:prstGeom prst="rect">
             <a:avLst/>
@@ -46076,7 +46076,7 @@
         </p:nvSpPr>
         <p:spPr>
           <a:xfrm>
-            <a:off x="762000" y="2511254"/>
+            <a:off x="762000" y="2492833"/>
             <a:ext cx="13809313" cy="3846829"/>
           </a:xfrm>
           <a:prstGeom prst="rect">
@@ -46115,7 +46115,7 @@
         </p:nvSpPr>
         <p:spPr>
           <a:xfrm>
-            <a:off x="762000" y="5835382"/>
+            <a:off x="762000" y="5816960"/>
             <a:ext cx="13809313" cy="1107887"/>
           </a:xfrm>
           <a:prstGeom prst="rect">
@@ -46154,7 +46154,7 @@
         </p:nvSpPr>
         <p:spPr>
           <a:xfrm>
-            <a:off x="762000" y="7154426"/>
+            <a:off x="762000" y="7136005"/>
             <a:ext cx="9036875" cy="680119"/>
           </a:xfrm>
           <a:prstGeom prst="rect">
@@ -46193,8 +46193,8 @@
         </p:nvSpPr>
         <p:spPr>
           <a:xfrm>
-            <a:off x="762000" y="10345801"/>
-            <a:ext cx="8890000" cy="203200"/>
+            <a:off x="762000" y="10308958"/>
+            <a:ext cx="8890000" cy="240042"/>
           </a:xfrm>
           <a:prstGeom prst="rect">
             <a:avLst/>
@@ -46232,8 +46232,8 @@
         </p:nvSpPr>
         <p:spPr>
           <a:xfrm>
-            <a:off x="18073751" y="10345801"/>
-            <a:ext cx="1270000" cy="203200"/>
+            <a:off x="18073751" y="10308958"/>
+            <a:ext cx="1270000" cy="240042"/>
           </a:xfrm>
           <a:prstGeom prst="rect">
             <a:avLst/>
@@ -46375,7 +46375,7 @@
         </p:nvSpPr>
         <p:spPr>
           <a:xfrm>
-            <a:off x="762000" y="3703420"/>
+            <a:off x="762000" y="3684999"/>
             <a:ext cx="4264437" cy="2354657"/>
           </a:xfrm>
           <a:prstGeom prst="roundRect">
@@ -46472,7 +46472,7 @@
         </p:nvSpPr>
         <p:spPr>
           <a:xfrm>
-            <a:off x="5534437" y="3703420"/>
+            <a:off x="5534437" y="3684999"/>
             <a:ext cx="4264437" cy="2354657"/>
           </a:xfrm>
           <a:prstGeom prst="roundRect">
@@ -46569,7 +46569,7 @@
         </p:nvSpPr>
         <p:spPr>
           <a:xfrm>
-            <a:off x="10306875" y="3703420"/>
+            <a:off x="10306875" y="3684999"/>
             <a:ext cx="4264437" cy="2354657"/>
           </a:xfrm>
           <a:prstGeom prst="roundRect">
@@ -46666,7 +46666,7 @@
         </p:nvSpPr>
         <p:spPr>
           <a:xfrm>
-            <a:off x="15079313" y="3703420"/>
+            <a:off x="15079313" y="3684999"/>
             <a:ext cx="4264437" cy="2354657"/>
           </a:xfrm>
           <a:prstGeom prst="roundRect">
@@ -46763,7 +46763,7 @@
         </p:nvSpPr>
         <p:spPr>
           <a:xfrm>
-            <a:off x="762000" y="6566077"/>
+            <a:off x="762000" y="6547656"/>
             <a:ext cx="4264437" cy="2354657"/>
           </a:xfrm>
           <a:prstGeom prst="roundRect">
@@ -46860,7 +46860,7 @@
         </p:nvSpPr>
         <p:spPr>
           <a:xfrm>
-            <a:off x="5534437" y="6566077"/>
+            <a:off x="5534437" y="6547656"/>
             <a:ext cx="4264437" cy="2354657"/>
           </a:xfrm>
           <a:prstGeom prst="roundRect">
@@ -46957,7 +46957,7 @@
         </p:nvSpPr>
         <p:spPr>
           <a:xfrm>
-            <a:off x="10306875" y="6566077"/>
+            <a:off x="10306875" y="6547656"/>
             <a:ext cx="4264437" cy="2354657"/>
           </a:xfrm>
           <a:prstGeom prst="roundRect">
@@ -47054,7 +47054,7 @@
         </p:nvSpPr>
         <p:spPr>
           <a:xfrm>
-            <a:off x="15079313" y="6566077"/>
+            <a:off x="15079313" y="6547656"/>
             <a:ext cx="4264437" cy="2354657"/>
           </a:xfrm>
           <a:prstGeom prst="roundRect">
@@ -47151,8 +47151,8 @@
         </p:nvSpPr>
         <p:spPr>
           <a:xfrm>
-            <a:off x="762000" y="10345801"/>
-            <a:ext cx="8890000" cy="203200"/>
+            <a:off x="762000" y="10308958"/>
+            <a:ext cx="8890000" cy="240042"/>
           </a:xfrm>
           <a:prstGeom prst="rect">
             <a:avLst/>
@@ -47190,8 +47190,8 @@
         </p:nvSpPr>
         <p:spPr>
           <a:xfrm>
-            <a:off x="18073751" y="10345801"/>
-            <a:ext cx="1270000" cy="203200"/>
+            <a:off x="18073751" y="10308958"/>
+            <a:ext cx="1270000" cy="240042"/>
           </a:xfrm>
           <a:prstGeom prst="rect">
             <a:avLst/>
@@ -47333,7 +47333,7 @@
         </p:nvSpPr>
         <p:spPr>
           <a:xfrm>
-            <a:off x="762000" y="6185202"/>
+            <a:off x="762000" y="6166781"/>
             <a:ext cx="9036875" cy="184647"/>
           </a:xfrm>
           <a:prstGeom prst="rect">
@@ -47372,7 +47372,7 @@
         </p:nvSpPr>
         <p:spPr>
           <a:xfrm>
-            <a:off x="762000" y="6574376"/>
+            <a:off x="762000" y="6555955"/>
             <a:ext cx="9036875" cy="430844"/>
           </a:xfrm>
           <a:prstGeom prst="rect">
@@ -47411,7 +47411,7 @@
         </p:nvSpPr>
         <p:spPr>
           <a:xfrm>
-            <a:off x="762000" y="7513221"/>
+            <a:off x="762000" y="7494800"/>
             <a:ext cx="9036875" cy="184647"/>
           </a:xfrm>
           <a:prstGeom prst="rect">
@@ -47450,7 +47450,7 @@
         </p:nvSpPr>
         <p:spPr>
           <a:xfrm>
-            <a:off x="762000" y="7902395"/>
+            <a:off x="762000" y="7883974"/>
             <a:ext cx="9036875" cy="430844"/>
           </a:xfrm>
           <a:prstGeom prst="rect">
@@ -47489,7 +47489,7 @@
         </p:nvSpPr>
         <p:spPr>
           <a:xfrm>
-            <a:off x="10306875" y="6185202"/>
+            <a:off x="10306875" y="6166781"/>
             <a:ext cx="9036875" cy="184647"/>
           </a:xfrm>
           <a:prstGeom prst="rect">
@@ -47528,7 +47528,7 @@
         </p:nvSpPr>
         <p:spPr>
           <a:xfrm>
-            <a:off x="10306875" y="6574376"/>
+            <a:off x="10306875" y="6555955"/>
             <a:ext cx="9036875" cy="430844"/>
           </a:xfrm>
           <a:prstGeom prst="rect">
@@ -47567,7 +47567,7 @@
         </p:nvSpPr>
         <p:spPr>
           <a:xfrm>
-            <a:off x="10306875" y="7513221"/>
+            <a:off x="10306875" y="7494800"/>
             <a:ext cx="9036875" cy="184647"/>
           </a:xfrm>
           <a:prstGeom prst="rect">
@@ -47606,7 +47606,7 @@
         </p:nvSpPr>
         <p:spPr>
           <a:xfrm>
-            <a:off x="10306875" y="7902395"/>
+            <a:off x="10306875" y="7883974"/>
             <a:ext cx="9036875" cy="430844"/>
           </a:xfrm>
           <a:prstGeom prst="rect">
@@ -47645,8 +47645,8 @@
         </p:nvSpPr>
         <p:spPr>
           <a:xfrm>
-            <a:off x="762000" y="10345801"/>
-            <a:ext cx="8890000" cy="203200"/>
+            <a:off x="762000" y="10308958"/>
+            <a:ext cx="8890000" cy="240042"/>
           </a:xfrm>
           <a:prstGeom prst="rect">
             <a:avLst/>
@@ -47684,8 +47684,8 @@
         </p:nvSpPr>
         <p:spPr>
           <a:xfrm>
-            <a:off x="18073751" y="10345801"/>
-            <a:ext cx="1270000" cy="203200"/>
+            <a:off x="18073751" y="10308958"/>
+            <a:ext cx="1270000" cy="240042"/>
           </a:xfrm>
           <a:prstGeom prst="rect">
             <a:avLst/>
@@ -47933,7 +47933,7 @@
         </p:nvSpPr>
         <p:spPr>
           <a:xfrm>
-            <a:off x="762000" y="6185202"/>
+            <a:off x="762000" y="6166781"/>
             <a:ext cx="9036875" cy="184647"/>
           </a:xfrm>
           <a:prstGeom prst="rect">
@@ -47972,7 +47972,7 @@
         </p:nvSpPr>
         <p:spPr>
           <a:xfrm>
-            <a:off x="762000" y="6574376"/>
+            <a:off x="762000" y="6555955"/>
             <a:ext cx="9036875" cy="430844"/>
           </a:xfrm>
           <a:prstGeom prst="rect">
@@ -48011,7 +48011,7 @@
         </p:nvSpPr>
         <p:spPr>
           <a:xfrm>
-            <a:off x="762000" y="7513221"/>
+            <a:off x="762000" y="7494800"/>
             <a:ext cx="9036875" cy="184647"/>
           </a:xfrm>
           <a:prstGeom prst="rect">
@@ -48050,7 +48050,7 @@
         </p:nvSpPr>
         <p:spPr>
           <a:xfrm>
-            <a:off x="762000" y="7902395"/>
+            <a:off x="762000" y="7883974"/>
             <a:ext cx="9036875" cy="430844"/>
           </a:xfrm>
           <a:prstGeom prst="rect">
@@ -48089,7 +48089,7 @@
         </p:nvSpPr>
         <p:spPr>
           <a:xfrm>
-            <a:off x="10306875" y="6185202"/>
+            <a:off x="10306875" y="6166781"/>
             <a:ext cx="9036875" cy="184647"/>
           </a:xfrm>
           <a:prstGeom prst="rect">
@@ -48128,7 +48128,7 @@
         </p:nvSpPr>
         <p:spPr>
           <a:xfrm>
-            <a:off x="10306875" y="6574376"/>
+            <a:off x="10306875" y="6555955"/>
             <a:ext cx="9036875" cy="430844"/>
           </a:xfrm>
           <a:prstGeom prst="rect">
@@ -48167,7 +48167,7 @@
         </p:nvSpPr>
         <p:spPr>
           <a:xfrm>
-            <a:off x="10306875" y="7513221"/>
+            <a:off x="10306875" y="7494800"/>
             <a:ext cx="9036875" cy="184647"/>
           </a:xfrm>
           <a:prstGeom prst="rect">
@@ -48206,7 +48206,7 @@
         </p:nvSpPr>
         <p:spPr>
           <a:xfrm>
-            <a:off x="10306875" y="7902395"/>
+            <a:off x="10306875" y="7883974"/>
             <a:ext cx="9036875" cy="430844"/>
           </a:xfrm>
           <a:prstGeom prst="rect">
@@ -48245,8 +48245,8 @@
         </p:nvSpPr>
         <p:spPr>
           <a:xfrm>
-            <a:off x="762000" y="10345801"/>
-            <a:ext cx="8890000" cy="203200"/>
+            <a:off x="762000" y="10308958"/>
+            <a:ext cx="8890000" cy="240042"/>
           </a:xfrm>
           <a:prstGeom prst="rect">
             <a:avLst/>
@@ -48284,8 +48284,8 @@
         </p:nvSpPr>
         <p:spPr>
           <a:xfrm>
-            <a:off x="18073751" y="10345801"/>
-            <a:ext cx="1270000" cy="203200"/>
+            <a:off x="18073751" y="10308958"/>
+            <a:ext cx="1270000" cy="240042"/>
           </a:xfrm>
           <a:prstGeom prst="rect">
             <a:avLst/>
